--- a/VKR/presentation/presentation_zaschita_mtusi.pptx
+++ b/VKR/presentation/presentation_zaschita_mtusi.pptx
@@ -4,6 +4,9 @@
   <p:sldMasterIdLst>
     <p:sldMasterId id="2147483648" r:id="rId1"/>
   </p:sldMasterIdLst>
+  <p:notesMasterIdLst>
+    <p:notesMasterId r:id="rId14"/>
+  </p:notesMasterIdLst>
   <p:sldIdLst>
     <p:sldId id="256" r:id="rId2"/>
     <p:sldId id="257" r:id="rId3"/>
@@ -18,10 +21,7 @@
     <p:sldId id="266" r:id="rId12"/>
     <p:sldId id="267" r:id="rId13"/>
   </p:sldIdLst>
-  <p:notesMasterIdLst>
-    <p:notesMasterId r:id="rId14"/>
-  </p:notesMasterIdLst>
-  <p:sldSz cx="9144000" cy="5143500"/>
+  <p:sldSz cx="9144000" cy="5143500" type="screen16x9"/>
   <p:notesSz cx="5143500" cy="9144000"/>
   <p:defaultTextStyle>
     <a:lvl1pPr marL="0" algn="l" defTabSz="914400" rtl="0" eaLnBrk="1" latinLnBrk="0" hangingPunct="1">
@@ -115,13 +115,20 @@
       </a:defRPr>
     </a:lvl9pPr>
   </p:defaultTextStyle>
+  <p:extLst>
+    <p:ext uri="{EFAFB233-063F-42B5-8137-9DF3F51BA10A}">
+      <p15:sldGuideLst xmlns:p15="http://schemas.microsoft.com/office/powerpoint/2012/main"/>
+    </p:ext>
+  </p:extLst>
 </p:presentation>
 </file>
 
 <file path=ppt/charts/chart1.xml><?xml version="1.0" encoding="utf-8"?>
-<c:chartSpace xmlns:c="http://schemas.openxmlformats.org/drawingml/2006/chart" xmlns:a="http://schemas.openxmlformats.org/drawingml/2006/main" xmlns:r="http://schemas.openxmlformats.org/officeDocument/2006/relationships">
+<c:chartSpace xmlns:c="http://schemas.openxmlformats.org/drawingml/2006/chart" xmlns:a="http://schemas.openxmlformats.org/drawingml/2006/main" xmlns:r="http://schemas.openxmlformats.org/officeDocument/2006/relationships" xmlns:c16r2="http://schemas.microsoft.com/office/drawing/2015/06/chart">
   <c:date1904 val="0"/>
+  <c:lang val="ru-RU"/>
   <c:roundedCorners val="1"/>
+  <c:style val="2"/>
   <c:chart>
     <c:title>
       <c:tx>
@@ -138,7 +145,7 @@
               </a:defRPr>
             </a:pPr>
             <a:r>
-              <a:rPr sz="1300" b="0" i="0" u="none" strike="noStrike">
+              <a:rPr lang="ru-RU" sz="1300" b="0" i="0" u="none" strike="noStrike">
                 <a:solidFill>
                   <a:srgbClr val="372579"/>
                 </a:solidFill>
@@ -149,7 +156,6 @@
           </a:p>
         </c:rich>
       </c:tx>
-      <c:layout/>
       <c:overlay val="0"/>
     </c:title>
     <c:autoTitleDeleted val="0"/>
@@ -180,40 +186,15 @@
             <a:effectLst/>
           </c:spPr>
           <c:invertIfNegative val="0"/>
-          <c:dLbls>
-            <c:numFmt formatCode="#,##0" sourceLinked="0"/>
-            <c:txPr>
-              <a:bodyPr/>
-              <a:lstStyle/>
-              <a:p>
-                <a:pPr>
-                  <a:defRPr b="0" i="0" strike="noStrike" sz="1200" u="none">
-                    <a:solidFill>
-                      <a:srgbClr val="24184E"/>
-                    </a:solidFill>
-                    <a:latin typeface="Montserrat SemiBold"/>
-                  </a:defRPr>
-                </a:pPr>
-              </a:p>
-            </c:txPr>
-            <c:showLegendKey val="0"/>
-            <c:showVal val="1"/>
-            <c:showCatName val="0"/>
-            <c:showSerName val="0"/>
-            <c:showPercent val="0"/>
-            <c:showBubbleSize val="0"/>
-            <c:showLeaderLines val="0"/>
-          </c:dLbls>
           <c:dPt>
             <c:idx val="0"/>
             <c:invertIfNegative val="0"/>
             <c:bubble3D val="0"/>
-            <c:spPr>
-              <a:solidFill>
-                <a:srgbClr val="8C64D8"/>
-              </a:solidFill>
-              <a:effectLst/>
-            </c:spPr>
+            <c:extLst>
+              <c:ext xmlns:c16="http://schemas.microsoft.com/office/drawing/2014/chart" uri="{C3380CC4-5D6E-409C-BE32-E72D297353CC}">
+                <c16:uniqueId val="{00000001-DFA9-4695-BBB1-DAABF6DE7709}"/>
+              </c:ext>
+            </c:extLst>
           </c:dPt>
           <c:dPt>
             <c:idx val="1"/>
@@ -225,6 +206,11 @@
               </a:solidFill>
               <a:effectLst/>
             </c:spPr>
+            <c:extLst>
+              <c:ext xmlns:c16="http://schemas.microsoft.com/office/drawing/2014/chart" uri="{C3380CC4-5D6E-409C-BE32-E72D297353CC}">
+                <c16:uniqueId val="{00000003-DFA9-4695-BBB1-DAABF6DE7709}"/>
+              </c:ext>
+            </c:extLst>
           </c:dPt>
           <c:dPt>
             <c:idx val="2"/>
@@ -236,25 +222,65 @@
               </a:solidFill>
               <a:effectLst/>
             </c:spPr>
+            <c:extLst>
+              <c:ext xmlns:c16="http://schemas.microsoft.com/office/drawing/2014/chart" uri="{C3380CC4-5D6E-409C-BE32-E72D297353CC}">
+                <c16:uniqueId val="{00000005-DFA9-4695-BBB1-DAABF6DE7709}"/>
+              </c:ext>
+            </c:extLst>
           </c:dPt>
+          <c:dLbls>
+            <c:numFmt formatCode="#,##0" sourceLinked="0"/>
+            <c:spPr>
+              <a:noFill/>
+              <a:ln>
+                <a:noFill/>
+              </a:ln>
+              <a:effectLst/>
+            </c:spPr>
+            <c:txPr>
+              <a:bodyPr/>
+              <a:lstStyle/>
+              <a:p>
+                <a:pPr>
+                  <a:defRPr sz="1200" b="0" i="0" u="none" strike="noStrike">
+                    <a:solidFill>
+                      <a:srgbClr val="24184E"/>
+                    </a:solidFill>
+                    <a:latin typeface="Montserrat SemiBold"/>
+                  </a:defRPr>
+                </a:pPr>
+                <a:endParaRPr lang="ru-RU"/>
+              </a:p>
+            </c:txPr>
+            <c:showLegendKey val="0"/>
+            <c:showVal val="1"/>
+            <c:showCatName val="0"/>
+            <c:showSerName val="0"/>
+            <c:showPercent val="0"/>
+            <c:showBubbleSize val="0"/>
+            <c:showLeaderLines val="0"/>
+            <c:extLst>
+              <c:ext xmlns:c15="http://schemas.microsoft.com/office/drawing/2012/chart" uri="{CE6537A1-D6FC-4f65-9D91-7224C49458BB}">
+                <c15:showLeaderLines val="0"/>
+              </c:ext>
+            </c:extLst>
+          </c:dLbls>
           <c:cat>
-            <c:multiLvlStrRef>
+            <c:strRef>
               <c:f>Sheet1!$A$2:$A$4</c:f>
-              <c:multiLvlStrCache>
+              <c:strCache>
                 <c:ptCount val="3"/>
-                <c:lvl>
-                  <c:pt idx="0">
-                    <c:v>Naive baseline</c:v>
-                  </c:pt>
-                  <c:pt idx="1">
-                    <c:v>LinearRegression</c:v>
-                  </c:pt>
-                  <c:pt idx="2">
-                    <c:v>LightGBM</c:v>
-                  </c:pt>
-                </c:lvl>
-              </c:multiLvlStrCache>
-            </c:multiLvlStrRef>
+                <c:pt idx="0">
+                  <c:v>Naive baseline</c:v>
+                </c:pt>
+                <c:pt idx="1">
+                  <c:v>LinearRegression</c:v>
+                </c:pt>
+                <c:pt idx="2">
+                  <c:v>LightGBM</c:v>
+                </c:pt>
+              </c:strCache>
+            </c:strRef>
           </c:cat>
           <c:val>
             <c:numRef>
@@ -266,44 +292,31 @@
                   <c:v>2.359</c:v>
                 </c:pt>
                 <c:pt idx="1">
-                  <c:v>2.154</c:v>
+                  <c:v>2.1539999999999999</c:v>
                 </c:pt>
                 <c:pt idx="2">
-                  <c:v>1.437</c:v>
+                  <c:v>1.4370000000000001</c:v>
                 </c:pt>
               </c:numCache>
             </c:numRef>
           </c:val>
+          <c:extLst>
+            <c:ext xmlns:c16="http://schemas.microsoft.com/office/drawing/2014/chart" uri="{C3380CC4-5D6E-409C-BE32-E72D297353CC}">
+              <c16:uniqueId val="{00000006-DFA9-4695-BBB1-DAABF6DE7709}"/>
+            </c:ext>
+          </c:extLst>
         </c:ser>
         <c:dLbls>
-          <c:numFmt formatCode="#,##0" sourceLinked="0"/>
-          <c:txPr>
-            <a:bodyPr/>
-            <a:lstStyle/>
-            <a:p>
-              <a:pPr>
-                <a:defRPr b="0" i="0" strike="noStrike" sz="1200" u="none">
-                  <a:solidFill>
-                    <a:srgbClr val="24184E"/>
-                  </a:solidFill>
-                  <a:latin typeface="Montserrat SemiBold"/>
-                </a:defRPr>
-              </a:pPr>
-            </a:p>
-          </c:txPr>
           <c:showLegendKey val="0"/>
           <c:showVal val="1"/>
           <c:showCatName val="0"/>
           <c:showSerName val="0"/>
           <c:showPercent val="0"/>
           <c:showBubbleSize val="0"/>
-          <c:showLeaderLines val="0"/>
         </c:dLbls>
         <c:gapWidth val="150"/>
-        <c:overlap val="0"/>
         <c:axId val="2094734554"/>
         <c:axId val="2094734552"/>
-        <c:axId val="2094734556"/>
       </c:barChart>
       <c:catAx>
         <c:axId val="2094734554"/>
@@ -344,6 +357,7 @@
         <c:crosses val="autoZero"/>
         <c:auto val="1"/>
         <c:lblAlgn val="ctr"/>
+        <c:lblOffset val="100"/>
         <c:noMultiLvlLbl val="1"/>
       </c:catAx>
       <c:valAx>
@@ -408,6 +422,7 @@
     </c:plotArea>
     <c:plotVisOnly val="1"/>
     <c:dispBlanksAs val="span"/>
+    <c:showDLblsOverMax val="1"/>
   </c:chart>
   <c:spPr>
     <a:solidFill>
@@ -446,234 +461,10 @@
           <a:chExt cx="0" cy="0"/>
         </a:xfrm>
       </p:grpSpPr>
-      <p:sp>
-        <p:nvSpPr>
-          <p:cNvPr id="2" name="Header Placeholder 1"/>
-          <p:cNvSpPr>
-            <a:spLocks noGrp="1"/>
-          </p:cNvSpPr>
-          <p:nvPr>
-            <p:ph type="hdr" sz="quarter"/>
-          </p:nvPr>
-        </p:nvSpPr>
-        <p:spPr>
-          <a:xfrm>
-            <a:off x="0" y="0"/>
-            <a:ext cx="2971800" cy="458788"/>
-          </a:xfrm>
-          <a:prstGeom prst="rect">
-            <a:avLst/>
-          </a:prstGeom>
-        </p:spPr>
-        <p:txBody>
-          <a:bodyPr vert="horz" lIns="91440" tIns="45720" rIns="91440" bIns="45720" rtlCol="0"/>
-          <a:lstStyle>
-            <a:lvl1pPr algn="l">
-              <a:defRPr sz="1200"/>
-            </a:lvl1pPr>
-          </a:lstStyle>
-          <a:p>
-            <a:endParaRPr lang="en-US"/>
-          </a:p>
-        </p:txBody>
-      </p:sp>
-      <p:sp>
-        <p:nvSpPr>
-          <p:cNvPr id="3" name="Date Placeholder 2"/>
-          <p:cNvSpPr>
-            <a:spLocks noGrp="1"/>
-          </p:cNvSpPr>
-          <p:nvPr>
-            <p:ph type="dt" idx="1"/>
-          </p:nvPr>
-        </p:nvSpPr>
-        <p:spPr>
-          <a:xfrm>
-            <a:off x="3884613" y="0"/>
-            <a:ext cx="2971800" cy="458788"/>
-          </a:xfrm>
-          <a:prstGeom prst="rect">
-            <a:avLst/>
-          </a:prstGeom>
-        </p:spPr>
-        <p:txBody>
-          <a:bodyPr vert="horz" lIns="91440" tIns="45720" rIns="91440" bIns="45720" rtlCol="0"/>
-          <a:lstStyle>
-            <a:lvl1pPr algn="r">
-              <a:defRPr sz="1200"/>
-            </a:lvl1pPr>
-          </a:lstStyle>
-          <a:p>
-            <a:fld id="{5282F153-3F37-0F45-9E97-73ACFA13230C}" type="datetimeFigureOut">
-              <a:rPr lang="en-US"/>
-              <a:t>7/23/19</a:t>
-            </a:fld>
-            <a:endParaRPr lang="en-US"/>
-          </a:p>
-        </p:txBody>
-      </p:sp>
-      <p:sp>
-        <p:nvSpPr>
-          <p:cNvPr id="4" name="Slide Image Placeholder 3"/>
-          <p:cNvSpPr>
-            <a:spLocks noGrp="1" noRot="1" noChangeAspect="1"/>
-          </p:cNvSpPr>
-          <p:nvPr>
-            <p:ph type="sldImg" idx="2"/>
-          </p:nvPr>
-        </p:nvSpPr>
-        <p:spPr>
-          <a:xfrm>
-            <a:off x="685800" y="1143000"/>
-            <a:ext cx="5486400" cy="3086100"/>
-          </a:xfrm>
-          <a:prstGeom prst="rect">
-            <a:avLst/>
-          </a:prstGeom>
-          <a:noFill/>
-          <a:ln w="12700">
-            <a:solidFill>
-              <a:prstClr val="black"/>
-            </a:solidFill>
-          </a:ln>
-        </p:spPr>
-        <p:txBody>
-          <a:bodyPr vert="horz" lIns="91440" tIns="45720" rIns="91440" bIns="45720" rtlCol="0" anchor="ctr"/>
-          <a:lstStyle/>
-          <a:p>
-            <a:endParaRPr lang="en-US"/>
-          </a:p>
-        </p:txBody>
-      </p:sp>
-      <p:sp>
-        <p:nvSpPr>
-          <p:cNvPr id="5" name="Notes Placeholder 4"/>
-          <p:cNvSpPr>
-            <a:spLocks noGrp="1"/>
-          </p:cNvSpPr>
-          <p:nvPr>
-            <p:ph type="body" sz="quarter" idx="3"/>
-          </p:nvPr>
-        </p:nvSpPr>
-        <p:spPr>
-          <a:xfrm>
-            <a:off x="685800" y="4400550"/>
-            <a:ext cx="5486400" cy="3600450"/>
-          </a:xfrm>
-          <a:prstGeom prst="rect">
-            <a:avLst/>
-          </a:prstGeom>
-        </p:spPr>
-        <p:txBody>
-          <a:bodyPr vert="horz" lIns="91440" tIns="45720" rIns="91440" bIns="45720" rtlCol="0"/>
-          <a:lstStyle/>
-          <a:p>
-            <a:pPr lvl="0"/>
-            <a:r>
-              <a:rPr lang="en-US"/>
-              <a:t>Click to edit Master text styles</a:t>
-            </a:r>
-          </a:p>
-          <a:p>
-            <a:pPr lvl="1"/>
-            <a:r>
-              <a:rPr lang="en-US"/>
-              <a:t>Second level</a:t>
-            </a:r>
-          </a:p>
-          <a:p>
-            <a:pPr lvl="2"/>
-            <a:r>
-              <a:rPr lang="en-US"/>
-              <a:t>Third level</a:t>
-            </a:r>
-          </a:p>
-          <a:p>
-            <a:pPr lvl="3"/>
-            <a:r>
-              <a:rPr lang="en-US"/>
-              <a:t>Fourth level</a:t>
-            </a:r>
-          </a:p>
-          <a:p>
-            <a:pPr lvl="4"/>
-            <a:r>
-              <a:rPr lang="en-US"/>
-              <a:t>Fifth level</a:t>
-            </a:r>
-          </a:p>
-        </p:txBody>
-      </p:sp>
-      <p:sp>
-        <p:nvSpPr>
-          <p:cNvPr id="6" name="Footer Placeholder 5"/>
-          <p:cNvSpPr>
-            <a:spLocks noGrp="1"/>
-          </p:cNvSpPr>
-          <p:nvPr>
-            <p:ph type="ftr" sz="quarter" idx="4"/>
-          </p:nvPr>
-        </p:nvSpPr>
-        <p:spPr>
-          <a:xfrm>
-            <a:off x="0" y="8685213"/>
-            <a:ext cx="2971800" cy="458787"/>
-          </a:xfrm>
-          <a:prstGeom prst="rect">
-            <a:avLst/>
-          </a:prstGeom>
-        </p:spPr>
-        <p:txBody>
-          <a:bodyPr vert="horz" lIns="91440" tIns="45720" rIns="91440" bIns="45720" rtlCol="0" anchor="b"/>
-          <a:lstStyle>
-            <a:lvl1pPr algn="l">
-              <a:defRPr sz="1200"/>
-            </a:lvl1pPr>
-          </a:lstStyle>
-          <a:p>
-            <a:endParaRPr lang="en-US"/>
-          </a:p>
-        </p:txBody>
-      </p:sp>
-      <p:sp>
-        <p:nvSpPr>
-          <p:cNvPr id="7" name="Slide Number Placeholder 6"/>
-          <p:cNvSpPr>
-            <a:spLocks noGrp="1"/>
-          </p:cNvSpPr>
-          <p:nvPr>
-            <p:ph type="sldNum" sz="quarter" idx="5"/>
-          </p:nvPr>
-        </p:nvSpPr>
-        <p:spPr>
-          <a:xfrm>
-            <a:off x="3884613" y="8685213"/>
-            <a:ext cx="2971800" cy="458787"/>
-          </a:xfrm>
-          <a:prstGeom prst="rect">
-            <a:avLst/>
-          </a:prstGeom>
-        </p:spPr>
-        <p:txBody>
-          <a:bodyPr vert="horz" lIns="91440" tIns="45720" rIns="91440" bIns="45720" rtlCol="0" anchor="b"/>
-          <a:lstStyle>
-            <a:lvl1pPr algn="r">
-              <a:defRPr sz="1200"/>
-            </a:lvl1pPr>
-          </a:lstStyle>
-          <a:p>
-            <a:fld id="{CE5E9CC1-C706-0F49-92D6-E571CC5EEA8F}" type="slidenum">
-              <a:rPr lang="en-US"/>
-              <a:t>‹#›</a:t>
-            </a:fld>
-            <a:endParaRPr lang="en-US"/>
-          </a:p>
-        </p:txBody>
-      </p:sp>
     </p:spTree>
     <p:extLst>
       <p:ext uri="{BB962C8B-B14F-4D97-AF65-F5344CB8AC3E}">
-        <p14:creationId xmlns:p14="http://schemas.microsoft.com/office/powerpoint/2010/main" val="1024086991"/>
+        <p14:creationId xmlns:p14="http://schemas.microsoft.com/office/powerpoint/2010/main" val="2431587369"/>
       </p:ext>
     </p:extLst>
   </p:cSld>
@@ -817,10 +608,6 @@
           <a:bodyPr/>
           <a:lstStyle/>
           <a:p>
-            <a:r>
-              <a:rPr lang="en-US" dirty="0"/>
-              <a:t/>
-            </a:r>
             <a:endParaRPr lang="en-US" dirty="0"/>
           </a:p>
         </p:txBody>
@@ -905,10 +692,6 @@
           <a:bodyPr/>
           <a:lstStyle/>
           <a:p>
-            <a:r>
-              <a:rPr lang="en-US" dirty="0"/>
-              <a:t/>
-            </a:r>
             <a:endParaRPr lang="en-US" dirty="0"/>
           </a:p>
         </p:txBody>
@@ -993,10 +776,6 @@
           <a:bodyPr/>
           <a:lstStyle/>
           <a:p>
-            <a:r>
-              <a:rPr lang="en-US" dirty="0"/>
-              <a:t/>
-            </a:r>
             <a:endParaRPr lang="en-US" dirty="0"/>
           </a:p>
         </p:txBody>
@@ -1081,10 +860,6 @@
           <a:bodyPr/>
           <a:lstStyle/>
           <a:p>
-            <a:r>
-              <a:rPr lang="en-US" dirty="0"/>
-              <a:t/>
-            </a:r>
             <a:endParaRPr lang="en-US" dirty="0"/>
           </a:p>
         </p:txBody>
@@ -1169,10 +944,6 @@
           <a:bodyPr/>
           <a:lstStyle/>
           <a:p>
-            <a:r>
-              <a:rPr lang="en-US" dirty="0"/>
-              <a:t/>
-            </a:r>
             <a:endParaRPr lang="en-US" dirty="0"/>
           </a:p>
         </p:txBody>
@@ -1257,10 +1028,6 @@
           <a:bodyPr/>
           <a:lstStyle/>
           <a:p>
-            <a:r>
-              <a:rPr lang="en-US" dirty="0"/>
-              <a:t/>
-            </a:r>
             <a:endParaRPr lang="en-US" dirty="0"/>
           </a:p>
         </p:txBody>
@@ -1345,10 +1112,6 @@
           <a:bodyPr/>
           <a:lstStyle/>
           <a:p>
-            <a:r>
-              <a:rPr lang="en-US" dirty="0"/>
-              <a:t/>
-            </a:r>
             <a:endParaRPr lang="en-US" dirty="0"/>
           </a:p>
         </p:txBody>
@@ -1433,10 +1196,6 @@
           <a:bodyPr/>
           <a:lstStyle/>
           <a:p>
-            <a:r>
-              <a:rPr lang="en-US" dirty="0"/>
-              <a:t/>
-            </a:r>
             <a:endParaRPr lang="en-US" dirty="0"/>
           </a:p>
         </p:txBody>
@@ -1521,10 +1280,6 @@
           <a:bodyPr/>
           <a:lstStyle/>
           <a:p>
-            <a:r>
-              <a:rPr lang="en-US" dirty="0"/>
-              <a:t/>
-            </a:r>
             <a:endParaRPr lang="en-US" dirty="0"/>
           </a:p>
         </p:txBody>
@@ -1609,10 +1364,6 @@
           <a:bodyPr/>
           <a:lstStyle/>
           <a:p>
-            <a:r>
-              <a:rPr lang="en-US" dirty="0"/>
-              <a:t/>
-            </a:r>
             <a:endParaRPr lang="en-US" dirty="0"/>
           </a:p>
         </p:txBody>
@@ -1697,10 +1448,6 @@
           <a:bodyPr/>
           <a:lstStyle/>
           <a:p>
-            <a:r>
-              <a:rPr lang="en-US" dirty="0"/>
-              <a:t/>
-            </a:r>
             <a:endParaRPr lang="en-US" dirty="0"/>
           </a:p>
         </p:txBody>
@@ -1785,10 +1532,6 @@
           <a:bodyPr/>
           <a:lstStyle/>
           <a:p>
-            <a:r>
-              <a:rPr lang="en-US" dirty="0"/>
-              <a:t/>
-            </a:r>
             <a:endParaRPr lang="en-US" dirty="0"/>
           </a:p>
         </p:txBody>
@@ -1862,6 +1605,11 @@
 <file path=ppt/slideMasters/slideMaster1.xml><?xml version="1.0" encoding="utf-8"?>
 <p:sldMaster xmlns:a="http://schemas.openxmlformats.org/drawingml/2006/main" xmlns:r="http://schemas.openxmlformats.org/officeDocument/2006/relationships" xmlns:p="http://schemas.openxmlformats.org/presentationml/2006/main">
   <p:cSld>
+    <p:bg>
+      <p:bgRef idx="1001">
+        <a:schemeClr val="bg1"/>
+      </p:bgRef>
+    </p:bg>
     <p:spTree>
       <p:nvGrpSpPr>
         <p:cNvPr id="1" name=""/>
@@ -2144,6 +1892,7 @@
         <a:solidFill>
           <a:srgbClr val="24184E"/>
         </a:solidFill>
+        <a:effectLst/>
       </p:bgPr>
     </p:bg>
     <p:spTree>
@@ -2184,6 +1933,13 @@
             <a:prstDash val="solid"/>
           </a:ln>
         </p:spPr>
+        <p:txBody>
+          <a:bodyPr/>
+          <a:lstStyle/>
+          <a:p>
+            <a:endParaRPr lang="ru-RU"/>
+          </a:p>
+        </p:txBody>
       </p:sp>
       <p:sp>
         <p:nvSpPr>
@@ -2209,6 +1965,13 @@
             <a:prstDash val="solid"/>
           </a:ln>
         </p:spPr>
+        <p:txBody>
+          <a:bodyPr/>
+          <a:lstStyle/>
+          <a:p>
+            <a:endParaRPr lang="ru-RU"/>
+          </a:p>
+        </p:txBody>
       </p:sp>
       <p:sp>
         <p:nvSpPr>
@@ -2234,6 +1997,13 @@
             <a:prstDash val="solid"/>
           </a:ln>
         </p:spPr>
+        <p:txBody>
+          <a:bodyPr/>
+          <a:lstStyle/>
+          <a:p>
+            <a:endParaRPr lang="ru-RU"/>
+          </a:p>
+        </p:txBody>
       </p:sp>
       <p:sp>
         <p:nvSpPr>
@@ -2256,11 +2026,11 @@
           <a:bodyPr wrap="square" rtlCol="0" anchor="ctr"/>
           <a:lstStyle/>
           <a:p>
-            <a:pPr algn="l" indent="0" marL="0">
+            <a:pPr marL="0" indent="0" algn="l">
               <a:buNone/>
             </a:pPr>
             <a:r>
-              <a:rPr lang="en-US" sz="1400" b="1" spc="200" kern="0" dirty="0">
+              <a:rPr lang="en-US" sz="1400" b="1" kern="0" spc="200" dirty="0">
                 <a:solidFill>
                   <a:srgbClr val="FFFFFF"/>
                 </a:solidFill>
@@ -2295,11 +2065,11 @@
           <a:bodyPr wrap="square" rtlCol="0" anchor="ctr"/>
           <a:lstStyle/>
           <a:p>
-            <a:pPr algn="l" indent="0" marL="0">
+            <a:pPr marL="0" indent="0" algn="l">
               <a:buNone/>
             </a:pPr>
             <a:r>
-              <a:rPr lang="en-US" sz="1400" b="1" spc="200" kern="0" dirty="0">
+              <a:rPr lang="en-US" sz="1400" b="1" kern="0" spc="200" dirty="0">
                 <a:solidFill>
                   <a:srgbClr val="FFFFFF"/>
                 </a:solidFill>
@@ -2334,7 +2104,7 @@
           <a:bodyPr wrap="square" rtlCol="0" anchor="ctr"/>
           <a:lstStyle/>
           <a:p>
-            <a:pPr algn="l" indent="0" marL="0">
+            <a:pPr marL="0" indent="0" algn="l">
               <a:buNone/>
             </a:pPr>
             <a:r>
@@ -2373,7 +2143,7 @@
           <a:bodyPr wrap="square" rtlCol="0" anchor="t"/>
           <a:lstStyle/>
           <a:p>
-            <a:pPr algn="l" indent="0" marL="0">
+            <a:pPr marL="0" indent="0" algn="l">
               <a:spcAft>
                 <a:spcPts val="400"/>
               </a:spcAft>
@@ -2393,7 +2163,7 @@
             <a:endParaRPr lang="en-US" sz="2400" dirty="0"/>
           </a:p>
           <a:p>
-            <a:pPr algn="l" indent="0" marL="0">
+            <a:pPr marL="0" indent="0" algn="l">
               <a:spcAft>
                 <a:spcPts val="400"/>
               </a:spcAft>
@@ -2413,7 +2183,7 @@
             <a:endParaRPr lang="en-US" sz="2400" dirty="0"/>
           </a:p>
           <a:p>
-            <a:pPr algn="l" indent="0" marL="0">
+            <a:pPr marL="0" indent="0" algn="l">
               <a:spcAft>
                 <a:spcPts val="400"/>
               </a:spcAft>
@@ -2433,7 +2203,7 @@
             <a:endParaRPr lang="en-US" sz="2400" dirty="0"/>
           </a:p>
           <a:p>
-            <a:pPr algn="l" indent="0" marL="0">
+            <a:pPr marL="0" indent="0" algn="l">
               <a:spcAft>
                 <a:spcPts val="400"/>
               </a:spcAft>
@@ -2476,6 +2246,13 @@
             <a:prstDash val="solid"/>
           </a:ln>
         </p:spPr>
+        <p:txBody>
+          <a:bodyPr/>
+          <a:lstStyle/>
+          <a:p>
+            <a:endParaRPr lang="ru-RU"/>
+          </a:p>
+        </p:txBody>
       </p:sp>
       <p:sp>
         <p:nvSpPr>
@@ -2485,7 +2262,7 @@
         </p:nvSpPr>
         <p:spPr>
           <a:xfrm>
-            <a:off x="914400" y="3840480"/>
+            <a:off x="914400" y="4041271"/>
             <a:ext cx="7772400" cy="914400"/>
           </a:xfrm>
           <a:prstGeom prst="rect">
@@ -2498,7 +2275,7 @@
           <a:bodyPr wrap="square" rtlCol="0" anchor="t"/>
           <a:lstStyle/>
           <a:p>
-            <a:pPr algn="l" indent="0" marL="0">
+            <a:pPr marL="0" indent="0" algn="l">
               <a:spcAft>
                 <a:spcPts val="200"/>
               </a:spcAft>
@@ -2515,27 +2292,52 @@
               </a:rPr>
               <a:t>Студент: </a:t>
             </a:r>
-            <a:pPr algn="l" indent="0" marL="0">
+            <a:r>
+              <a:rPr lang="ru-RU" sz="1300" dirty="0">
+                <a:solidFill>
+                  <a:srgbClr val="FFFFFF"/>
+                </a:solidFill>
+                <a:latin typeface="Montserrat" pitchFamily="34" charset="0"/>
+                <a:ea typeface="Montserrat" pitchFamily="34" charset="-122"/>
+                <a:cs typeface="Montserrat" pitchFamily="34" charset="-120"/>
+              </a:rPr>
+              <a:t>Герасимов Александр Евгеньевич</a:t>
+            </a:r>
+            <a:endParaRPr lang="en-US" sz="1300" dirty="0"/>
+          </a:p>
+          <a:p>
+            <a:pPr marL="0" indent="0" algn="l">
               <a:spcAft>
                 <a:spcPts val="200"/>
               </a:spcAft>
               <a:buNone/>
             </a:pPr>
             <a:r>
-              <a:rPr lang="en-US" sz="1300" dirty="0">
-                <a:solidFill>
-                  <a:srgbClr val="FFFFFF"/>
+              <a:rPr lang="en-US" sz="1300" b="1" dirty="0">
+                <a:solidFill>
+                  <a:srgbClr val="E8E0F7"/>
                 </a:solidFill>
                 <a:latin typeface="Montserrat" pitchFamily="34" charset="0"/>
                 <a:ea typeface="Montserrat" pitchFamily="34" charset="-122"/>
                 <a:cs typeface="Montserrat" pitchFamily="34" charset="-120"/>
               </a:rPr>
-              <a:t>[ФИО студента]</a:t>
+              <a:t>Группа: </a:t>
+            </a:r>
+            <a:r>
+              <a:rPr lang="ru-RU" sz="1300" dirty="0">
+                <a:solidFill>
+                  <a:srgbClr val="FFFFFF"/>
+                </a:solidFill>
+                <a:latin typeface="Montserrat" pitchFamily="34" charset="0"/>
+                <a:ea typeface="Montserrat" pitchFamily="34" charset="-122"/>
+                <a:cs typeface="Montserrat" pitchFamily="34" charset="-120"/>
+              </a:rPr>
+              <a:t>БЭИ2202</a:t>
             </a:r>
             <a:endParaRPr lang="en-US" sz="1300" dirty="0"/>
           </a:p>
           <a:p>
-            <a:pPr algn="l" indent="0" marL="0">
+            <a:pPr marL="0" indent="0" algn="l">
               <a:spcAft>
                 <a:spcPts val="200"/>
               </a:spcAft>
@@ -2550,16 +2352,10 @@
                 <a:ea typeface="Montserrat" pitchFamily="34" charset="-122"/>
                 <a:cs typeface="Montserrat" pitchFamily="34" charset="-120"/>
               </a:rPr>
-              <a:t>Группа: </a:t>
-            </a:r>
-            <a:pPr algn="l" indent="0" marL="0">
-              <a:spcAft>
-                <a:spcPts val="200"/>
-              </a:spcAft>
-              <a:buNone/>
-            </a:pPr>
-            <a:r>
-              <a:rPr lang="en-US" sz="1300" dirty="0">
+              <a:t>Научный руководитель: </a:t>
+            </a:r>
+            <a:r>
+              <a:rPr lang="ru-RU" sz="1300" b="1" dirty="0">
                 <a:solidFill>
                   <a:srgbClr val="FFFFFF"/>
                 </a:solidFill>
@@ -2567,44 +2363,7 @@
                 <a:ea typeface="Montserrat" pitchFamily="34" charset="-122"/>
                 <a:cs typeface="Montserrat" pitchFamily="34" charset="-120"/>
               </a:rPr>
-              <a:t>[номер группы]</a:t>
-            </a:r>
-            <a:endParaRPr lang="en-US" sz="1300" dirty="0"/>
-          </a:p>
-          <a:p>
-            <a:pPr algn="l" indent="0" marL="0">
-              <a:spcAft>
-                <a:spcPts val="200"/>
-              </a:spcAft>
-              <a:buNone/>
-            </a:pPr>
-            <a:r>
-              <a:rPr lang="en-US" sz="1300" b="1" dirty="0">
-                <a:solidFill>
-                  <a:srgbClr val="E8E0F7"/>
-                </a:solidFill>
-                <a:latin typeface="Montserrat" pitchFamily="34" charset="0"/>
-                <a:ea typeface="Montserrat" pitchFamily="34" charset="-122"/>
-                <a:cs typeface="Montserrat" pitchFamily="34" charset="-120"/>
-              </a:rPr>
-              <a:t>Научный руководитель: </a:t>
-            </a:r>
-            <a:pPr algn="l" indent="0" marL="0">
-              <a:spcAft>
-                <a:spcPts val="200"/>
-              </a:spcAft>
-              <a:buNone/>
-            </a:pPr>
-            <a:r>
-              <a:rPr lang="en-US" sz="1300" dirty="0">
-                <a:solidFill>
-                  <a:srgbClr val="FFFFFF"/>
-                </a:solidFill>
-                <a:latin typeface="Montserrat" pitchFamily="34" charset="0"/>
-                <a:ea typeface="Montserrat" pitchFamily="34" charset="-122"/>
-                <a:cs typeface="Montserrat" pitchFamily="34" charset="-120"/>
-              </a:rPr>
-              <a:t>[ФИО, степень]</a:t>
+              <a:t>доцент к.т.н. Карташов Д.А.</a:t>
             </a:r>
             <a:endParaRPr lang="en-US" sz="1300" dirty="0"/>
           </a:p>
@@ -2631,7 +2390,7 @@
           <a:bodyPr wrap="square" rtlCol="0" anchor="ctr"/>
           <a:lstStyle/>
           <a:p>
-            <a:pPr algn="l" indent="0" marL="0">
+            <a:pPr marL="0" indent="0" algn="l">
               <a:buNone/>
             </a:pPr>
             <a:r>
@@ -2665,6 +2424,7 @@
         <a:solidFill>
           <a:srgbClr val="FFFFFF"/>
         </a:solidFill>
+        <a:effectLst/>
       </p:bgPr>
     </p:bg>
     <p:spTree>
@@ -2705,6 +2465,13 @@
             <a:prstDash val="solid"/>
           </a:ln>
         </p:spPr>
+        <p:txBody>
+          <a:bodyPr/>
+          <a:lstStyle/>
+          <a:p>
+            <a:endParaRPr lang="ru-RU"/>
+          </a:p>
+        </p:txBody>
       </p:sp>
       <p:sp>
         <p:nvSpPr>
@@ -2730,6 +2497,13 @@
             <a:prstDash val="solid"/>
           </a:ln>
         </p:spPr>
+        <p:txBody>
+          <a:bodyPr/>
+          <a:lstStyle/>
+          <a:p>
+            <a:endParaRPr lang="ru-RU"/>
+          </a:p>
+        </p:txBody>
       </p:sp>
       <p:sp>
         <p:nvSpPr>
@@ -2752,7 +2526,7 @@
           <a:bodyPr wrap="square" lIns="0" tIns="0" rIns="0" bIns="0" rtlCol="0" anchor="ctr"/>
           <a:lstStyle/>
           <a:p>
-            <a:pPr indent="0" marL="0">
+            <a:pPr marL="0" indent="0">
               <a:buNone/>
             </a:pPr>
             <a:r>
@@ -2792,6 +2566,13 @@
             <a:prstDash val="solid"/>
           </a:ln>
         </p:spPr>
+        <p:txBody>
+          <a:bodyPr/>
+          <a:lstStyle/>
+          <a:p>
+            <a:endParaRPr lang="ru-RU"/>
+          </a:p>
+        </p:txBody>
       </p:sp>
       <p:sp>
         <p:nvSpPr>
@@ -2814,7 +2595,7 @@
           <a:bodyPr wrap="square" rtlCol="0" anchor="ctr"/>
           <a:lstStyle/>
           <a:p>
-            <a:pPr algn="l" indent="0" marL="0">
+            <a:pPr marL="0" indent="0" algn="l">
               <a:buNone/>
             </a:pPr>
             <a:r>
@@ -2853,7 +2634,7 @@
           <a:bodyPr wrap="square" rtlCol="0" anchor="ctr"/>
           <a:lstStyle/>
           <a:p>
-            <a:pPr algn="r" indent="0" marL="0">
+            <a:pPr marL="0" indent="0" algn="r">
               <a:buNone/>
             </a:pPr>
             <a:r>
@@ -2892,11 +2673,11 @@
           <a:bodyPr wrap="square" rtlCol="0" anchor="ctr"/>
           <a:lstStyle/>
           <a:p>
-            <a:pPr indent="0" marL="0">
+            <a:pPr marL="0" indent="0">
               <a:buNone/>
             </a:pPr>
             <a:r>
-              <a:rPr lang="en-US" sz="1200" b="1" spc="200" kern="0" dirty="0">
+              <a:rPr lang="en-US" sz="1200" b="1" kern="0" spc="200" dirty="0">
                 <a:solidFill>
                   <a:srgbClr val="372579"/>
                 </a:solidFill>
@@ -2934,6 +2715,13 @@
             <a:prstDash val="solid"/>
           </a:ln>
         </p:spPr>
+        <p:txBody>
+          <a:bodyPr/>
+          <a:lstStyle/>
+          <a:p>
+            <a:endParaRPr lang="ru-RU"/>
+          </a:p>
+        </p:txBody>
       </p:sp>
       <p:sp>
         <p:nvSpPr>
@@ -2956,7 +2744,7 @@
           <a:bodyPr wrap="square" lIns="0" tIns="0" rIns="0" bIns="0" rtlCol="0" anchor="ctr"/>
           <a:lstStyle/>
           <a:p>
-            <a:pPr algn="ctr" indent="0" marL="0">
+            <a:pPr marL="0" indent="0" algn="ctr">
               <a:buNone/>
             </a:pPr>
             <a:r>
@@ -2995,7 +2783,7 @@
           <a:bodyPr wrap="square" lIns="0" tIns="0" rIns="0" bIns="0" rtlCol="0" anchor="ctr"/>
           <a:lstStyle/>
           <a:p>
-            <a:pPr algn="l" indent="0" marL="0">
+            <a:pPr marL="0" indent="0" algn="l">
               <a:buNone/>
             </a:pPr>
             <a:r>
@@ -3037,6 +2825,13 @@
             <a:prstDash val="solid"/>
           </a:ln>
         </p:spPr>
+        <p:txBody>
+          <a:bodyPr/>
+          <a:lstStyle/>
+          <a:p>
+            <a:endParaRPr lang="ru-RU"/>
+          </a:p>
+        </p:txBody>
       </p:sp>
       <p:sp>
         <p:nvSpPr>
@@ -3059,7 +2854,7 @@
           <a:bodyPr wrap="square" lIns="0" tIns="0" rIns="0" bIns="0" rtlCol="0" anchor="ctr"/>
           <a:lstStyle/>
           <a:p>
-            <a:pPr algn="ctr" indent="0" marL="0">
+            <a:pPr marL="0" indent="0" algn="ctr">
               <a:buNone/>
             </a:pPr>
             <a:r>
@@ -3098,7 +2893,7 @@
           <a:bodyPr wrap="square" lIns="0" tIns="0" rIns="0" bIns="0" rtlCol="0" anchor="ctr"/>
           <a:lstStyle/>
           <a:p>
-            <a:pPr algn="l" indent="0" marL="0">
+            <a:pPr marL="0" indent="0" algn="l">
               <a:buNone/>
             </a:pPr>
             <a:r>
@@ -3140,6 +2935,13 @@
             <a:prstDash val="solid"/>
           </a:ln>
         </p:spPr>
+        <p:txBody>
+          <a:bodyPr/>
+          <a:lstStyle/>
+          <a:p>
+            <a:endParaRPr lang="ru-RU"/>
+          </a:p>
+        </p:txBody>
       </p:sp>
       <p:sp>
         <p:nvSpPr>
@@ -3162,7 +2964,7 @@
           <a:bodyPr wrap="square" lIns="0" tIns="0" rIns="0" bIns="0" rtlCol="0" anchor="ctr"/>
           <a:lstStyle/>
           <a:p>
-            <a:pPr algn="ctr" indent="0" marL="0">
+            <a:pPr marL="0" indent="0" algn="ctr">
               <a:buNone/>
             </a:pPr>
             <a:r>
@@ -3201,7 +3003,7 @@
           <a:bodyPr wrap="square" lIns="0" tIns="0" rIns="0" bIns="0" rtlCol="0" anchor="ctr"/>
           <a:lstStyle/>
           <a:p>
-            <a:pPr algn="l" indent="0" marL="0">
+            <a:pPr marL="0" indent="0" algn="l">
               <a:buNone/>
             </a:pPr>
             <a:r>
@@ -3243,6 +3045,13 @@
             <a:prstDash val="solid"/>
           </a:ln>
         </p:spPr>
+        <p:txBody>
+          <a:bodyPr/>
+          <a:lstStyle/>
+          <a:p>
+            <a:endParaRPr lang="ru-RU"/>
+          </a:p>
+        </p:txBody>
       </p:sp>
       <p:sp>
         <p:nvSpPr>
@@ -3265,7 +3074,7 @@
           <a:bodyPr wrap="square" lIns="0" tIns="0" rIns="0" bIns="0" rtlCol="0" anchor="ctr"/>
           <a:lstStyle/>
           <a:p>
-            <a:pPr algn="ctr" indent="0" marL="0">
+            <a:pPr marL="0" indent="0" algn="ctr">
               <a:buNone/>
             </a:pPr>
             <a:r>
@@ -3304,7 +3113,7 @@
           <a:bodyPr wrap="square" lIns="0" tIns="0" rIns="0" bIns="0" rtlCol="0" anchor="ctr"/>
           <a:lstStyle/>
           <a:p>
-            <a:pPr algn="l" indent="0" marL="0">
+            <a:pPr marL="0" indent="0" algn="l">
               <a:buNone/>
             </a:pPr>
             <a:r>
@@ -3343,11 +3152,11 @@
           <a:bodyPr wrap="square" rtlCol="0" anchor="ctr"/>
           <a:lstStyle/>
           <a:p>
-            <a:pPr indent="0" marL="0">
+            <a:pPr marL="0" indent="0">
               <a:buNone/>
             </a:pPr>
             <a:r>
-              <a:rPr lang="en-US" sz="1200" b="1" spc="200" kern="0" dirty="0">
+              <a:rPr lang="en-US" sz="1200" b="1" kern="0" spc="200" dirty="0">
                 <a:solidFill>
                   <a:srgbClr val="372579"/>
                 </a:solidFill>
@@ -3363,7 +3172,7 @@
       </p:sp>
       <p:graphicFrame>
         <p:nvGraphicFramePr>
-          <p:cNvPr id="11" name="Table 0"/>
+          <p:cNvPr id="22" name="Table 0"/>
           <p:cNvGraphicFramePr>
             <a:graphicFrameLocks noGrp="1"/>
           </p:cNvGraphicFramePr>
@@ -3377,16 +3186,34 @@
         </p:nvGraphicFramePr>
         <p:xfrm>
           <a:off x="4754880" y="1554480"/>
-          <a:ext cx="4023360" cy="914400"/>
+          <a:ext cx="4023360" cy="1219200"/>
         </p:xfrm>
         <a:graphic>
           <a:graphicData uri="http://schemas.openxmlformats.org/drawingml/2006/table">
             <a:tbl>
               <a:tblPr/>
               <a:tblGrid>
-                <a:gridCol w="2194560"/>
-                <a:gridCol w="914400"/>
-                <a:gridCol w="914400"/>
+                <a:gridCol w="2194560">
+                  <a:extLst>
+                    <a:ext uri="{9D8B030D-6E8A-4147-A177-3AD203B41FA5}">
+                      <a16:colId xmlns:a16="http://schemas.microsoft.com/office/drawing/2014/main" val="20000"/>
+                    </a:ext>
+                  </a:extLst>
+                </a:gridCol>
+                <a:gridCol w="914400">
+                  <a:extLst>
+                    <a:ext uri="{9D8B030D-6E8A-4147-A177-3AD203B41FA5}">
+                      <a16:colId xmlns:a16="http://schemas.microsoft.com/office/drawing/2014/main" val="20001"/>
+                    </a:ext>
+                  </a:extLst>
+                </a:gridCol>
+                <a:gridCol w="914400">
+                  <a:extLst>
+                    <a:ext uri="{9D8B030D-6E8A-4147-A177-3AD203B41FA5}">
+                      <a16:colId xmlns:a16="http://schemas.microsoft.com/office/drawing/2014/main" val="20002"/>
+                    </a:ext>
+                  </a:extLst>
+                </a:gridCol>
               </a:tblGrid>
               <a:tr h="0">
                 <a:tc>
@@ -3394,7 +3221,7 @@
                     <a:bodyPr/>
                     <a:lstStyle/>
                     <a:p>
-                      <a:pPr algn="ctr" indent="0" marL="0">
+                      <a:pPr marL="0" indent="0" algn="ctr">
                         <a:buNone/>
                       </a:pPr>
                       <a:r>
@@ -3415,7 +3242,7 @@
                       </a:endParaRPr>
                     </a:p>
                   </a:txBody>
-                  <a:tcPr marL="91440" marR="91440" marT="45720" marB="45720" anchor="ctr">
+                  <a:tcPr anchor="ctr">
                     <a:lnL w="6350" cap="flat" cmpd="sng" algn="ctr">
                       <a:solidFill>
                         <a:srgbClr val="D5D0E0"/>
@@ -3462,7 +3289,7 @@
                     <a:bodyPr/>
                     <a:lstStyle/>
                     <a:p>
-                      <a:pPr algn="ctr" indent="0" marL="0">
+                      <a:pPr marL="0" indent="0" algn="ctr">
                         <a:buNone/>
                       </a:pPr>
                       <a:r>
@@ -3483,7 +3310,7 @@
                       </a:endParaRPr>
                     </a:p>
                   </a:txBody>
-                  <a:tcPr marL="91440" marR="91440" marT="45720" marB="45720" anchor="ctr">
+                  <a:tcPr anchor="ctr">
                     <a:lnL w="6350" cap="flat" cmpd="sng" algn="ctr">
                       <a:solidFill>
                         <a:srgbClr val="D5D0E0"/>
@@ -3530,7 +3357,7 @@
                     <a:bodyPr/>
                     <a:lstStyle/>
                     <a:p>
-                      <a:pPr algn="ctr" indent="0" marL="0">
+                      <a:pPr marL="0" indent="0" algn="ctr">
                         <a:buNone/>
                       </a:pPr>
                       <a:r>
@@ -3551,7 +3378,7 @@
                       </a:endParaRPr>
                     </a:p>
                   </a:txBody>
-                  <a:tcPr marL="91440" marR="91440" marT="45720" marB="45720" anchor="ctr">
+                  <a:tcPr anchor="ctr">
                     <a:lnL w="6350" cap="flat" cmpd="sng" algn="ctr">
                       <a:solidFill>
                         <a:srgbClr val="D5D0E0"/>
@@ -3593,6 +3420,11 @@
                     </a:solidFill>
                   </a:tcPr>
                 </a:tc>
+                <a:extLst>
+                  <a:ext uri="{0D108BD9-81ED-4DB2-BD59-A6C34878D82A}">
+                    <a16:rowId xmlns:a16="http://schemas.microsoft.com/office/drawing/2014/main" val="10000"/>
+                  </a:ext>
+                </a:extLst>
               </a:tr>
               <a:tr h="0">
                 <a:tc>
@@ -3600,7 +3432,7 @@
                     <a:bodyPr/>
                     <a:lstStyle/>
                     <a:p>
-                      <a:pPr indent="0" marL="0">
+                      <a:pPr marL="0" indent="0">
                         <a:buNone/>
                       </a:pPr>
                       <a:r>
@@ -3621,7 +3453,7 @@
                       </a:endParaRPr>
                     </a:p>
                   </a:txBody>
-                  <a:tcPr marL="91440" marR="91440" marT="45720" marB="45720" anchor="ctr">
+                  <a:tcPr anchor="ctr">
                     <a:lnL w="6350" cap="flat" cmpd="sng" algn="ctr">
                       <a:solidFill>
                         <a:srgbClr val="D5D0E0"/>
@@ -3665,7 +3497,7 @@
                     <a:bodyPr/>
                     <a:lstStyle/>
                     <a:p>
-                      <a:pPr algn="ctr" indent="0" marL="0">
+                      <a:pPr marL="0" indent="0" algn="ctr">
                         <a:buNone/>
                       </a:pPr>
                       <a:r>
@@ -3686,7 +3518,7 @@
                       </a:endParaRPr>
                     </a:p>
                   </a:txBody>
-                  <a:tcPr marL="91440" marR="91440" marT="45720" marB="45720" anchor="ctr">
+                  <a:tcPr anchor="ctr">
                     <a:lnL w="6350" cap="flat" cmpd="sng" algn="ctr">
                       <a:solidFill>
                         <a:srgbClr val="D5D0E0"/>
@@ -3730,7 +3562,7 @@
                     <a:bodyPr/>
                     <a:lstStyle/>
                     <a:p>
-                      <a:pPr algn="ctr" indent="0" marL="0">
+                      <a:pPr marL="0" indent="0" algn="ctr">
                         <a:buNone/>
                       </a:pPr>
                       <a:r>
@@ -3751,7 +3583,7 @@
                       </a:endParaRPr>
                     </a:p>
                   </a:txBody>
-                  <a:tcPr marL="91440" marR="91440" marT="45720" marB="45720" anchor="ctr">
+                  <a:tcPr anchor="ctr">
                     <a:lnL w="6350" cap="flat" cmpd="sng" algn="ctr">
                       <a:solidFill>
                         <a:srgbClr val="D5D0E0"/>
@@ -3790,6 +3622,11 @@
                     </a:lnB>
                   </a:tcPr>
                 </a:tc>
+                <a:extLst>
+                  <a:ext uri="{0D108BD9-81ED-4DB2-BD59-A6C34878D82A}">
+                    <a16:rowId xmlns:a16="http://schemas.microsoft.com/office/drawing/2014/main" val="10001"/>
+                  </a:ext>
+                </a:extLst>
               </a:tr>
               <a:tr h="0">
                 <a:tc>
@@ -3797,7 +3634,7 @@
                     <a:bodyPr/>
                     <a:lstStyle/>
                     <a:p>
-                      <a:pPr indent="0" marL="0">
+                      <a:pPr marL="0" indent="0">
                         <a:buNone/>
                       </a:pPr>
                       <a:r>
@@ -3818,7 +3655,7 @@
                       </a:endParaRPr>
                     </a:p>
                   </a:txBody>
-                  <a:tcPr marL="91440" marR="91440" marT="45720" marB="45720" anchor="ctr">
+                  <a:tcPr anchor="ctr">
                     <a:lnL w="6350" cap="flat" cmpd="sng" algn="ctr">
                       <a:solidFill>
                         <a:srgbClr val="D5D0E0"/>
@@ -3862,7 +3699,7 @@
                     <a:bodyPr/>
                     <a:lstStyle/>
                     <a:p>
-                      <a:pPr algn="ctr" indent="0" marL="0">
+                      <a:pPr marL="0" indent="0" algn="ctr">
                         <a:buNone/>
                       </a:pPr>
                       <a:r>
@@ -3883,7 +3720,7 @@
                       </a:endParaRPr>
                     </a:p>
                   </a:txBody>
-                  <a:tcPr marL="91440" marR="91440" marT="45720" marB="45720" anchor="ctr">
+                  <a:tcPr anchor="ctr">
                     <a:lnL w="6350" cap="flat" cmpd="sng" algn="ctr">
                       <a:solidFill>
                         <a:srgbClr val="D5D0E0"/>
@@ -3927,7 +3764,7 @@
                     <a:bodyPr/>
                     <a:lstStyle/>
                     <a:p>
-                      <a:pPr algn="ctr" indent="0" marL="0">
+                      <a:pPr marL="0" indent="0" algn="ctr">
                         <a:buNone/>
                       </a:pPr>
                       <a:r>
@@ -3948,7 +3785,7 @@
                       </a:endParaRPr>
                     </a:p>
                   </a:txBody>
-                  <a:tcPr marL="91440" marR="91440" marT="45720" marB="45720" anchor="ctr">
+                  <a:tcPr anchor="ctr">
                     <a:lnL w="6350" cap="flat" cmpd="sng" algn="ctr">
                       <a:solidFill>
                         <a:srgbClr val="D5D0E0"/>
@@ -3987,6 +3824,11 @@
                     </a:lnB>
                   </a:tcPr>
                 </a:tc>
+                <a:extLst>
+                  <a:ext uri="{0D108BD9-81ED-4DB2-BD59-A6C34878D82A}">
+                    <a16:rowId xmlns:a16="http://schemas.microsoft.com/office/drawing/2014/main" val="10002"/>
+                  </a:ext>
+                </a:extLst>
               </a:tr>
               <a:tr h="0">
                 <a:tc>
@@ -3994,7 +3836,7 @@
                     <a:bodyPr/>
                     <a:lstStyle/>
                     <a:p>
-                      <a:pPr indent="0" marL="0">
+                      <a:pPr marL="0" indent="0">
                         <a:buNone/>
                       </a:pPr>
                       <a:r>
@@ -4015,7 +3857,7 @@
                       </a:endParaRPr>
                     </a:p>
                   </a:txBody>
-                  <a:tcPr marL="91440" marR="91440" marT="45720" marB="45720" anchor="ctr">
+                  <a:tcPr anchor="ctr">
                     <a:lnL w="6350" cap="flat" cmpd="sng" algn="ctr">
                       <a:solidFill>
                         <a:srgbClr val="D5D0E0"/>
@@ -4059,7 +3901,7 @@
                     <a:bodyPr/>
                     <a:lstStyle/>
                     <a:p>
-                      <a:pPr algn="ctr" indent="0" marL="0">
+                      <a:pPr marL="0" indent="0" algn="ctr">
                         <a:buNone/>
                       </a:pPr>
                       <a:r>
@@ -4080,7 +3922,7 @@
                       </a:endParaRPr>
                     </a:p>
                   </a:txBody>
-                  <a:tcPr marL="91440" marR="91440" marT="45720" marB="45720" anchor="ctr">
+                  <a:tcPr anchor="ctr">
                     <a:lnL w="6350" cap="flat" cmpd="sng" algn="ctr">
                       <a:solidFill>
                         <a:srgbClr val="D5D0E0"/>
@@ -4124,7 +3966,7 @@
                     <a:bodyPr/>
                     <a:lstStyle/>
                     <a:p>
-                      <a:pPr algn="ctr" indent="0" marL="0">
+                      <a:pPr marL="0" indent="0" algn="ctr">
                         <a:buNone/>
                       </a:pPr>
                       <a:r>
@@ -4145,7 +3987,7 @@
                       </a:endParaRPr>
                     </a:p>
                   </a:txBody>
-                  <a:tcPr marL="91440" marR="91440" marT="45720" marB="45720" anchor="ctr">
+                  <a:tcPr anchor="ctr">
                     <a:lnL w="6350" cap="flat" cmpd="sng" algn="ctr">
                       <a:solidFill>
                         <a:srgbClr val="D5D0E0"/>
@@ -4184,6 +4026,11 @@
                     </a:lnB>
                   </a:tcPr>
                 </a:tc>
+                <a:extLst>
+                  <a:ext uri="{0D108BD9-81ED-4DB2-BD59-A6C34878D82A}">
+                    <a16:rowId xmlns:a16="http://schemas.microsoft.com/office/drawing/2014/main" val="10003"/>
+                  </a:ext>
+                </a:extLst>
               </a:tr>
               <a:tr h="0">
                 <a:tc>
@@ -4191,7 +4038,7 @@
                     <a:bodyPr/>
                     <a:lstStyle/>
                     <a:p>
-                      <a:pPr indent="0" marL="0">
+                      <a:pPr marL="0" indent="0">
                         <a:buNone/>
                       </a:pPr>
                       <a:r>
@@ -4212,7 +4059,7 @@
                       </a:endParaRPr>
                     </a:p>
                   </a:txBody>
-                  <a:tcPr marL="91440" marR="91440" marT="45720" marB="45720" anchor="ctr">
+                  <a:tcPr anchor="ctr">
                     <a:lnL w="6350" cap="flat" cmpd="sng" algn="ctr">
                       <a:solidFill>
                         <a:srgbClr val="D5D0E0"/>
@@ -4256,7 +4103,7 @@
                     <a:bodyPr/>
                     <a:lstStyle/>
                     <a:p>
-                      <a:pPr algn="ctr" indent="0" marL="0">
+                      <a:pPr marL="0" indent="0" algn="ctr">
                         <a:buNone/>
                       </a:pPr>
                       <a:r>
@@ -4277,7 +4124,7 @@
                       </a:endParaRPr>
                     </a:p>
                   </a:txBody>
-                  <a:tcPr marL="91440" marR="91440" marT="45720" marB="45720" anchor="ctr">
+                  <a:tcPr anchor="ctr">
                     <a:lnL w="6350" cap="flat" cmpd="sng" algn="ctr">
                       <a:solidFill>
                         <a:srgbClr val="D5D0E0"/>
@@ -4321,7 +4168,7 @@
                     <a:bodyPr/>
                     <a:lstStyle/>
                     <a:p>
-                      <a:pPr algn="ctr" indent="0" marL="0">
+                      <a:pPr marL="0" indent="0" algn="ctr">
                         <a:buNone/>
                       </a:pPr>
                       <a:r>
@@ -4342,7 +4189,7 @@
                       </a:endParaRPr>
                     </a:p>
                   </a:txBody>
-                  <a:tcPr marL="91440" marR="91440" marT="45720" marB="45720" anchor="ctr">
+                  <a:tcPr anchor="ctr">
                     <a:lnL w="6350" cap="flat" cmpd="sng" algn="ctr">
                       <a:solidFill>
                         <a:srgbClr val="D5D0E0"/>
@@ -4381,6 +4228,11 @@
                     </a:lnB>
                   </a:tcPr>
                 </a:tc>
+                <a:extLst>
+                  <a:ext uri="{0D108BD9-81ED-4DB2-BD59-A6C34878D82A}">
+                    <a16:rowId xmlns:a16="http://schemas.microsoft.com/office/drawing/2014/main" val="10004"/>
+                  </a:ext>
+                </a:extLst>
               </a:tr>
             </a:tbl>
           </a:graphicData>
@@ -4410,6 +4262,13 @@
             <a:prstDash val="solid"/>
           </a:ln>
         </p:spPr>
+        <p:txBody>
+          <a:bodyPr/>
+          <a:lstStyle/>
+          <a:p>
+            <a:endParaRPr lang="ru-RU"/>
+          </a:p>
+        </p:txBody>
       </p:sp>
       <p:sp>
         <p:nvSpPr>
@@ -4435,6 +4294,13 @@
             <a:prstDash val="solid"/>
           </a:ln>
         </p:spPr>
+        <p:txBody>
+          <a:bodyPr/>
+          <a:lstStyle/>
+          <a:p>
+            <a:endParaRPr lang="ru-RU"/>
+          </a:p>
+        </p:txBody>
       </p:sp>
       <p:sp>
         <p:nvSpPr>
@@ -4457,11 +4323,11 @@
           <a:bodyPr wrap="square" rtlCol="0" anchor="t"/>
           <a:lstStyle/>
           <a:p>
-            <a:pPr indent="0" marL="0">
+            <a:pPr marL="0" indent="0">
               <a:buNone/>
             </a:pPr>
             <a:r>
-              <a:rPr lang="en-US" sz="1000" b="1" spc="100" kern="0" dirty="0">
+              <a:rPr lang="en-US" sz="1000" b="1" kern="0" spc="100" dirty="0">
                 <a:solidFill>
                   <a:srgbClr val="FA815F"/>
                 </a:solidFill>
@@ -4471,9 +4337,6 @@
               </a:rPr>
               <a:t>UX-ТЕСТ: </a:t>
             </a:r>
-            <a:pPr indent="0" marL="0">
-              <a:buNone/>
-            </a:pPr>
             <a:r>
               <a:rPr lang="en-US" sz="1000" b="1" dirty="0">
                 <a:solidFill>
@@ -4488,7 +4351,7 @@
             <a:endParaRPr lang="en-US" sz="1000" dirty="0"/>
           </a:p>
           <a:p>
-            <a:pPr indent="0" marL="0">
+            <a:pPr marL="0" indent="0">
               <a:buNone/>
             </a:pPr>
             <a:r>
@@ -4522,6 +4385,7 @@
         <a:solidFill>
           <a:srgbClr val="FFFFFF"/>
         </a:solidFill>
+        <a:effectLst/>
       </p:bgPr>
     </p:bg>
     <p:spTree>
@@ -4562,6 +4426,13 @@
             <a:prstDash val="solid"/>
           </a:ln>
         </p:spPr>
+        <p:txBody>
+          <a:bodyPr/>
+          <a:lstStyle/>
+          <a:p>
+            <a:endParaRPr lang="ru-RU"/>
+          </a:p>
+        </p:txBody>
       </p:sp>
       <p:sp>
         <p:nvSpPr>
@@ -4587,6 +4458,13 @@
             <a:prstDash val="solid"/>
           </a:ln>
         </p:spPr>
+        <p:txBody>
+          <a:bodyPr/>
+          <a:lstStyle/>
+          <a:p>
+            <a:endParaRPr lang="ru-RU"/>
+          </a:p>
+        </p:txBody>
       </p:sp>
       <p:sp>
         <p:nvSpPr>
@@ -4609,7 +4487,7 @@
           <a:bodyPr wrap="square" lIns="0" tIns="0" rIns="0" bIns="0" rtlCol="0" anchor="ctr"/>
           <a:lstStyle/>
           <a:p>
-            <a:pPr indent="0" marL="0">
+            <a:pPr marL="0" indent="0">
               <a:buNone/>
             </a:pPr>
             <a:r>
@@ -4649,6 +4527,13 @@
             <a:prstDash val="solid"/>
           </a:ln>
         </p:spPr>
+        <p:txBody>
+          <a:bodyPr/>
+          <a:lstStyle/>
+          <a:p>
+            <a:endParaRPr lang="ru-RU"/>
+          </a:p>
+        </p:txBody>
       </p:sp>
       <p:sp>
         <p:nvSpPr>
@@ -4671,7 +4556,7 @@
           <a:bodyPr wrap="square" rtlCol="0" anchor="ctr"/>
           <a:lstStyle/>
           <a:p>
-            <a:pPr algn="l" indent="0" marL="0">
+            <a:pPr marL="0" indent="0" algn="l">
               <a:buNone/>
             </a:pPr>
             <a:r>
@@ -4710,7 +4595,7 @@
           <a:bodyPr wrap="square" rtlCol="0" anchor="ctr"/>
           <a:lstStyle/>
           <a:p>
-            <a:pPr algn="r" indent="0" marL="0">
+            <a:pPr marL="0" indent="0" algn="r">
               <a:buNone/>
             </a:pPr>
             <a:r>
@@ -4752,6 +4637,13 @@
             <a:prstDash val="solid"/>
           </a:ln>
         </p:spPr>
+        <p:txBody>
+          <a:bodyPr/>
+          <a:lstStyle/>
+          <a:p>
+            <a:endParaRPr lang="ru-RU"/>
+          </a:p>
+        </p:txBody>
       </p:sp>
       <p:sp>
         <p:nvSpPr>
@@ -4777,6 +4669,13 @@
             <a:prstDash val="solid"/>
           </a:ln>
         </p:spPr>
+        <p:txBody>
+          <a:bodyPr/>
+          <a:lstStyle/>
+          <a:p>
+            <a:endParaRPr lang="ru-RU"/>
+          </a:p>
+        </p:txBody>
       </p:sp>
       <p:sp>
         <p:nvSpPr>
@@ -4799,11 +4698,11 @@
           <a:bodyPr wrap="square" lIns="0" tIns="0" rIns="0" bIns="0" rtlCol="0" anchor="ctr"/>
           <a:lstStyle/>
           <a:p>
-            <a:pPr indent="0" marL="0">
+            <a:pPr marL="0" indent="0">
               <a:buNone/>
             </a:pPr>
             <a:r>
-              <a:rPr lang="en-US" sz="1400" b="1" spc="200" kern="0" dirty="0">
+              <a:rPr lang="en-US" sz="1400" b="1" kern="0" spc="200" dirty="0">
                 <a:solidFill>
                   <a:srgbClr val="E85362"/>
                 </a:solidFill>
@@ -4813,9 +4712,6 @@
               </a:rPr>
               <a:t>✓  ЦЕЛЬ РАБОТЫ ДОСТИГНУТА.  </a:t>
             </a:r>
-            <a:pPr indent="0" marL="0">
-              <a:buNone/>
-            </a:pPr>
             <a:r>
               <a:rPr lang="en-US" sz="1200" dirty="0">
                 <a:solidFill>
@@ -4855,6 +4751,13 @@
             <a:prstDash val="solid"/>
           </a:ln>
         </p:spPr>
+        <p:txBody>
+          <a:bodyPr/>
+          <a:lstStyle/>
+          <a:p>
+            <a:endParaRPr lang="ru-RU"/>
+          </a:p>
+        </p:txBody>
       </p:sp>
       <p:sp>
         <p:nvSpPr>
@@ -4877,11 +4780,11 @@
           <a:bodyPr wrap="square" rtlCol="0" anchor="ctr"/>
           <a:lstStyle/>
           <a:p>
-            <a:pPr algn="ctr" indent="0" marL="0">
+            <a:pPr marL="0" indent="0" algn="ctr">
               <a:buNone/>
             </a:pPr>
             <a:r>
-              <a:rPr lang="en-US" sz="1100" b="1" spc="200" kern="0" dirty="0">
+              <a:rPr lang="en-US" sz="1100" b="1" kern="0" spc="200" dirty="0">
                 <a:solidFill>
                   <a:srgbClr val="FFFFFF"/>
                 </a:solidFill>
@@ -4919,6 +4822,13 @@
             <a:prstDash val="solid"/>
           </a:ln>
         </p:spPr>
+        <p:txBody>
+          <a:bodyPr/>
+          <a:lstStyle/>
+          <a:p>
+            <a:endParaRPr lang="ru-RU"/>
+          </a:p>
+        </p:txBody>
       </p:sp>
       <p:sp>
         <p:nvSpPr>
@@ -5050,6 +4960,13 @@
             <a:prstDash val="solid"/>
           </a:ln>
         </p:spPr>
+        <p:txBody>
+          <a:bodyPr/>
+          <a:lstStyle/>
+          <a:p>
+            <a:endParaRPr lang="ru-RU"/>
+          </a:p>
+        </p:txBody>
       </p:sp>
       <p:sp>
         <p:nvSpPr>
@@ -5072,11 +4989,11 @@
           <a:bodyPr wrap="square" rtlCol="0" anchor="ctr"/>
           <a:lstStyle/>
           <a:p>
-            <a:pPr algn="ctr" indent="0" marL="0">
+            <a:pPr marL="0" indent="0" algn="ctr">
               <a:buNone/>
             </a:pPr>
             <a:r>
-              <a:rPr lang="en-US" sz="1100" b="1" spc="200" kern="0" dirty="0">
+              <a:rPr lang="en-US" sz="1100" b="1" kern="0" spc="200" dirty="0">
                 <a:solidFill>
                   <a:srgbClr val="FFFFFF"/>
                 </a:solidFill>
@@ -5114,6 +5031,13 @@
             <a:prstDash val="solid"/>
           </a:ln>
         </p:spPr>
+        <p:txBody>
+          <a:bodyPr/>
+          <a:lstStyle/>
+          <a:p>
+            <a:endParaRPr lang="ru-RU"/>
+          </a:p>
+        </p:txBody>
       </p:sp>
       <p:sp>
         <p:nvSpPr>
@@ -5224,6 +5148,13 @@
             <a:prstDash val="solid"/>
           </a:ln>
         </p:spPr>
+        <p:txBody>
+          <a:bodyPr/>
+          <a:lstStyle/>
+          <a:p>
+            <a:endParaRPr lang="ru-RU"/>
+          </a:p>
+        </p:txBody>
       </p:sp>
       <p:sp>
         <p:nvSpPr>
@@ -5246,11 +5177,11 @@
           <a:bodyPr wrap="square" rtlCol="0" anchor="ctr"/>
           <a:lstStyle/>
           <a:p>
-            <a:pPr algn="ctr" indent="0" marL="0">
+            <a:pPr marL="0" indent="0" algn="ctr">
               <a:buNone/>
             </a:pPr>
             <a:r>
-              <a:rPr lang="en-US" sz="1100" b="1" spc="200" kern="0" dirty="0">
+              <a:rPr lang="en-US" sz="1100" b="1" kern="0" spc="200" dirty="0">
                 <a:solidFill>
                   <a:srgbClr val="FFFFFF"/>
                 </a:solidFill>
@@ -5288,6 +5219,13 @@
             <a:prstDash val="solid"/>
           </a:ln>
         </p:spPr>
+        <p:txBody>
+          <a:bodyPr/>
+          <a:lstStyle/>
+          <a:p>
+            <a:endParaRPr lang="ru-RU"/>
+          </a:p>
+        </p:txBody>
       </p:sp>
       <p:sp>
         <p:nvSpPr>
@@ -5390,6 +5328,7 @@
         <a:solidFill>
           <a:srgbClr val="24184E"/>
         </a:solidFill>
+        <a:effectLst/>
       </p:bgPr>
     </p:bg>
     <p:spTree>
@@ -5430,6 +5369,13 @@
             <a:prstDash val="solid"/>
           </a:ln>
         </p:spPr>
+        <p:txBody>
+          <a:bodyPr/>
+          <a:lstStyle/>
+          <a:p>
+            <a:endParaRPr lang="ru-RU"/>
+          </a:p>
+        </p:txBody>
       </p:sp>
       <p:sp>
         <p:nvSpPr>
@@ -5455,6 +5401,13 @@
             <a:prstDash val="solid"/>
           </a:ln>
         </p:spPr>
+        <p:txBody>
+          <a:bodyPr/>
+          <a:lstStyle/>
+          <a:p>
+            <a:endParaRPr lang="ru-RU"/>
+          </a:p>
+        </p:txBody>
       </p:sp>
       <p:sp>
         <p:nvSpPr>
@@ -5480,6 +5433,13 @@
             <a:prstDash val="solid"/>
           </a:ln>
         </p:spPr>
+        <p:txBody>
+          <a:bodyPr/>
+          <a:lstStyle/>
+          <a:p>
+            <a:endParaRPr lang="ru-RU"/>
+          </a:p>
+        </p:txBody>
       </p:sp>
       <p:sp>
         <p:nvSpPr>
@@ -5502,7 +5462,7 @@
           <a:bodyPr wrap="square" rtlCol="0" anchor="ctr"/>
           <a:lstStyle/>
           <a:p>
-            <a:pPr algn="ctr" indent="0" marL="0">
+            <a:pPr marL="0" indent="0" algn="ctr">
               <a:buNone/>
             </a:pPr>
             <a:r>
@@ -5542,6 +5502,13 @@
             <a:prstDash val="solid"/>
           </a:ln>
         </p:spPr>
+        <p:txBody>
+          <a:bodyPr/>
+          <a:lstStyle/>
+          <a:p>
+            <a:endParaRPr lang="ru-RU"/>
+          </a:p>
+        </p:txBody>
       </p:sp>
       <p:sp>
         <p:nvSpPr>
@@ -5564,7 +5531,7 @@
           <a:bodyPr wrap="square" rtlCol="0" anchor="ctr"/>
           <a:lstStyle/>
           <a:p>
-            <a:pPr algn="ctr" indent="0" marL="0">
+            <a:pPr marL="0" indent="0" algn="ctr">
               <a:buNone/>
             </a:pPr>
             <a:r>
@@ -5603,11 +5570,11 @@
           <a:bodyPr wrap="square" rtlCol="0" anchor="ctr"/>
           <a:lstStyle/>
           <a:p>
-            <a:pPr algn="ctr" indent="0" marL="0">
+            <a:pPr marL="0" indent="0" algn="ctr">
               <a:buNone/>
             </a:pPr>
             <a:r>
-              <a:rPr lang="en-US" sz="1200" b="1" spc="300" kern="0" dirty="0">
+              <a:rPr lang="en-US" sz="1200" b="1" kern="0" spc="300" dirty="0">
                 <a:solidFill>
                   <a:srgbClr val="E8E0F7"/>
                 </a:solidFill>
@@ -5637,6 +5604,7 @@
         <a:solidFill>
           <a:srgbClr val="FFFFFF"/>
         </a:solidFill>
+        <a:effectLst/>
       </p:bgPr>
     </p:bg>
     <p:spTree>
@@ -5677,6 +5645,13 @@
             <a:prstDash val="solid"/>
           </a:ln>
         </p:spPr>
+        <p:txBody>
+          <a:bodyPr/>
+          <a:lstStyle/>
+          <a:p>
+            <a:endParaRPr lang="ru-RU"/>
+          </a:p>
+        </p:txBody>
       </p:sp>
       <p:sp>
         <p:nvSpPr>
@@ -5702,6 +5677,13 @@
             <a:prstDash val="solid"/>
           </a:ln>
         </p:spPr>
+        <p:txBody>
+          <a:bodyPr/>
+          <a:lstStyle/>
+          <a:p>
+            <a:endParaRPr lang="ru-RU"/>
+          </a:p>
+        </p:txBody>
       </p:sp>
       <p:sp>
         <p:nvSpPr>
@@ -5724,7 +5706,7 @@
           <a:bodyPr wrap="square" lIns="0" tIns="0" rIns="0" bIns="0" rtlCol="0" anchor="ctr"/>
           <a:lstStyle/>
           <a:p>
-            <a:pPr indent="0" marL="0">
+            <a:pPr marL="0" indent="0">
               <a:buNone/>
             </a:pPr>
             <a:r>
@@ -5764,6 +5746,13 @@
             <a:prstDash val="solid"/>
           </a:ln>
         </p:spPr>
+        <p:txBody>
+          <a:bodyPr/>
+          <a:lstStyle/>
+          <a:p>
+            <a:endParaRPr lang="ru-RU"/>
+          </a:p>
+        </p:txBody>
       </p:sp>
       <p:sp>
         <p:nvSpPr>
@@ -5786,7 +5775,7 @@
           <a:bodyPr wrap="square" rtlCol="0" anchor="ctr"/>
           <a:lstStyle/>
           <a:p>
-            <a:pPr algn="l" indent="0" marL="0">
+            <a:pPr marL="0" indent="0" algn="l">
               <a:buNone/>
             </a:pPr>
             <a:r>
@@ -5825,7 +5814,7 @@
           <a:bodyPr wrap="square" rtlCol="0" anchor="ctr"/>
           <a:lstStyle/>
           <a:p>
-            <a:pPr algn="r" indent="0" marL="0">
+            <a:pPr marL="0" indent="0" algn="r">
               <a:buNone/>
             </a:pPr>
             <a:r>
@@ -5864,7 +5853,7 @@
           <a:bodyPr wrap="square" rtlCol="0" anchor="t"/>
           <a:lstStyle/>
           <a:p>
-            <a:pPr indent="0" marL="0">
+            <a:pPr marL="0" indent="0">
               <a:buNone/>
             </a:pPr>
             <a:r>
@@ -5878,12 +5867,6 @@
               </a:rPr>
               <a:t>Силовой тренинг</a:t>
             </a:r>
-            <a:pPr indent="0" marL="0">
-              <a:spcAft>
-                <a:spcPts val="1000"/>
-              </a:spcAft>
-              <a:buNone/>
-            </a:pPr>
             <a:r>
               <a:rPr lang="en-US" sz="1400" dirty="0">
                 <a:solidFill>
@@ -5898,7 +5881,7 @@
             <a:endParaRPr lang="en-US" sz="1400" dirty="0"/>
           </a:p>
           <a:p>
-            <a:pPr indent="0" marL="0">
+            <a:pPr marL="0" indent="0">
               <a:buNone/>
             </a:pPr>
             <a:r>
@@ -5912,9 +5895,6 @@
               </a:rPr>
               <a:t>Ключевые задачи занимающегося — отслеживание прогресса </a:t>
             </a:r>
-            <a:pPr indent="0" marL="0">
-              <a:buNone/>
-            </a:pPr>
             <a:r>
               <a:rPr lang="en-US" sz="1400" b="1" dirty="0">
                 <a:solidFill>
@@ -5926,12 +5906,6 @@
               </a:rPr>
               <a:t>1ПМ</a:t>
             </a:r>
-            <a:pPr indent="0" marL="0">
-              <a:spcAft>
-                <a:spcPts val="1000"/>
-              </a:spcAft>
-              <a:buNone/>
-            </a:pPr>
             <a:r>
               <a:rPr lang="en-US" sz="1400" dirty="0">
                 <a:solidFill>
@@ -5946,7 +5920,7 @@
             <a:endParaRPr lang="en-US" sz="1400" dirty="0"/>
           </a:p>
           <a:p>
-            <a:pPr indent="0" marL="0">
+            <a:pPr marL="0" indent="0">
               <a:buNone/>
             </a:pPr>
             <a:r>
@@ -5988,6 +5962,13 @@
             <a:prstDash val="solid"/>
           </a:ln>
         </p:spPr>
+        <p:txBody>
+          <a:bodyPr/>
+          <a:lstStyle/>
+          <a:p>
+            <a:endParaRPr lang="ru-RU"/>
+          </a:p>
+        </p:txBody>
       </p:sp>
       <p:sp>
         <p:nvSpPr>
@@ -6013,6 +5994,13 @@
             <a:prstDash val="solid"/>
           </a:ln>
         </p:spPr>
+        <p:txBody>
+          <a:bodyPr/>
+          <a:lstStyle/>
+          <a:p>
+            <a:endParaRPr lang="ru-RU"/>
+          </a:p>
+        </p:txBody>
       </p:sp>
       <p:sp>
         <p:nvSpPr>
@@ -6035,11 +6023,11 @@
           <a:bodyPr wrap="square" rtlCol="0" anchor="ctr"/>
           <a:lstStyle/>
           <a:p>
-            <a:pPr algn="ctr" indent="0" marL="0">
+            <a:pPr marL="0" indent="0" algn="ctr">
               <a:buNone/>
             </a:pPr>
             <a:r>
-              <a:rPr lang="en-US" sz="1300" b="1" spc="300" kern="0" dirty="0">
+              <a:rPr lang="en-US" sz="1300" b="1" kern="0" spc="300" dirty="0">
                 <a:solidFill>
                   <a:srgbClr val="FFFFFF"/>
                 </a:solidFill>
@@ -6196,6 +6184,7 @@
         <a:solidFill>
           <a:srgbClr val="FFFFFF"/>
         </a:solidFill>
+        <a:effectLst/>
       </p:bgPr>
     </p:bg>
     <p:spTree>
@@ -6236,6 +6225,13 @@
             <a:prstDash val="solid"/>
           </a:ln>
         </p:spPr>
+        <p:txBody>
+          <a:bodyPr/>
+          <a:lstStyle/>
+          <a:p>
+            <a:endParaRPr lang="ru-RU"/>
+          </a:p>
+        </p:txBody>
       </p:sp>
       <p:sp>
         <p:nvSpPr>
@@ -6261,6 +6257,13 @@
             <a:prstDash val="solid"/>
           </a:ln>
         </p:spPr>
+        <p:txBody>
+          <a:bodyPr/>
+          <a:lstStyle/>
+          <a:p>
+            <a:endParaRPr lang="ru-RU"/>
+          </a:p>
+        </p:txBody>
       </p:sp>
       <p:sp>
         <p:nvSpPr>
@@ -6283,7 +6286,7 @@
           <a:bodyPr wrap="square" lIns="0" tIns="0" rIns="0" bIns="0" rtlCol="0" anchor="ctr"/>
           <a:lstStyle/>
           <a:p>
-            <a:pPr indent="0" marL="0">
+            <a:pPr marL="0" indent="0">
               <a:buNone/>
             </a:pPr>
             <a:r>
@@ -6323,6 +6326,13 @@
             <a:prstDash val="solid"/>
           </a:ln>
         </p:spPr>
+        <p:txBody>
+          <a:bodyPr/>
+          <a:lstStyle/>
+          <a:p>
+            <a:endParaRPr lang="ru-RU"/>
+          </a:p>
+        </p:txBody>
       </p:sp>
       <p:sp>
         <p:nvSpPr>
@@ -6345,7 +6355,7 @@
           <a:bodyPr wrap="square" rtlCol="0" anchor="ctr"/>
           <a:lstStyle/>
           <a:p>
-            <a:pPr algn="l" indent="0" marL="0">
+            <a:pPr marL="0" indent="0" algn="l">
               <a:buNone/>
             </a:pPr>
             <a:r>
@@ -6384,7 +6394,7 @@
           <a:bodyPr wrap="square" rtlCol="0" anchor="ctr"/>
           <a:lstStyle/>
           <a:p>
-            <a:pPr algn="r" indent="0" marL="0">
+            <a:pPr marL="0" indent="0" algn="r">
               <a:buNone/>
             </a:pPr>
             <a:r>
@@ -6426,6 +6436,13 @@
             <a:prstDash val="solid"/>
           </a:ln>
         </p:spPr>
+        <p:txBody>
+          <a:bodyPr/>
+          <a:lstStyle/>
+          <a:p>
+            <a:endParaRPr lang="ru-RU"/>
+          </a:p>
+        </p:txBody>
       </p:sp>
       <p:sp>
         <p:nvSpPr>
@@ -6451,6 +6468,13 @@
             <a:prstDash val="solid"/>
           </a:ln>
         </p:spPr>
+        <p:txBody>
+          <a:bodyPr/>
+          <a:lstStyle/>
+          <a:p>
+            <a:endParaRPr lang="ru-RU"/>
+          </a:p>
+        </p:txBody>
       </p:sp>
       <p:sp>
         <p:nvSpPr>
@@ -6473,11 +6497,11 @@
           <a:bodyPr wrap="square" lIns="0" tIns="0" rIns="0" bIns="0" rtlCol="0" anchor="ctr"/>
           <a:lstStyle/>
           <a:p>
-            <a:pPr indent="0" marL="0">
+            <a:pPr marL="0" indent="0">
               <a:buNone/>
             </a:pPr>
             <a:r>
-              <a:rPr lang="en-US" sz="1100" b="1" spc="300" kern="0" dirty="0">
+              <a:rPr lang="en-US" sz="1100" b="1" kern="0" spc="300" dirty="0">
                 <a:solidFill>
                   <a:srgbClr val="E85362"/>
                 </a:solidFill>
@@ -6490,7 +6514,7 @@
             <a:endParaRPr lang="en-US" sz="1100" dirty="0"/>
           </a:p>
           <a:p>
-            <a:pPr indent="0" marL="0">
+            <a:pPr marL="0" indent="0">
               <a:buNone/>
             </a:pPr>
             <a:r>
@@ -6532,6 +6556,13 @@
             <a:prstDash val="solid"/>
           </a:ln>
         </p:spPr>
+        <p:txBody>
+          <a:bodyPr/>
+          <a:lstStyle/>
+          <a:p>
+            <a:endParaRPr lang="ru-RU"/>
+          </a:p>
+        </p:txBody>
       </p:sp>
       <p:sp>
         <p:nvSpPr>
@@ -6557,6 +6588,13 @@
             <a:prstDash val="solid"/>
           </a:ln>
         </p:spPr>
+        <p:txBody>
+          <a:bodyPr/>
+          <a:lstStyle/>
+          <a:p>
+            <a:endParaRPr lang="ru-RU"/>
+          </a:p>
+        </p:txBody>
       </p:sp>
       <p:sp>
         <p:nvSpPr>
@@ -6579,7 +6617,7 @@
           <a:bodyPr wrap="square" lIns="0" tIns="0" rIns="0" bIns="0" rtlCol="0" anchor="ctr"/>
           <a:lstStyle/>
           <a:p>
-            <a:pPr algn="ctr" indent="0" marL="0">
+            <a:pPr marL="0" indent="0" algn="ctr">
               <a:buNone/>
             </a:pPr>
             <a:r>
@@ -6618,7 +6656,7 @@
           <a:bodyPr wrap="square" lIns="0" tIns="0" rIns="0" bIns="0" rtlCol="0" anchor="ctr"/>
           <a:lstStyle/>
           <a:p>
-            <a:pPr indent="0" marL="0">
+            <a:pPr marL="0" indent="0">
               <a:buNone/>
             </a:pPr>
             <a:r>
@@ -6660,6 +6698,13 @@
             <a:prstDash val="solid"/>
           </a:ln>
         </p:spPr>
+        <p:txBody>
+          <a:bodyPr/>
+          <a:lstStyle/>
+          <a:p>
+            <a:endParaRPr lang="ru-RU"/>
+          </a:p>
+        </p:txBody>
       </p:sp>
       <p:sp>
         <p:nvSpPr>
@@ -6685,6 +6730,13 @@
             <a:prstDash val="solid"/>
           </a:ln>
         </p:spPr>
+        <p:txBody>
+          <a:bodyPr/>
+          <a:lstStyle/>
+          <a:p>
+            <a:endParaRPr lang="ru-RU"/>
+          </a:p>
+        </p:txBody>
       </p:sp>
       <p:sp>
         <p:nvSpPr>
@@ -6707,7 +6759,7 @@
           <a:bodyPr wrap="square" lIns="0" tIns="0" rIns="0" bIns="0" rtlCol="0" anchor="ctr"/>
           <a:lstStyle/>
           <a:p>
-            <a:pPr algn="ctr" indent="0" marL="0">
+            <a:pPr marL="0" indent="0" algn="ctr">
               <a:buNone/>
             </a:pPr>
             <a:r>
@@ -6746,7 +6798,7 @@
           <a:bodyPr wrap="square" lIns="0" tIns="0" rIns="0" bIns="0" rtlCol="0" anchor="ctr"/>
           <a:lstStyle/>
           <a:p>
-            <a:pPr indent="0" marL="0">
+            <a:pPr marL="0" indent="0">
               <a:buNone/>
             </a:pPr>
             <a:r>
@@ -6788,6 +6840,13 @@
             <a:prstDash val="solid"/>
           </a:ln>
         </p:spPr>
+        <p:txBody>
+          <a:bodyPr/>
+          <a:lstStyle/>
+          <a:p>
+            <a:endParaRPr lang="ru-RU"/>
+          </a:p>
+        </p:txBody>
       </p:sp>
       <p:sp>
         <p:nvSpPr>
@@ -6813,6 +6872,13 @@
             <a:prstDash val="solid"/>
           </a:ln>
         </p:spPr>
+        <p:txBody>
+          <a:bodyPr/>
+          <a:lstStyle/>
+          <a:p>
+            <a:endParaRPr lang="ru-RU"/>
+          </a:p>
+        </p:txBody>
       </p:sp>
       <p:sp>
         <p:nvSpPr>
@@ -6835,7 +6901,7 @@
           <a:bodyPr wrap="square" lIns="0" tIns="0" rIns="0" bIns="0" rtlCol="0" anchor="ctr"/>
           <a:lstStyle/>
           <a:p>
-            <a:pPr algn="ctr" indent="0" marL="0">
+            <a:pPr marL="0" indent="0" algn="ctr">
               <a:buNone/>
             </a:pPr>
             <a:r>
@@ -6874,7 +6940,7 @@
           <a:bodyPr wrap="square" lIns="0" tIns="0" rIns="0" bIns="0" rtlCol="0" anchor="ctr"/>
           <a:lstStyle/>
           <a:p>
-            <a:pPr indent="0" marL="0">
+            <a:pPr marL="0" indent="0">
               <a:buNone/>
             </a:pPr>
             <a:r>
@@ -6916,6 +6982,13 @@
             <a:prstDash val="solid"/>
           </a:ln>
         </p:spPr>
+        <p:txBody>
+          <a:bodyPr/>
+          <a:lstStyle/>
+          <a:p>
+            <a:endParaRPr lang="ru-RU"/>
+          </a:p>
+        </p:txBody>
       </p:sp>
       <p:sp>
         <p:nvSpPr>
@@ -6941,6 +7014,13 @@
             <a:prstDash val="solid"/>
           </a:ln>
         </p:spPr>
+        <p:txBody>
+          <a:bodyPr/>
+          <a:lstStyle/>
+          <a:p>
+            <a:endParaRPr lang="ru-RU"/>
+          </a:p>
+        </p:txBody>
       </p:sp>
       <p:sp>
         <p:nvSpPr>
@@ -6963,7 +7043,7 @@
           <a:bodyPr wrap="square" lIns="0" tIns="0" rIns="0" bIns="0" rtlCol="0" anchor="ctr"/>
           <a:lstStyle/>
           <a:p>
-            <a:pPr algn="ctr" indent="0" marL="0">
+            <a:pPr marL="0" indent="0" algn="ctr">
               <a:buNone/>
             </a:pPr>
             <a:r>
@@ -7002,7 +7082,7 @@
           <a:bodyPr wrap="square" lIns="0" tIns="0" rIns="0" bIns="0" rtlCol="0" anchor="ctr"/>
           <a:lstStyle/>
           <a:p>
-            <a:pPr indent="0" marL="0">
+            <a:pPr marL="0" indent="0">
               <a:buNone/>
             </a:pPr>
             <a:r>
@@ -7044,6 +7124,13 @@
             <a:prstDash val="solid"/>
           </a:ln>
         </p:spPr>
+        <p:txBody>
+          <a:bodyPr/>
+          <a:lstStyle/>
+          <a:p>
+            <a:endParaRPr lang="ru-RU"/>
+          </a:p>
+        </p:txBody>
       </p:sp>
       <p:sp>
         <p:nvSpPr>
@@ -7069,6 +7156,13 @@
             <a:prstDash val="solid"/>
           </a:ln>
         </p:spPr>
+        <p:txBody>
+          <a:bodyPr/>
+          <a:lstStyle/>
+          <a:p>
+            <a:endParaRPr lang="ru-RU"/>
+          </a:p>
+        </p:txBody>
       </p:sp>
       <p:sp>
         <p:nvSpPr>
@@ -7091,7 +7185,7 @@
           <a:bodyPr wrap="square" lIns="0" tIns="0" rIns="0" bIns="0" rtlCol="0" anchor="ctr"/>
           <a:lstStyle/>
           <a:p>
-            <a:pPr algn="ctr" indent="0" marL="0">
+            <a:pPr marL="0" indent="0" algn="ctr">
               <a:buNone/>
             </a:pPr>
             <a:r>
@@ -7130,7 +7224,7 @@
           <a:bodyPr wrap="square" lIns="0" tIns="0" rIns="0" bIns="0" rtlCol="0" anchor="ctr"/>
           <a:lstStyle/>
           <a:p>
-            <a:pPr indent="0" marL="0">
+            <a:pPr marL="0" indent="0">
               <a:buNone/>
             </a:pPr>
             <a:r>
@@ -7172,6 +7266,13 @@
             <a:prstDash val="solid"/>
           </a:ln>
         </p:spPr>
+        <p:txBody>
+          <a:bodyPr/>
+          <a:lstStyle/>
+          <a:p>
+            <a:endParaRPr lang="ru-RU"/>
+          </a:p>
+        </p:txBody>
       </p:sp>
       <p:sp>
         <p:nvSpPr>
@@ -7197,6 +7298,13 @@
             <a:prstDash val="solid"/>
           </a:ln>
         </p:spPr>
+        <p:txBody>
+          <a:bodyPr/>
+          <a:lstStyle/>
+          <a:p>
+            <a:endParaRPr lang="ru-RU"/>
+          </a:p>
+        </p:txBody>
       </p:sp>
       <p:sp>
         <p:nvSpPr>
@@ -7219,7 +7327,7 @@
           <a:bodyPr wrap="square" lIns="0" tIns="0" rIns="0" bIns="0" rtlCol="0" anchor="ctr"/>
           <a:lstStyle/>
           <a:p>
-            <a:pPr algn="ctr" indent="0" marL="0">
+            <a:pPr marL="0" indent="0" algn="ctr">
               <a:buNone/>
             </a:pPr>
             <a:r>
@@ -7258,7 +7366,7 @@
           <a:bodyPr wrap="square" lIns="0" tIns="0" rIns="0" bIns="0" rtlCol="0" anchor="ctr"/>
           <a:lstStyle/>
           <a:p>
-            <a:pPr indent="0" marL="0">
+            <a:pPr marL="0" indent="0">
               <a:buNone/>
             </a:pPr>
             <a:r>
@@ -7292,6 +7400,7 @@
         <a:solidFill>
           <a:srgbClr val="FFFFFF"/>
         </a:solidFill>
+        <a:effectLst/>
       </p:bgPr>
     </p:bg>
     <p:spTree>
@@ -7332,6 +7441,13 @@
             <a:prstDash val="solid"/>
           </a:ln>
         </p:spPr>
+        <p:txBody>
+          <a:bodyPr/>
+          <a:lstStyle/>
+          <a:p>
+            <a:endParaRPr lang="ru-RU"/>
+          </a:p>
+        </p:txBody>
       </p:sp>
       <p:sp>
         <p:nvSpPr>
@@ -7357,6 +7473,13 @@
             <a:prstDash val="solid"/>
           </a:ln>
         </p:spPr>
+        <p:txBody>
+          <a:bodyPr/>
+          <a:lstStyle/>
+          <a:p>
+            <a:endParaRPr lang="ru-RU"/>
+          </a:p>
+        </p:txBody>
       </p:sp>
       <p:sp>
         <p:nvSpPr>
@@ -7379,7 +7502,7 @@
           <a:bodyPr wrap="square" lIns="0" tIns="0" rIns="0" bIns="0" rtlCol="0" anchor="ctr"/>
           <a:lstStyle/>
           <a:p>
-            <a:pPr indent="0" marL="0">
+            <a:pPr marL="0" indent="0">
               <a:buNone/>
             </a:pPr>
             <a:r>
@@ -7419,6 +7542,13 @@
             <a:prstDash val="solid"/>
           </a:ln>
         </p:spPr>
+        <p:txBody>
+          <a:bodyPr/>
+          <a:lstStyle/>
+          <a:p>
+            <a:endParaRPr lang="ru-RU"/>
+          </a:p>
+        </p:txBody>
       </p:sp>
       <p:sp>
         <p:nvSpPr>
@@ -7441,7 +7571,7 @@
           <a:bodyPr wrap="square" rtlCol="0" anchor="ctr"/>
           <a:lstStyle/>
           <a:p>
-            <a:pPr algn="l" indent="0" marL="0">
+            <a:pPr marL="0" indent="0" algn="l">
               <a:buNone/>
             </a:pPr>
             <a:r>
@@ -7480,7 +7610,7 @@
           <a:bodyPr wrap="square" rtlCol="0" anchor="ctr"/>
           <a:lstStyle/>
           <a:p>
-            <a:pPr algn="r" indent="0" marL="0">
+            <a:pPr marL="0" indent="0" algn="r">
               <a:buNone/>
             </a:pPr>
             <a:r>
@@ -7500,33 +7630,69 @@
       </p:sp>
       <p:graphicFrame>
         <p:nvGraphicFramePr>
-          <p:cNvPr id="5" name="Table 0"/>
+          <p:cNvPr id="8" name="Table 0"/>
           <p:cNvGraphicFramePr>
             <a:graphicFrameLocks noGrp="1"/>
           </p:cNvGraphicFramePr>
           <p:nvPr>
             <p:extLst>
               <p:ext uri="{D42A27DB-BD31-4B8C-83A1-F6EECF244321}">
-                <p14:modId xmlns:p14="http://schemas.microsoft.com/office/powerpoint/2010/main" val="1579011935"/>
+                <p14:modId xmlns:p14="http://schemas.microsoft.com/office/powerpoint/2010/main" val="1030147094"/>
               </p:ext>
             </p:extLst>
           </p:nvPr>
         </p:nvGraphicFramePr>
         <p:xfrm>
           <a:off x="502920" y="1143000"/>
-          <a:ext cx="8275320" cy="914400"/>
+          <a:ext cx="8275320" cy="2392680"/>
         </p:xfrm>
         <a:graphic>
           <a:graphicData uri="http://schemas.openxmlformats.org/drawingml/2006/table">
             <a:tbl>
               <a:tblPr/>
               <a:tblGrid>
-                <a:gridCol w="2240280"/>
-                <a:gridCol w="1207008"/>
-                <a:gridCol w="1207008"/>
-                <a:gridCol w="1207008"/>
-                <a:gridCol w="1207008"/>
-                <a:gridCol w="1207008"/>
+                <a:gridCol w="2240280">
+                  <a:extLst>
+                    <a:ext uri="{9D8B030D-6E8A-4147-A177-3AD203B41FA5}">
+                      <a16:colId xmlns:a16="http://schemas.microsoft.com/office/drawing/2014/main" val="20000"/>
+                    </a:ext>
+                  </a:extLst>
+                </a:gridCol>
+                <a:gridCol w="1207008">
+                  <a:extLst>
+                    <a:ext uri="{9D8B030D-6E8A-4147-A177-3AD203B41FA5}">
+                      <a16:colId xmlns:a16="http://schemas.microsoft.com/office/drawing/2014/main" val="20001"/>
+                    </a:ext>
+                  </a:extLst>
+                </a:gridCol>
+                <a:gridCol w="1207008">
+                  <a:extLst>
+                    <a:ext uri="{9D8B030D-6E8A-4147-A177-3AD203B41FA5}">
+                      <a16:colId xmlns:a16="http://schemas.microsoft.com/office/drawing/2014/main" val="20002"/>
+                    </a:ext>
+                  </a:extLst>
+                </a:gridCol>
+                <a:gridCol w="1207008">
+                  <a:extLst>
+                    <a:ext uri="{9D8B030D-6E8A-4147-A177-3AD203B41FA5}">
+                      <a16:colId xmlns:a16="http://schemas.microsoft.com/office/drawing/2014/main" val="20003"/>
+                    </a:ext>
+                  </a:extLst>
+                </a:gridCol>
+                <a:gridCol w="1207008">
+                  <a:extLst>
+                    <a:ext uri="{9D8B030D-6E8A-4147-A177-3AD203B41FA5}">
+                      <a16:colId xmlns:a16="http://schemas.microsoft.com/office/drawing/2014/main" val="20004"/>
+                    </a:ext>
+                  </a:extLst>
+                </a:gridCol>
+                <a:gridCol w="1207008">
+                  <a:extLst>
+                    <a:ext uri="{9D8B030D-6E8A-4147-A177-3AD203B41FA5}">
+                      <a16:colId xmlns:a16="http://schemas.microsoft.com/office/drawing/2014/main" val="20005"/>
+                    </a:ext>
+                  </a:extLst>
+                </a:gridCol>
               </a:tblGrid>
               <a:tr h="0">
                 <a:tc>
@@ -7534,7 +7700,7 @@
                     <a:bodyPr/>
                     <a:lstStyle/>
                     <a:p>
-                      <a:pPr algn="ctr" indent="0" marL="0">
+                      <a:pPr marL="0" indent="0" algn="ctr">
                         <a:buNone/>
                       </a:pPr>
                       <a:r>
@@ -7555,7 +7721,7 @@
                       </a:endParaRPr>
                     </a:p>
                   </a:txBody>
-                  <a:tcPr marL="91440" marR="91440" marT="45720" marB="45720" anchor="ctr">
+                  <a:tcPr anchor="ctr">
                     <a:lnL w="6350" cap="flat" cmpd="sng" algn="ctr">
                       <a:solidFill>
                         <a:srgbClr val="D5D0E0"/>
@@ -7602,7 +7768,7 @@
                     <a:bodyPr/>
                     <a:lstStyle/>
                     <a:p>
-                      <a:pPr algn="ctr" indent="0" marL="0">
+                      <a:pPr marL="0" indent="0" algn="ctr">
                         <a:buNone/>
                       </a:pPr>
                       <a:r>
@@ -7623,7 +7789,7 @@
                       </a:endParaRPr>
                     </a:p>
                   </a:txBody>
-                  <a:tcPr marL="91440" marR="91440" marT="45720" marB="45720" anchor="ctr">
+                  <a:tcPr anchor="ctr">
                     <a:lnL w="6350" cap="flat" cmpd="sng" algn="ctr">
                       <a:solidFill>
                         <a:srgbClr val="D5D0E0"/>
@@ -7670,7 +7836,7 @@
                     <a:bodyPr/>
                     <a:lstStyle/>
                     <a:p>
-                      <a:pPr algn="ctr" indent="0" marL="0">
+                      <a:pPr marL="0" indent="0" algn="ctr">
                         <a:buNone/>
                       </a:pPr>
                       <a:r>
@@ -7691,7 +7857,7 @@
                       </a:endParaRPr>
                     </a:p>
                   </a:txBody>
-                  <a:tcPr marL="91440" marR="91440" marT="45720" marB="45720" anchor="ctr">
+                  <a:tcPr anchor="ctr">
                     <a:lnL w="6350" cap="flat" cmpd="sng" algn="ctr">
                       <a:solidFill>
                         <a:srgbClr val="D5D0E0"/>
@@ -7738,7 +7904,7 @@
                     <a:bodyPr/>
                     <a:lstStyle/>
                     <a:p>
-                      <a:pPr algn="ctr" indent="0" marL="0">
+                      <a:pPr marL="0" indent="0" algn="ctr">
                         <a:buNone/>
                       </a:pPr>
                       <a:r>
@@ -7759,7 +7925,7 @@
                       </a:endParaRPr>
                     </a:p>
                   </a:txBody>
-                  <a:tcPr marL="91440" marR="91440" marT="45720" marB="45720" anchor="ctr">
+                  <a:tcPr anchor="ctr">
                     <a:lnL w="6350" cap="flat" cmpd="sng" algn="ctr">
                       <a:solidFill>
                         <a:srgbClr val="D5D0E0"/>
@@ -7806,7 +7972,7 @@
                     <a:bodyPr/>
                     <a:lstStyle/>
                     <a:p>
-                      <a:pPr algn="ctr" indent="0" marL="0">
+                      <a:pPr marL="0" indent="0" algn="ctr">
                         <a:buNone/>
                       </a:pPr>
                       <a:r>
@@ -7827,7 +7993,7 @@
                       </a:endParaRPr>
                     </a:p>
                   </a:txBody>
-                  <a:tcPr marL="91440" marR="91440" marT="45720" marB="45720" anchor="ctr">
+                  <a:tcPr anchor="ctr">
                     <a:lnL w="6350" cap="flat" cmpd="sng" algn="ctr">
                       <a:solidFill>
                         <a:srgbClr val="D5D0E0"/>
@@ -7874,7 +8040,7 @@
                     <a:bodyPr/>
                     <a:lstStyle/>
                     <a:p>
-                      <a:pPr algn="ctr" indent="0" marL="0">
+                      <a:pPr marL="0" indent="0" algn="ctr">
                         <a:buNone/>
                       </a:pPr>
                       <a:r>
@@ -7895,7 +8061,7 @@
                       </a:endParaRPr>
                     </a:p>
                   </a:txBody>
-                  <a:tcPr marL="91440" marR="91440" marT="45720" marB="45720" anchor="ctr">
+                  <a:tcPr anchor="ctr">
                     <a:lnL w="6350" cap="flat" cmpd="sng" algn="ctr">
                       <a:solidFill>
                         <a:srgbClr val="D5D0E0"/>
@@ -7937,6 +8103,11 @@
                     </a:solidFill>
                   </a:tcPr>
                 </a:tc>
+                <a:extLst>
+                  <a:ext uri="{0D108BD9-81ED-4DB2-BD59-A6C34878D82A}">
+                    <a16:rowId xmlns:a16="http://schemas.microsoft.com/office/drawing/2014/main" val="10000"/>
+                  </a:ext>
+                </a:extLst>
               </a:tr>
               <a:tr h="0">
                 <a:tc>
@@ -7944,7 +8115,7 @@
                     <a:bodyPr/>
                     <a:lstStyle/>
                     <a:p>
-                      <a:pPr algn="l" indent="0" marL="0">
+                      <a:pPr marL="0" indent="0" algn="l">
                         <a:buNone/>
                       </a:pPr>
                       <a:r>
@@ -7965,7 +8136,7 @@
                       </a:endParaRPr>
                     </a:p>
                   </a:txBody>
-                  <a:tcPr marL="91440" marR="91440" marT="45720" marB="45720" anchor="ctr">
+                  <a:tcPr anchor="ctr">
                     <a:lnL w="6350" cap="flat" cmpd="sng" algn="ctr">
                       <a:solidFill>
                         <a:srgbClr val="D5D0E0"/>
@@ -8009,7 +8180,7 @@
                     <a:bodyPr/>
                     <a:lstStyle/>
                     <a:p>
-                      <a:pPr algn="ctr" indent="0" marL="0">
+                      <a:pPr marL="0" indent="0" algn="ctr">
                         <a:buNone/>
                       </a:pPr>
                       <a:r>
@@ -8030,7 +8201,7 @@
                       </a:endParaRPr>
                     </a:p>
                   </a:txBody>
-                  <a:tcPr marL="91440" marR="91440" marT="45720" marB="45720" anchor="ctr">
+                  <a:tcPr anchor="ctr">
                     <a:lnL w="6350" cap="flat" cmpd="sng" algn="ctr">
                       <a:solidFill>
                         <a:srgbClr val="D5D0E0"/>
@@ -8074,7 +8245,7 @@
                     <a:bodyPr/>
                     <a:lstStyle/>
                     <a:p>
-                      <a:pPr algn="ctr" indent="0" marL="0">
+                      <a:pPr marL="0" indent="0" algn="ctr">
                         <a:buNone/>
                       </a:pPr>
                       <a:r>
@@ -8095,7 +8266,7 @@
                       </a:endParaRPr>
                     </a:p>
                   </a:txBody>
-                  <a:tcPr marL="91440" marR="91440" marT="45720" marB="45720" anchor="ctr">
+                  <a:tcPr anchor="ctr">
                     <a:lnL w="6350" cap="flat" cmpd="sng" algn="ctr">
                       <a:solidFill>
                         <a:srgbClr val="D5D0E0"/>
@@ -8139,7 +8310,7 @@
                     <a:bodyPr/>
                     <a:lstStyle/>
                     <a:p>
-                      <a:pPr algn="ctr" indent="0" marL="0">
+                      <a:pPr marL="0" indent="0" algn="ctr">
                         <a:buNone/>
                       </a:pPr>
                       <a:r>
@@ -8160,7 +8331,7 @@
                       </a:endParaRPr>
                     </a:p>
                   </a:txBody>
-                  <a:tcPr marL="91440" marR="91440" marT="45720" marB="45720" anchor="ctr">
+                  <a:tcPr anchor="ctr">
                     <a:lnL w="6350" cap="flat" cmpd="sng" algn="ctr">
                       <a:solidFill>
                         <a:srgbClr val="D5D0E0"/>
@@ -8204,7 +8375,7 @@
                     <a:bodyPr/>
                     <a:lstStyle/>
                     <a:p>
-                      <a:pPr algn="ctr" indent="0" marL="0">
+                      <a:pPr marL="0" indent="0" algn="ctr">
                         <a:buNone/>
                       </a:pPr>
                       <a:r>
@@ -8225,7 +8396,7 @@
                       </a:endParaRPr>
                     </a:p>
                   </a:txBody>
-                  <a:tcPr marL="91440" marR="91440" marT="45720" marB="45720" anchor="ctr">
+                  <a:tcPr anchor="ctr">
                     <a:lnL w="6350" cap="flat" cmpd="sng" algn="ctr">
                       <a:solidFill>
                         <a:srgbClr val="D5D0E0"/>
@@ -8269,7 +8440,7 @@
                     <a:bodyPr/>
                     <a:lstStyle/>
                     <a:p>
-                      <a:pPr algn="ctr" indent="0" marL="0">
+                      <a:pPr marL="0" indent="0" algn="ctr">
                         <a:buNone/>
                       </a:pPr>
                       <a:r>
@@ -8290,7 +8461,7 @@
                       </a:endParaRPr>
                     </a:p>
                   </a:txBody>
-                  <a:tcPr marL="91440" marR="91440" marT="45720" marB="45720" anchor="ctr">
+                  <a:tcPr anchor="ctr">
                     <a:lnL w="6350" cap="flat" cmpd="sng" algn="ctr">
                       <a:solidFill>
                         <a:srgbClr val="D5D0E0"/>
@@ -8332,6 +8503,11 @@
                     </a:solidFill>
                   </a:tcPr>
                 </a:tc>
+                <a:extLst>
+                  <a:ext uri="{0D108BD9-81ED-4DB2-BD59-A6C34878D82A}">
+                    <a16:rowId xmlns:a16="http://schemas.microsoft.com/office/drawing/2014/main" val="10001"/>
+                  </a:ext>
+                </a:extLst>
               </a:tr>
               <a:tr h="0">
                 <a:tc>
@@ -8339,7 +8515,7 @@
                     <a:bodyPr/>
                     <a:lstStyle/>
                     <a:p>
-                      <a:pPr algn="l" indent="0" marL="0">
+                      <a:pPr marL="0" indent="0" algn="l">
                         <a:buNone/>
                       </a:pPr>
                       <a:r>
@@ -8360,7 +8536,7 @@
                       </a:endParaRPr>
                     </a:p>
                   </a:txBody>
-                  <a:tcPr marL="91440" marR="91440" marT="45720" marB="45720" anchor="ctr">
+                  <a:tcPr anchor="ctr">
                     <a:lnL w="6350" cap="flat" cmpd="sng" algn="ctr">
                       <a:solidFill>
                         <a:srgbClr val="D5D0E0"/>
@@ -8404,7 +8580,7 @@
                     <a:bodyPr/>
                     <a:lstStyle/>
                     <a:p>
-                      <a:pPr algn="ctr" indent="0" marL="0">
+                      <a:pPr marL="0" indent="0" algn="ctr">
                         <a:buNone/>
                       </a:pPr>
                       <a:r>
@@ -8425,7 +8601,7 @@
                       </a:endParaRPr>
                     </a:p>
                   </a:txBody>
-                  <a:tcPr marL="91440" marR="91440" marT="45720" marB="45720" anchor="ctr">
+                  <a:tcPr anchor="ctr">
                     <a:lnL w="6350" cap="flat" cmpd="sng" algn="ctr">
                       <a:solidFill>
                         <a:srgbClr val="D5D0E0"/>
@@ -8469,7 +8645,7 @@
                     <a:bodyPr/>
                     <a:lstStyle/>
                     <a:p>
-                      <a:pPr algn="ctr" indent="0" marL="0">
+                      <a:pPr marL="0" indent="0" algn="ctr">
                         <a:buNone/>
                       </a:pPr>
                       <a:r>
@@ -8490,7 +8666,7 @@
                       </a:endParaRPr>
                     </a:p>
                   </a:txBody>
-                  <a:tcPr marL="91440" marR="91440" marT="45720" marB="45720" anchor="ctr">
+                  <a:tcPr anchor="ctr">
                     <a:lnL w="6350" cap="flat" cmpd="sng" algn="ctr">
                       <a:solidFill>
                         <a:srgbClr val="D5D0E0"/>
@@ -8534,7 +8710,7 @@
                     <a:bodyPr/>
                     <a:lstStyle/>
                     <a:p>
-                      <a:pPr algn="ctr" indent="0" marL="0">
+                      <a:pPr marL="0" indent="0" algn="ctr">
                         <a:buNone/>
                       </a:pPr>
                       <a:r>
@@ -8555,7 +8731,7 @@
                       </a:endParaRPr>
                     </a:p>
                   </a:txBody>
-                  <a:tcPr marL="91440" marR="91440" marT="45720" marB="45720" anchor="ctr">
+                  <a:tcPr anchor="ctr">
                     <a:lnL w="6350" cap="flat" cmpd="sng" algn="ctr">
                       <a:solidFill>
                         <a:srgbClr val="D5D0E0"/>
@@ -8599,7 +8775,7 @@
                     <a:bodyPr/>
                     <a:lstStyle/>
                     <a:p>
-                      <a:pPr algn="ctr" indent="0" marL="0">
+                      <a:pPr marL="0" indent="0" algn="ctr">
                         <a:buNone/>
                       </a:pPr>
                       <a:r>
@@ -8620,7 +8796,7 @@
                       </a:endParaRPr>
                     </a:p>
                   </a:txBody>
-                  <a:tcPr marL="91440" marR="91440" marT="45720" marB="45720" anchor="ctr">
+                  <a:tcPr anchor="ctr">
                     <a:lnL w="6350" cap="flat" cmpd="sng" algn="ctr">
                       <a:solidFill>
                         <a:srgbClr val="D5D0E0"/>
@@ -8664,7 +8840,7 @@
                     <a:bodyPr/>
                     <a:lstStyle/>
                     <a:p>
-                      <a:pPr algn="ctr" indent="0" marL="0">
+                      <a:pPr marL="0" indent="0" algn="ctr">
                         <a:buNone/>
                       </a:pPr>
                       <a:r>
@@ -8685,7 +8861,7 @@
                       </a:endParaRPr>
                     </a:p>
                   </a:txBody>
-                  <a:tcPr marL="91440" marR="91440" marT="45720" marB="45720" anchor="ctr">
+                  <a:tcPr anchor="ctr">
                     <a:lnL w="6350" cap="flat" cmpd="sng" algn="ctr">
                       <a:solidFill>
                         <a:srgbClr val="D5D0E0"/>
@@ -8727,6 +8903,11 @@
                     </a:solidFill>
                   </a:tcPr>
                 </a:tc>
+                <a:extLst>
+                  <a:ext uri="{0D108BD9-81ED-4DB2-BD59-A6C34878D82A}">
+                    <a16:rowId xmlns:a16="http://schemas.microsoft.com/office/drawing/2014/main" val="10002"/>
+                  </a:ext>
+                </a:extLst>
               </a:tr>
               <a:tr h="0">
                 <a:tc>
@@ -8734,7 +8915,7 @@
                     <a:bodyPr/>
                     <a:lstStyle/>
                     <a:p>
-                      <a:pPr algn="l" indent="0" marL="0">
+                      <a:pPr marL="0" indent="0" algn="l">
                         <a:buNone/>
                       </a:pPr>
                       <a:r>
@@ -8755,7 +8936,7 @@
                       </a:endParaRPr>
                     </a:p>
                   </a:txBody>
-                  <a:tcPr marL="91440" marR="91440" marT="45720" marB="45720" anchor="ctr">
+                  <a:tcPr anchor="ctr">
                     <a:lnL w="6350" cap="flat" cmpd="sng" algn="ctr">
                       <a:solidFill>
                         <a:srgbClr val="D5D0E0"/>
@@ -8799,7 +8980,7 @@
                     <a:bodyPr/>
                     <a:lstStyle/>
                     <a:p>
-                      <a:pPr algn="ctr" indent="0" marL="0">
+                      <a:pPr marL="0" indent="0" algn="ctr">
                         <a:buNone/>
                       </a:pPr>
                       <a:r>
@@ -8820,7 +9001,7 @@
                       </a:endParaRPr>
                     </a:p>
                   </a:txBody>
-                  <a:tcPr marL="91440" marR="91440" marT="45720" marB="45720" anchor="ctr">
+                  <a:tcPr anchor="ctr">
                     <a:lnL w="6350" cap="flat" cmpd="sng" algn="ctr">
                       <a:solidFill>
                         <a:srgbClr val="D5D0E0"/>
@@ -8864,7 +9045,7 @@
                     <a:bodyPr/>
                     <a:lstStyle/>
                     <a:p>
-                      <a:pPr algn="ctr" indent="0" marL="0">
+                      <a:pPr marL="0" indent="0" algn="ctr">
                         <a:buNone/>
                       </a:pPr>
                       <a:r>
@@ -8885,7 +9066,7 @@
                       </a:endParaRPr>
                     </a:p>
                   </a:txBody>
-                  <a:tcPr marL="91440" marR="91440" marT="45720" marB="45720" anchor="ctr">
+                  <a:tcPr anchor="ctr">
                     <a:lnL w="6350" cap="flat" cmpd="sng" algn="ctr">
                       <a:solidFill>
                         <a:srgbClr val="D5D0E0"/>
@@ -8929,7 +9110,7 @@
                     <a:bodyPr/>
                     <a:lstStyle/>
                     <a:p>
-                      <a:pPr algn="ctr" indent="0" marL="0">
+                      <a:pPr marL="0" indent="0" algn="ctr">
                         <a:buNone/>
                       </a:pPr>
                       <a:r>
@@ -8950,7 +9131,7 @@
                       </a:endParaRPr>
                     </a:p>
                   </a:txBody>
-                  <a:tcPr marL="91440" marR="91440" marT="45720" marB="45720" anchor="ctr">
+                  <a:tcPr anchor="ctr">
                     <a:lnL w="6350" cap="flat" cmpd="sng" algn="ctr">
                       <a:solidFill>
                         <a:srgbClr val="D5D0E0"/>
@@ -8994,7 +9175,7 @@
                     <a:bodyPr/>
                     <a:lstStyle/>
                     <a:p>
-                      <a:pPr algn="ctr" indent="0" marL="0">
+                      <a:pPr marL="0" indent="0" algn="ctr">
                         <a:buNone/>
                       </a:pPr>
                       <a:r>
@@ -9015,7 +9196,7 @@
                       </a:endParaRPr>
                     </a:p>
                   </a:txBody>
-                  <a:tcPr marL="91440" marR="91440" marT="45720" marB="45720" anchor="ctr">
+                  <a:tcPr anchor="ctr">
                     <a:lnL w="6350" cap="flat" cmpd="sng" algn="ctr">
                       <a:solidFill>
                         <a:srgbClr val="D5D0E0"/>
@@ -9059,7 +9240,7 @@
                     <a:bodyPr/>
                     <a:lstStyle/>
                     <a:p>
-                      <a:pPr algn="ctr" indent="0" marL="0">
+                      <a:pPr marL="0" indent="0" algn="ctr">
                         <a:buNone/>
                       </a:pPr>
                       <a:r>
@@ -9080,7 +9261,7 @@
                       </a:endParaRPr>
                     </a:p>
                   </a:txBody>
-                  <a:tcPr marL="91440" marR="91440" marT="45720" marB="45720" anchor="ctr">
+                  <a:tcPr anchor="ctr">
                     <a:lnL w="6350" cap="flat" cmpd="sng" algn="ctr">
                       <a:solidFill>
                         <a:srgbClr val="D5D0E0"/>
@@ -9122,6 +9303,11 @@
                     </a:solidFill>
                   </a:tcPr>
                 </a:tc>
+                <a:extLst>
+                  <a:ext uri="{0D108BD9-81ED-4DB2-BD59-A6C34878D82A}">
+                    <a16:rowId xmlns:a16="http://schemas.microsoft.com/office/drawing/2014/main" val="10003"/>
+                  </a:ext>
+                </a:extLst>
               </a:tr>
               <a:tr h="0">
                 <a:tc>
@@ -9129,7 +9315,7 @@
                     <a:bodyPr/>
                     <a:lstStyle/>
                     <a:p>
-                      <a:pPr algn="l" indent="0" marL="0">
+                      <a:pPr marL="0" indent="0" algn="l">
                         <a:buNone/>
                       </a:pPr>
                       <a:r>
@@ -9150,7 +9336,7 @@
                       </a:endParaRPr>
                     </a:p>
                   </a:txBody>
-                  <a:tcPr marL="91440" marR="91440" marT="45720" marB="45720" anchor="ctr">
+                  <a:tcPr anchor="ctr">
                     <a:lnL w="6350" cap="flat" cmpd="sng" algn="ctr">
                       <a:solidFill>
                         <a:srgbClr val="D5D0E0"/>
@@ -9194,7 +9380,7 @@
                     <a:bodyPr/>
                     <a:lstStyle/>
                     <a:p>
-                      <a:pPr algn="ctr" indent="0" marL="0">
+                      <a:pPr marL="0" indent="0" algn="ctr">
                         <a:buNone/>
                       </a:pPr>
                       <a:r>
@@ -9215,7 +9401,7 @@
                       </a:endParaRPr>
                     </a:p>
                   </a:txBody>
-                  <a:tcPr marL="91440" marR="91440" marT="45720" marB="45720" anchor="ctr">
+                  <a:tcPr anchor="ctr">
                     <a:lnL w="6350" cap="flat" cmpd="sng" algn="ctr">
                       <a:solidFill>
                         <a:srgbClr val="D5D0E0"/>
@@ -9259,7 +9445,7 @@
                     <a:bodyPr/>
                     <a:lstStyle/>
                     <a:p>
-                      <a:pPr algn="ctr" indent="0" marL="0">
+                      <a:pPr marL="0" indent="0" algn="ctr">
                         <a:buNone/>
                       </a:pPr>
                       <a:r>
@@ -9280,7 +9466,7 @@
                       </a:endParaRPr>
                     </a:p>
                   </a:txBody>
-                  <a:tcPr marL="91440" marR="91440" marT="45720" marB="45720" anchor="ctr">
+                  <a:tcPr anchor="ctr">
                     <a:lnL w="6350" cap="flat" cmpd="sng" algn="ctr">
                       <a:solidFill>
                         <a:srgbClr val="D5D0E0"/>
@@ -9324,7 +9510,7 @@
                     <a:bodyPr/>
                     <a:lstStyle/>
                     <a:p>
-                      <a:pPr algn="ctr" indent="0" marL="0">
+                      <a:pPr marL="0" indent="0" algn="ctr">
                         <a:buNone/>
                       </a:pPr>
                       <a:r>
@@ -9345,7 +9531,7 @@
                       </a:endParaRPr>
                     </a:p>
                   </a:txBody>
-                  <a:tcPr marL="91440" marR="91440" marT="45720" marB="45720" anchor="ctr">
+                  <a:tcPr anchor="ctr">
                     <a:lnL w="6350" cap="flat" cmpd="sng" algn="ctr">
                       <a:solidFill>
                         <a:srgbClr val="D5D0E0"/>
@@ -9389,7 +9575,7 @@
                     <a:bodyPr/>
                     <a:lstStyle/>
                     <a:p>
-                      <a:pPr algn="ctr" indent="0" marL="0">
+                      <a:pPr marL="0" indent="0" algn="ctr">
                         <a:buNone/>
                       </a:pPr>
                       <a:r>
@@ -9410,7 +9596,7 @@
                       </a:endParaRPr>
                     </a:p>
                   </a:txBody>
-                  <a:tcPr marL="91440" marR="91440" marT="45720" marB="45720" anchor="ctr">
+                  <a:tcPr anchor="ctr">
                     <a:lnL w="6350" cap="flat" cmpd="sng" algn="ctr">
                       <a:solidFill>
                         <a:srgbClr val="D5D0E0"/>
@@ -9454,7 +9640,7 @@
                     <a:bodyPr/>
                     <a:lstStyle/>
                     <a:p>
-                      <a:pPr algn="ctr" indent="0" marL="0">
+                      <a:pPr marL="0" indent="0" algn="ctr">
                         <a:buNone/>
                       </a:pPr>
                       <a:r>
@@ -9475,7 +9661,7 @@
                       </a:endParaRPr>
                     </a:p>
                   </a:txBody>
-                  <a:tcPr marL="91440" marR="91440" marT="45720" marB="45720" anchor="ctr">
+                  <a:tcPr anchor="ctr">
                     <a:lnL w="6350" cap="flat" cmpd="sng" algn="ctr">
                       <a:solidFill>
                         <a:srgbClr val="D5D0E0"/>
@@ -9517,6 +9703,11 @@
                     </a:solidFill>
                   </a:tcPr>
                 </a:tc>
+                <a:extLst>
+                  <a:ext uri="{0D108BD9-81ED-4DB2-BD59-A6C34878D82A}">
+                    <a16:rowId xmlns:a16="http://schemas.microsoft.com/office/drawing/2014/main" val="10004"/>
+                  </a:ext>
+                </a:extLst>
               </a:tr>
               <a:tr h="0">
                 <a:tc>
@@ -9524,7 +9715,7 @@
                     <a:bodyPr/>
                     <a:lstStyle/>
                     <a:p>
-                      <a:pPr algn="l" indent="0" marL="0">
+                      <a:pPr marL="0" indent="0" algn="l">
                         <a:buNone/>
                       </a:pPr>
                       <a:r>
@@ -9545,7 +9736,7 @@
                       </a:endParaRPr>
                     </a:p>
                   </a:txBody>
-                  <a:tcPr marL="91440" marR="91440" marT="45720" marB="45720" anchor="ctr">
+                  <a:tcPr anchor="ctr">
                     <a:lnL w="6350" cap="flat" cmpd="sng" algn="ctr">
                       <a:solidFill>
                         <a:srgbClr val="D5D0E0"/>
@@ -9589,7 +9780,7 @@
                     <a:bodyPr/>
                     <a:lstStyle/>
                     <a:p>
-                      <a:pPr algn="ctr" indent="0" marL="0">
+                      <a:pPr marL="0" indent="0" algn="ctr">
                         <a:buNone/>
                       </a:pPr>
                       <a:r>
@@ -9610,7 +9801,7 @@
                       </a:endParaRPr>
                     </a:p>
                   </a:txBody>
-                  <a:tcPr marL="91440" marR="91440" marT="45720" marB="45720" anchor="ctr">
+                  <a:tcPr anchor="ctr">
                     <a:lnL w="6350" cap="flat" cmpd="sng" algn="ctr">
                       <a:solidFill>
                         <a:srgbClr val="D5D0E0"/>
@@ -9654,7 +9845,7 @@
                     <a:bodyPr/>
                     <a:lstStyle/>
                     <a:p>
-                      <a:pPr algn="ctr" indent="0" marL="0">
+                      <a:pPr marL="0" indent="0" algn="ctr">
                         <a:buNone/>
                       </a:pPr>
                       <a:r>
@@ -9675,7 +9866,7 @@
                       </a:endParaRPr>
                     </a:p>
                   </a:txBody>
-                  <a:tcPr marL="91440" marR="91440" marT="45720" marB="45720" anchor="ctr">
+                  <a:tcPr anchor="ctr">
                     <a:lnL w="6350" cap="flat" cmpd="sng" algn="ctr">
                       <a:solidFill>
                         <a:srgbClr val="D5D0E0"/>
@@ -9719,7 +9910,7 @@
                     <a:bodyPr/>
                     <a:lstStyle/>
                     <a:p>
-                      <a:pPr algn="ctr" indent="0" marL="0">
+                      <a:pPr marL="0" indent="0" algn="ctr">
                         <a:buNone/>
                       </a:pPr>
                       <a:r>
@@ -9740,7 +9931,7 @@
                       </a:endParaRPr>
                     </a:p>
                   </a:txBody>
-                  <a:tcPr marL="91440" marR="91440" marT="45720" marB="45720" anchor="ctr">
+                  <a:tcPr anchor="ctr">
                     <a:lnL w="6350" cap="flat" cmpd="sng" algn="ctr">
                       <a:solidFill>
                         <a:srgbClr val="D5D0E0"/>
@@ -9784,7 +9975,7 @@
                     <a:bodyPr/>
                     <a:lstStyle/>
                     <a:p>
-                      <a:pPr algn="ctr" indent="0" marL="0">
+                      <a:pPr marL="0" indent="0" algn="ctr">
                         <a:buNone/>
                       </a:pPr>
                       <a:r>
@@ -9805,7 +9996,7 @@
                       </a:endParaRPr>
                     </a:p>
                   </a:txBody>
-                  <a:tcPr marL="91440" marR="91440" marT="45720" marB="45720" anchor="ctr">
+                  <a:tcPr anchor="ctr">
                     <a:lnL w="6350" cap="flat" cmpd="sng" algn="ctr">
                       <a:solidFill>
                         <a:srgbClr val="D5D0E0"/>
@@ -9849,7 +10040,7 @@
                     <a:bodyPr/>
                     <a:lstStyle/>
                     <a:p>
-                      <a:pPr algn="ctr" indent="0" marL="0">
+                      <a:pPr marL="0" indent="0" algn="ctr">
                         <a:buNone/>
                       </a:pPr>
                       <a:r>
@@ -9870,7 +10061,7 @@
                       </a:endParaRPr>
                     </a:p>
                   </a:txBody>
-                  <a:tcPr marL="91440" marR="91440" marT="45720" marB="45720" anchor="ctr">
+                  <a:tcPr anchor="ctr">
                     <a:lnL w="6350" cap="flat" cmpd="sng" algn="ctr">
                       <a:solidFill>
                         <a:srgbClr val="D5D0E0"/>
@@ -9912,6 +10103,11 @@
                     </a:solidFill>
                   </a:tcPr>
                 </a:tc>
+                <a:extLst>
+                  <a:ext uri="{0D108BD9-81ED-4DB2-BD59-A6C34878D82A}">
+                    <a16:rowId xmlns:a16="http://schemas.microsoft.com/office/drawing/2014/main" val="10005"/>
+                  </a:ext>
+                </a:extLst>
               </a:tr>
               <a:tr h="0">
                 <a:tc>
@@ -9919,7 +10115,7 @@
                     <a:bodyPr/>
                     <a:lstStyle/>
                     <a:p>
-                      <a:pPr algn="l" indent="0" marL="0">
+                      <a:pPr marL="0" indent="0" algn="l">
                         <a:buNone/>
                       </a:pPr>
                       <a:r>
@@ -9940,7 +10136,7 @@
                       </a:endParaRPr>
                     </a:p>
                   </a:txBody>
-                  <a:tcPr marL="91440" marR="91440" marT="45720" marB="45720" anchor="ctr">
+                  <a:tcPr anchor="ctr">
                     <a:lnL w="6350" cap="flat" cmpd="sng" algn="ctr">
                       <a:solidFill>
                         <a:srgbClr val="D5D0E0"/>
@@ -9984,7 +10180,7 @@
                     <a:bodyPr/>
                     <a:lstStyle/>
                     <a:p>
-                      <a:pPr algn="ctr" indent="0" marL="0">
+                      <a:pPr marL="0" indent="0" algn="ctr">
                         <a:buNone/>
                       </a:pPr>
                       <a:r>
@@ -10005,7 +10201,7 @@
                       </a:endParaRPr>
                     </a:p>
                   </a:txBody>
-                  <a:tcPr marL="91440" marR="91440" marT="45720" marB="45720" anchor="ctr">
+                  <a:tcPr anchor="ctr">
                     <a:lnL w="6350" cap="flat" cmpd="sng" algn="ctr">
                       <a:solidFill>
                         <a:srgbClr val="D5D0E0"/>
@@ -10049,7 +10245,7 @@
                     <a:bodyPr/>
                     <a:lstStyle/>
                     <a:p>
-                      <a:pPr algn="ctr" indent="0" marL="0">
+                      <a:pPr marL="0" indent="0" algn="ctr">
                         <a:buNone/>
                       </a:pPr>
                       <a:r>
@@ -10070,7 +10266,7 @@
                       </a:endParaRPr>
                     </a:p>
                   </a:txBody>
-                  <a:tcPr marL="91440" marR="91440" marT="45720" marB="45720" anchor="ctr">
+                  <a:tcPr anchor="ctr">
                     <a:lnL w="6350" cap="flat" cmpd="sng" algn="ctr">
                       <a:solidFill>
                         <a:srgbClr val="D5D0E0"/>
@@ -10114,7 +10310,7 @@
                     <a:bodyPr/>
                     <a:lstStyle/>
                     <a:p>
-                      <a:pPr algn="ctr" indent="0" marL="0">
+                      <a:pPr marL="0" indent="0" algn="ctr">
                         <a:buNone/>
                       </a:pPr>
                       <a:r>
@@ -10135,7 +10331,7 @@
                       </a:endParaRPr>
                     </a:p>
                   </a:txBody>
-                  <a:tcPr marL="91440" marR="91440" marT="45720" marB="45720" anchor="ctr">
+                  <a:tcPr anchor="ctr">
                     <a:lnL w="6350" cap="flat" cmpd="sng" algn="ctr">
                       <a:solidFill>
                         <a:srgbClr val="D5D0E0"/>
@@ -10179,7 +10375,7 @@
                     <a:bodyPr/>
                     <a:lstStyle/>
                     <a:p>
-                      <a:pPr algn="ctr" indent="0" marL="0">
+                      <a:pPr marL="0" indent="0" algn="ctr">
                         <a:buNone/>
                       </a:pPr>
                       <a:r>
@@ -10200,7 +10396,7 @@
                       </a:endParaRPr>
                     </a:p>
                   </a:txBody>
-                  <a:tcPr marL="91440" marR="91440" marT="45720" marB="45720" anchor="ctr">
+                  <a:tcPr anchor="ctr">
                     <a:lnL w="6350" cap="flat" cmpd="sng" algn="ctr">
                       <a:solidFill>
                         <a:srgbClr val="D5D0E0"/>
@@ -10244,7 +10440,7 @@
                     <a:bodyPr/>
                     <a:lstStyle/>
                     <a:p>
-                      <a:pPr algn="ctr" indent="0" marL="0">
+                      <a:pPr marL="0" indent="0" algn="ctr">
                         <a:buNone/>
                       </a:pPr>
                       <a:r>
@@ -10265,7 +10461,7 @@
                       </a:endParaRPr>
                     </a:p>
                   </a:txBody>
-                  <a:tcPr marL="91440" marR="91440" marT="45720" marB="45720" anchor="ctr">
+                  <a:tcPr anchor="ctr">
                     <a:lnL w="6350" cap="flat" cmpd="sng" algn="ctr">
                       <a:solidFill>
                         <a:srgbClr val="D5D0E0"/>
@@ -10307,6 +10503,11 @@
                     </a:solidFill>
                   </a:tcPr>
                 </a:tc>
+                <a:extLst>
+                  <a:ext uri="{0D108BD9-81ED-4DB2-BD59-A6C34878D82A}">
+                    <a16:rowId xmlns:a16="http://schemas.microsoft.com/office/drawing/2014/main" val="10006"/>
+                  </a:ext>
+                </a:extLst>
               </a:tr>
               <a:tr h="0">
                 <a:tc>
@@ -10314,7 +10515,7 @@
                     <a:bodyPr/>
                     <a:lstStyle/>
                     <a:p>
-                      <a:pPr algn="l" indent="0" marL="0">
+                      <a:pPr marL="0" indent="0" algn="l">
                         <a:buNone/>
                       </a:pPr>
                       <a:r>
@@ -10335,7 +10536,7 @@
                       </a:endParaRPr>
                     </a:p>
                   </a:txBody>
-                  <a:tcPr marL="91440" marR="91440" marT="45720" marB="45720" anchor="ctr">
+                  <a:tcPr anchor="ctr">
                     <a:lnL w="6350" cap="flat" cmpd="sng" algn="ctr">
                       <a:solidFill>
                         <a:srgbClr val="D5D0E0"/>
@@ -10379,7 +10580,268 @@
                     <a:bodyPr/>
                     <a:lstStyle/>
                     <a:p>
-                      <a:pPr algn="ctr" indent="0" marL="0">
+                      <a:pPr marL="0" indent="0" algn="ctr">
+                        <a:buNone/>
+                      </a:pPr>
+                      <a:r>
+                        <a:rPr lang="en-US" sz="1000" dirty="0" err="1">
+                          <a:solidFill>
+                            <a:srgbClr val="24184E"/>
+                          </a:solidFill>
+                          <a:latin typeface="Montserrat" pitchFamily="34" charset="0"/>
+                          <a:ea typeface="Montserrat" pitchFamily="34" charset="-122"/>
+                          <a:cs typeface="Montserrat" pitchFamily="34" charset="-120"/>
+                        </a:rPr>
+                        <a:t>Усл</a:t>
+                      </a:r>
+                      <a:r>
+                        <a:rPr lang="ru-RU" sz="1000" dirty="0" err="1">
+                          <a:solidFill>
+                            <a:srgbClr val="24184E"/>
+                          </a:solidFill>
+                          <a:latin typeface="Montserrat" pitchFamily="34" charset="0"/>
+                          <a:ea typeface="Montserrat" pitchFamily="34" charset="-122"/>
+                          <a:cs typeface="Montserrat" pitchFamily="34" charset="-120"/>
+                        </a:rPr>
+                        <a:t>овно</a:t>
+                      </a:r>
+                      <a:r>
+                        <a:rPr lang="en-US" sz="1000" dirty="0">
+                          <a:solidFill>
+                            <a:srgbClr val="24184E"/>
+                          </a:solidFill>
+                          <a:latin typeface="Montserrat" pitchFamily="34" charset="0"/>
+                          <a:ea typeface="Montserrat" pitchFamily="34" charset="-122"/>
+                          <a:cs typeface="Montserrat" pitchFamily="34" charset="-120"/>
+                        </a:rPr>
+                        <a:t>-</a:t>
+                      </a:r>
+                      <a:r>
+                        <a:rPr lang="en-US" sz="1000" dirty="0" err="1">
+                          <a:solidFill>
+                            <a:srgbClr val="24184E"/>
+                          </a:solidFill>
+                          <a:latin typeface="Montserrat" pitchFamily="34" charset="0"/>
+                          <a:ea typeface="Montserrat" pitchFamily="34" charset="-122"/>
+                          <a:cs typeface="Montserrat" pitchFamily="34" charset="-120"/>
+                        </a:rPr>
+                        <a:t>бесплатная</a:t>
+                      </a:r>
+                      <a:endParaRPr lang="en-US" sz="1000" dirty="0">
+                        <a:latin typeface="Montserrat" charset="0"/>
+                        <a:ea typeface="Montserrat" charset="0"/>
+                        <a:cs typeface="Montserrat" charset="0"/>
+                      </a:endParaRPr>
+                    </a:p>
+                  </a:txBody>
+                  <a:tcPr anchor="ctr">
+                    <a:lnL w="6350" cap="flat" cmpd="sng" algn="ctr">
+                      <a:solidFill>
+                        <a:srgbClr val="D5D0E0"/>
+                      </a:solidFill>
+                      <a:prstDash val="solid"/>
+                      <a:round/>
+                      <a:headEnd type="none" w="med" len="med"/>
+                      <a:tailEnd type="none" w="med" len="med"/>
+                    </a:lnL>
+                    <a:lnR w="6350" cap="flat" cmpd="sng" algn="ctr">
+                      <a:solidFill>
+                        <a:srgbClr val="D5D0E0"/>
+                      </a:solidFill>
+                      <a:prstDash val="solid"/>
+                      <a:round/>
+                      <a:headEnd type="none" w="med" len="med"/>
+                      <a:tailEnd type="none" w="med" len="med"/>
+                    </a:lnR>
+                    <a:lnT w="6350" cap="flat" cmpd="sng" algn="ctr">
+                      <a:solidFill>
+                        <a:srgbClr val="D5D0E0"/>
+                      </a:solidFill>
+                      <a:prstDash val="solid"/>
+                      <a:round/>
+                      <a:headEnd type="none" w="med" len="med"/>
+                      <a:tailEnd type="none" w="med" len="med"/>
+                    </a:lnT>
+                    <a:lnB w="6350" cap="flat" cmpd="sng" algn="ctr">
+                      <a:solidFill>
+                        <a:srgbClr val="D5D0E0"/>
+                      </a:solidFill>
+                      <a:prstDash val="solid"/>
+                      <a:round/>
+                      <a:headEnd type="none" w="med" len="med"/>
+                      <a:tailEnd type="none" w="med" len="med"/>
+                    </a:lnB>
+                  </a:tcPr>
+                </a:tc>
+                <a:tc>
+                  <a:txBody>
+                    <a:bodyPr/>
+                    <a:lstStyle/>
+                    <a:p>
+                      <a:pPr marL="0" indent="0" algn="ctr">
+                        <a:buNone/>
+                      </a:pPr>
+                      <a:r>
+                        <a:rPr lang="en-US" sz="1000" dirty="0" err="1">
+                          <a:solidFill>
+                            <a:srgbClr val="24184E"/>
+                          </a:solidFill>
+                          <a:latin typeface="Montserrat" pitchFamily="34" charset="0"/>
+                          <a:ea typeface="Montserrat" pitchFamily="34" charset="-122"/>
+                          <a:cs typeface="Montserrat" pitchFamily="34" charset="-120"/>
+                        </a:rPr>
+                        <a:t>Усл</a:t>
+                      </a:r>
+                      <a:r>
+                        <a:rPr lang="ru-RU" sz="1000" dirty="0" err="1">
+                          <a:solidFill>
+                            <a:srgbClr val="24184E"/>
+                          </a:solidFill>
+                          <a:latin typeface="Montserrat" pitchFamily="34" charset="0"/>
+                          <a:ea typeface="Montserrat" pitchFamily="34" charset="-122"/>
+                          <a:cs typeface="Montserrat" pitchFamily="34" charset="-120"/>
+                        </a:rPr>
+                        <a:t>овно</a:t>
+                      </a:r>
+                      <a:r>
+                        <a:rPr lang="en-US" sz="1000" dirty="0">
+                          <a:solidFill>
+                            <a:srgbClr val="24184E"/>
+                          </a:solidFill>
+                          <a:latin typeface="Montserrat" pitchFamily="34" charset="0"/>
+                          <a:ea typeface="Montserrat" pitchFamily="34" charset="-122"/>
+                          <a:cs typeface="Montserrat" pitchFamily="34" charset="-120"/>
+                        </a:rPr>
+                        <a:t>-</a:t>
+                      </a:r>
+                      <a:r>
+                        <a:rPr lang="en-US" sz="1000" dirty="0" err="1">
+                          <a:solidFill>
+                            <a:srgbClr val="24184E"/>
+                          </a:solidFill>
+                          <a:latin typeface="Montserrat" pitchFamily="34" charset="0"/>
+                          <a:ea typeface="Montserrat" pitchFamily="34" charset="-122"/>
+                          <a:cs typeface="Montserrat" pitchFamily="34" charset="-120"/>
+                        </a:rPr>
+                        <a:t>бесплатная</a:t>
+                      </a:r>
+                      <a:endParaRPr lang="en-US" sz="1000" dirty="0">
+                        <a:latin typeface="Montserrat" charset="0"/>
+                        <a:ea typeface="Montserrat" charset="0"/>
+                        <a:cs typeface="Montserrat" charset="0"/>
+                      </a:endParaRPr>
+                    </a:p>
+                  </a:txBody>
+                  <a:tcPr anchor="ctr">
+                    <a:lnL w="6350" cap="flat" cmpd="sng" algn="ctr">
+                      <a:solidFill>
+                        <a:srgbClr val="D5D0E0"/>
+                      </a:solidFill>
+                      <a:prstDash val="solid"/>
+                      <a:round/>
+                      <a:headEnd type="none" w="med" len="med"/>
+                      <a:tailEnd type="none" w="med" len="med"/>
+                    </a:lnL>
+                    <a:lnR w="6350" cap="flat" cmpd="sng" algn="ctr">
+                      <a:solidFill>
+                        <a:srgbClr val="D5D0E0"/>
+                      </a:solidFill>
+                      <a:prstDash val="solid"/>
+                      <a:round/>
+                      <a:headEnd type="none" w="med" len="med"/>
+                      <a:tailEnd type="none" w="med" len="med"/>
+                    </a:lnR>
+                    <a:lnT w="6350" cap="flat" cmpd="sng" algn="ctr">
+                      <a:solidFill>
+                        <a:srgbClr val="D5D0E0"/>
+                      </a:solidFill>
+                      <a:prstDash val="solid"/>
+                      <a:round/>
+                      <a:headEnd type="none" w="med" len="med"/>
+                      <a:tailEnd type="none" w="med" len="med"/>
+                    </a:lnT>
+                    <a:lnB w="6350" cap="flat" cmpd="sng" algn="ctr">
+                      <a:solidFill>
+                        <a:srgbClr val="D5D0E0"/>
+                      </a:solidFill>
+                      <a:prstDash val="solid"/>
+                      <a:round/>
+                      <a:headEnd type="none" w="med" len="med"/>
+                      <a:tailEnd type="none" w="med" len="med"/>
+                    </a:lnB>
+                  </a:tcPr>
+                </a:tc>
+                <a:tc>
+                  <a:txBody>
+                    <a:bodyPr/>
+                    <a:lstStyle/>
+                    <a:p>
+                      <a:pPr marL="0" indent="0" algn="ctr">
+                        <a:buNone/>
+                      </a:pPr>
+                      <a:r>
+                        <a:rPr lang="en-US" sz="1000" dirty="0">
+                          <a:solidFill>
+                            <a:srgbClr val="24184E"/>
+                          </a:solidFill>
+                          <a:latin typeface="Montserrat" pitchFamily="34" charset="0"/>
+                          <a:ea typeface="Montserrat" pitchFamily="34" charset="-122"/>
+                          <a:cs typeface="Montserrat" pitchFamily="34" charset="-120"/>
+                        </a:rPr>
+                        <a:t>Бесплатная</a:t>
+                      </a:r>
+                      <a:endParaRPr lang="en-US" sz="1000" dirty="0">
+                        <a:latin typeface="Montserrat" charset="0"/>
+                        <a:ea typeface="Montserrat" charset="0"/>
+                        <a:cs typeface="Montserrat" charset="0"/>
+                      </a:endParaRPr>
+                    </a:p>
+                  </a:txBody>
+                  <a:tcPr anchor="ctr">
+                    <a:lnL w="6350" cap="flat" cmpd="sng" algn="ctr">
+                      <a:solidFill>
+                        <a:srgbClr val="D5D0E0"/>
+                      </a:solidFill>
+                      <a:prstDash val="solid"/>
+                      <a:round/>
+                      <a:headEnd type="none" w="med" len="med"/>
+                      <a:tailEnd type="none" w="med" len="med"/>
+                    </a:lnL>
+                    <a:lnR w="6350" cap="flat" cmpd="sng" algn="ctr">
+                      <a:solidFill>
+                        <a:srgbClr val="D5D0E0"/>
+                      </a:solidFill>
+                      <a:prstDash val="solid"/>
+                      <a:round/>
+                      <a:headEnd type="none" w="med" len="med"/>
+                      <a:tailEnd type="none" w="med" len="med"/>
+                    </a:lnR>
+                    <a:lnT w="6350" cap="flat" cmpd="sng" algn="ctr">
+                      <a:solidFill>
+                        <a:srgbClr val="D5D0E0"/>
+                      </a:solidFill>
+                      <a:prstDash val="solid"/>
+                      <a:round/>
+                      <a:headEnd type="none" w="med" len="med"/>
+                      <a:tailEnd type="none" w="med" len="med"/>
+                    </a:lnT>
+                    <a:lnB w="6350" cap="flat" cmpd="sng" algn="ctr">
+                      <a:solidFill>
+                        <a:srgbClr val="D5D0E0"/>
+                      </a:solidFill>
+                      <a:prstDash val="solid"/>
+                      <a:round/>
+                      <a:headEnd type="none" w="med" len="med"/>
+                      <a:tailEnd type="none" w="med" len="med"/>
+                    </a:lnB>
+                  </a:tcPr>
+                </a:tc>
+                <a:tc>
+                  <a:txBody>
+                    <a:bodyPr/>
+                    <a:lstStyle/>
+                    <a:p>
+                      <a:pPr marL="0" indent="0" algn="ctr">
                         <a:buNone/>
                       </a:pPr>
                       <a:r>
@@ -10400,7 +10862,7 @@
                       </a:endParaRPr>
                     </a:p>
                   </a:txBody>
-                  <a:tcPr marL="91440" marR="91440" marT="45720" marB="45720" anchor="ctr">
+                  <a:tcPr anchor="ctr">
                     <a:lnL w="6350" cap="flat" cmpd="sng" algn="ctr">
                       <a:solidFill>
                         <a:srgbClr val="D5D0E0"/>
@@ -10444,202 +10906,7 @@
                     <a:bodyPr/>
                     <a:lstStyle/>
                     <a:p>
-                      <a:pPr algn="ctr" indent="0" marL="0">
-                        <a:buNone/>
-                      </a:pPr>
-                      <a:r>
-                        <a:rPr lang="en-US" sz="1000" dirty="0">
-                          <a:solidFill>
-                            <a:srgbClr val="24184E"/>
-                          </a:solidFill>
-                          <a:latin typeface="Montserrat" pitchFamily="34" charset="0"/>
-                          <a:ea typeface="Montserrat" pitchFamily="34" charset="-122"/>
-                          <a:cs typeface="Montserrat" pitchFamily="34" charset="-120"/>
-                        </a:rPr>
-                        <a:t>Усл.-бесплатная</a:t>
-                      </a:r>
-                      <a:endParaRPr lang="en-US" sz="1000" dirty="0">
-                        <a:latin typeface="Montserrat" charset="0"/>
-                        <a:ea typeface="Montserrat" charset="0"/>
-                        <a:cs typeface="Montserrat" charset="0"/>
-                      </a:endParaRPr>
-                    </a:p>
-                  </a:txBody>
-                  <a:tcPr marL="91440" marR="91440" marT="45720" marB="45720" anchor="ctr">
-                    <a:lnL w="6350" cap="flat" cmpd="sng" algn="ctr">
-                      <a:solidFill>
-                        <a:srgbClr val="D5D0E0"/>
-                      </a:solidFill>
-                      <a:prstDash val="solid"/>
-                      <a:round/>
-                      <a:headEnd type="none" w="med" len="med"/>
-                      <a:tailEnd type="none" w="med" len="med"/>
-                    </a:lnL>
-                    <a:lnR w="6350" cap="flat" cmpd="sng" algn="ctr">
-                      <a:solidFill>
-                        <a:srgbClr val="D5D0E0"/>
-                      </a:solidFill>
-                      <a:prstDash val="solid"/>
-                      <a:round/>
-                      <a:headEnd type="none" w="med" len="med"/>
-                      <a:tailEnd type="none" w="med" len="med"/>
-                    </a:lnR>
-                    <a:lnT w="6350" cap="flat" cmpd="sng" algn="ctr">
-                      <a:solidFill>
-                        <a:srgbClr val="D5D0E0"/>
-                      </a:solidFill>
-                      <a:prstDash val="solid"/>
-                      <a:round/>
-                      <a:headEnd type="none" w="med" len="med"/>
-                      <a:tailEnd type="none" w="med" len="med"/>
-                    </a:lnT>
-                    <a:lnB w="6350" cap="flat" cmpd="sng" algn="ctr">
-                      <a:solidFill>
-                        <a:srgbClr val="D5D0E0"/>
-                      </a:solidFill>
-                      <a:prstDash val="solid"/>
-                      <a:round/>
-                      <a:headEnd type="none" w="med" len="med"/>
-                      <a:tailEnd type="none" w="med" len="med"/>
-                    </a:lnB>
-                  </a:tcPr>
-                </a:tc>
-                <a:tc>
-                  <a:txBody>
-                    <a:bodyPr/>
-                    <a:lstStyle/>
-                    <a:p>
-                      <a:pPr algn="ctr" indent="0" marL="0">
-                        <a:buNone/>
-                      </a:pPr>
-                      <a:r>
-                        <a:rPr lang="en-US" sz="1000" dirty="0">
-                          <a:solidFill>
-                            <a:srgbClr val="24184E"/>
-                          </a:solidFill>
-                          <a:latin typeface="Montserrat" pitchFamily="34" charset="0"/>
-                          <a:ea typeface="Montserrat" pitchFamily="34" charset="-122"/>
-                          <a:cs typeface="Montserrat" pitchFamily="34" charset="-120"/>
-                        </a:rPr>
-                        <a:t>Бесплатная</a:t>
-                      </a:r>
-                      <a:endParaRPr lang="en-US" sz="1000" dirty="0">
-                        <a:latin typeface="Montserrat" charset="0"/>
-                        <a:ea typeface="Montserrat" charset="0"/>
-                        <a:cs typeface="Montserrat" charset="0"/>
-                      </a:endParaRPr>
-                    </a:p>
-                  </a:txBody>
-                  <a:tcPr marL="91440" marR="91440" marT="45720" marB="45720" anchor="ctr">
-                    <a:lnL w="6350" cap="flat" cmpd="sng" algn="ctr">
-                      <a:solidFill>
-                        <a:srgbClr val="D5D0E0"/>
-                      </a:solidFill>
-                      <a:prstDash val="solid"/>
-                      <a:round/>
-                      <a:headEnd type="none" w="med" len="med"/>
-                      <a:tailEnd type="none" w="med" len="med"/>
-                    </a:lnL>
-                    <a:lnR w="6350" cap="flat" cmpd="sng" algn="ctr">
-                      <a:solidFill>
-                        <a:srgbClr val="D5D0E0"/>
-                      </a:solidFill>
-                      <a:prstDash val="solid"/>
-                      <a:round/>
-                      <a:headEnd type="none" w="med" len="med"/>
-                      <a:tailEnd type="none" w="med" len="med"/>
-                    </a:lnR>
-                    <a:lnT w="6350" cap="flat" cmpd="sng" algn="ctr">
-                      <a:solidFill>
-                        <a:srgbClr val="D5D0E0"/>
-                      </a:solidFill>
-                      <a:prstDash val="solid"/>
-                      <a:round/>
-                      <a:headEnd type="none" w="med" len="med"/>
-                      <a:tailEnd type="none" w="med" len="med"/>
-                    </a:lnT>
-                    <a:lnB w="6350" cap="flat" cmpd="sng" algn="ctr">
-                      <a:solidFill>
-                        <a:srgbClr val="D5D0E0"/>
-                      </a:solidFill>
-                      <a:prstDash val="solid"/>
-                      <a:round/>
-                      <a:headEnd type="none" w="med" len="med"/>
-                      <a:tailEnd type="none" w="med" len="med"/>
-                    </a:lnB>
-                  </a:tcPr>
-                </a:tc>
-                <a:tc>
-                  <a:txBody>
-                    <a:bodyPr/>
-                    <a:lstStyle/>
-                    <a:p>
-                      <a:pPr algn="ctr" indent="0" marL="0">
-                        <a:buNone/>
-                      </a:pPr>
-                      <a:r>
-                        <a:rPr lang="en-US" sz="1000" dirty="0">
-                          <a:solidFill>
-                            <a:srgbClr val="24184E"/>
-                          </a:solidFill>
-                          <a:latin typeface="Montserrat" pitchFamily="34" charset="0"/>
-                          <a:ea typeface="Montserrat" pitchFamily="34" charset="-122"/>
-                          <a:cs typeface="Montserrat" pitchFamily="34" charset="-120"/>
-                        </a:rPr>
-                        <a:t>Усл.-бесплатная</a:t>
-                      </a:r>
-                      <a:endParaRPr lang="en-US" sz="1000" dirty="0">
-                        <a:latin typeface="Montserrat" charset="0"/>
-                        <a:ea typeface="Montserrat" charset="0"/>
-                        <a:cs typeface="Montserrat" charset="0"/>
-                      </a:endParaRPr>
-                    </a:p>
-                  </a:txBody>
-                  <a:tcPr marL="91440" marR="91440" marT="45720" marB="45720" anchor="ctr">
-                    <a:lnL w="6350" cap="flat" cmpd="sng" algn="ctr">
-                      <a:solidFill>
-                        <a:srgbClr val="D5D0E0"/>
-                      </a:solidFill>
-                      <a:prstDash val="solid"/>
-                      <a:round/>
-                      <a:headEnd type="none" w="med" len="med"/>
-                      <a:tailEnd type="none" w="med" len="med"/>
-                    </a:lnL>
-                    <a:lnR w="6350" cap="flat" cmpd="sng" algn="ctr">
-                      <a:solidFill>
-                        <a:srgbClr val="D5D0E0"/>
-                      </a:solidFill>
-                      <a:prstDash val="solid"/>
-                      <a:round/>
-                      <a:headEnd type="none" w="med" len="med"/>
-                      <a:tailEnd type="none" w="med" len="med"/>
-                    </a:lnR>
-                    <a:lnT w="6350" cap="flat" cmpd="sng" algn="ctr">
-                      <a:solidFill>
-                        <a:srgbClr val="D5D0E0"/>
-                      </a:solidFill>
-                      <a:prstDash val="solid"/>
-                      <a:round/>
-                      <a:headEnd type="none" w="med" len="med"/>
-                      <a:tailEnd type="none" w="med" len="med"/>
-                    </a:lnT>
-                    <a:lnB w="6350" cap="flat" cmpd="sng" algn="ctr">
-                      <a:solidFill>
-                        <a:srgbClr val="D5D0E0"/>
-                      </a:solidFill>
-                      <a:prstDash val="solid"/>
-                      <a:round/>
-                      <a:headEnd type="none" w="med" len="med"/>
-                      <a:tailEnd type="none" w="med" len="med"/>
-                    </a:lnB>
-                  </a:tcPr>
-                </a:tc>
-                <a:tc>
-                  <a:txBody>
-                    <a:bodyPr/>
-                    <a:lstStyle/>
-                    <a:p>
-                      <a:pPr algn="ctr" indent="0" marL="0">
+                      <a:pPr marL="0" indent="0" algn="ctr">
                         <a:buNone/>
                       </a:pPr>
                       <a:r>
@@ -10660,7 +10927,7 @@
                       </a:endParaRPr>
                     </a:p>
                   </a:txBody>
-                  <a:tcPr marL="91440" marR="91440" marT="45720" marB="45720" anchor="ctr">
+                  <a:tcPr anchor="ctr">
                     <a:lnL w="6350" cap="flat" cmpd="sng" algn="ctr">
                       <a:solidFill>
                         <a:srgbClr val="D5D0E0"/>
@@ -10702,6 +10969,11 @@
                     </a:solidFill>
                   </a:tcPr>
                 </a:tc>
+                <a:extLst>
+                  <a:ext uri="{0D108BD9-81ED-4DB2-BD59-A6C34878D82A}">
+                    <a16:rowId xmlns:a16="http://schemas.microsoft.com/office/drawing/2014/main" val="10007"/>
+                  </a:ext>
+                </a:extLst>
               </a:tr>
             </a:tbl>
           </a:graphicData>
@@ -10731,6 +11003,13 @@
             <a:prstDash val="solid"/>
           </a:ln>
         </p:spPr>
+        <p:txBody>
+          <a:bodyPr/>
+          <a:lstStyle/>
+          <a:p>
+            <a:endParaRPr lang="ru-RU"/>
+          </a:p>
+        </p:txBody>
       </p:sp>
       <p:sp>
         <p:nvSpPr>
@@ -10756,6 +11035,13 @@
             <a:prstDash val="solid"/>
           </a:ln>
         </p:spPr>
+        <p:txBody>
+          <a:bodyPr/>
+          <a:lstStyle/>
+          <a:p>
+            <a:endParaRPr lang="ru-RU"/>
+          </a:p>
+        </p:txBody>
       </p:sp>
       <p:sp>
         <p:nvSpPr>
@@ -10778,7 +11064,7 @@
           <a:bodyPr wrap="square" lIns="0" tIns="0" rIns="0" bIns="0" rtlCol="0" anchor="ctr"/>
           <a:lstStyle/>
           <a:p>
-            <a:pPr indent="0" marL="0">
+            <a:pPr marL="0" indent="0">
               <a:buNone/>
             </a:pPr>
             <a:r>
@@ -10792,9 +11078,6 @@
               </a:rPr>
               <a:t>Вывод: </a:t>
             </a:r>
-            <a:pPr indent="0" marL="0">
-              <a:buNone/>
-            </a:pPr>
             <a:r>
               <a:rPr lang="en-US" sz="1100" dirty="0">
                 <a:solidFill>
@@ -10826,6 +11109,7 @@
         <a:solidFill>
           <a:srgbClr val="FFFFFF"/>
         </a:solidFill>
+        <a:effectLst/>
       </p:bgPr>
     </p:bg>
     <p:spTree>
@@ -10866,6 +11150,13 @@
             <a:prstDash val="solid"/>
           </a:ln>
         </p:spPr>
+        <p:txBody>
+          <a:bodyPr/>
+          <a:lstStyle/>
+          <a:p>
+            <a:endParaRPr lang="ru-RU"/>
+          </a:p>
+        </p:txBody>
       </p:sp>
       <p:sp>
         <p:nvSpPr>
@@ -10891,6 +11182,13 @@
             <a:prstDash val="solid"/>
           </a:ln>
         </p:spPr>
+        <p:txBody>
+          <a:bodyPr/>
+          <a:lstStyle/>
+          <a:p>
+            <a:endParaRPr lang="ru-RU"/>
+          </a:p>
+        </p:txBody>
       </p:sp>
       <p:sp>
         <p:nvSpPr>
@@ -10913,7 +11211,7 @@
           <a:bodyPr wrap="square" lIns="0" tIns="0" rIns="0" bIns="0" rtlCol="0" anchor="ctr"/>
           <a:lstStyle/>
           <a:p>
-            <a:pPr indent="0" marL="0">
+            <a:pPr marL="0" indent="0">
               <a:buNone/>
             </a:pPr>
             <a:r>
@@ -10953,6 +11251,13 @@
             <a:prstDash val="solid"/>
           </a:ln>
         </p:spPr>
+        <p:txBody>
+          <a:bodyPr/>
+          <a:lstStyle/>
+          <a:p>
+            <a:endParaRPr lang="ru-RU"/>
+          </a:p>
+        </p:txBody>
       </p:sp>
       <p:sp>
         <p:nvSpPr>
@@ -10975,7 +11280,7 @@
           <a:bodyPr wrap="square" rtlCol="0" anchor="ctr"/>
           <a:lstStyle/>
           <a:p>
-            <a:pPr algn="l" indent="0" marL="0">
+            <a:pPr marL="0" indent="0" algn="l">
               <a:buNone/>
             </a:pPr>
             <a:r>
@@ -11014,7 +11319,7 @@
           <a:bodyPr wrap="square" rtlCol="0" anchor="ctr"/>
           <a:lstStyle/>
           <a:p>
-            <a:pPr algn="r" indent="0" marL="0">
+            <a:pPr marL="0" indent="0" algn="r">
               <a:buNone/>
             </a:pPr>
             <a:r>
@@ -11056,6 +11361,13 @@
             <a:prstDash val="solid"/>
           </a:ln>
         </p:spPr>
+        <p:txBody>
+          <a:bodyPr/>
+          <a:lstStyle/>
+          <a:p>
+            <a:endParaRPr lang="ru-RU"/>
+          </a:p>
+        </p:txBody>
       </p:sp>
       <p:sp>
         <p:nvSpPr>
@@ -11081,6 +11393,13 @@
             <a:prstDash val="solid"/>
           </a:ln>
         </p:spPr>
+        <p:txBody>
+          <a:bodyPr/>
+          <a:lstStyle/>
+          <a:p>
+            <a:endParaRPr lang="ru-RU"/>
+          </a:p>
+        </p:txBody>
       </p:sp>
       <p:sp>
         <p:nvSpPr>
@@ -11103,11 +11422,11 @@
           <a:bodyPr wrap="square" rtlCol="0" anchor="ctr"/>
           <a:lstStyle/>
           <a:p>
-            <a:pPr algn="ctr" indent="0" marL="0">
+            <a:pPr marL="0" indent="0" algn="ctr">
               <a:buNone/>
             </a:pPr>
             <a:r>
-              <a:rPr lang="en-US" sz="1300" b="1" spc="200" kern="0" dirty="0">
+              <a:rPr lang="en-US" sz="1300" b="1" kern="0" spc="200" dirty="0">
                 <a:solidFill>
                   <a:srgbClr val="FFFFFF"/>
                 </a:solidFill>
@@ -11145,6 +11464,13 @@
             <a:prstDash val="solid"/>
           </a:ln>
         </p:spPr>
+        <p:txBody>
+          <a:bodyPr/>
+          <a:lstStyle/>
+          <a:p>
+            <a:endParaRPr lang="ru-RU"/>
+          </a:p>
+        </p:txBody>
       </p:sp>
       <p:sp>
         <p:nvSpPr>
@@ -11167,7 +11493,7 @@
           <a:bodyPr wrap="square" lIns="0" tIns="0" rIns="0" bIns="0" rtlCol="0" anchor="ctr"/>
           <a:lstStyle/>
           <a:p>
-            <a:pPr algn="ctr" indent="0" marL="0">
+            <a:pPr marL="0" indent="0" algn="ctr">
               <a:buNone/>
             </a:pPr>
             <a:r>
@@ -11184,7 +11510,7 @@
             <a:endParaRPr lang="en-US" sz="1100" dirty="0"/>
           </a:p>
           <a:p>
-            <a:pPr algn="ctr" indent="0" marL="0">
+            <a:pPr marL="0" indent="0" algn="ctr">
               <a:buNone/>
             </a:pPr>
             <a:r>
@@ -11226,6 +11552,13 @@
             <a:prstDash val="solid"/>
           </a:ln>
         </p:spPr>
+        <p:txBody>
+          <a:bodyPr/>
+          <a:lstStyle/>
+          <a:p>
+            <a:endParaRPr lang="ru-RU"/>
+          </a:p>
+        </p:txBody>
       </p:sp>
       <p:sp>
         <p:nvSpPr>
@@ -11248,11 +11581,11 @@
           <a:bodyPr wrap="square" lIns="0" tIns="0" rIns="0" bIns="0" rtlCol="0" anchor="t"/>
           <a:lstStyle/>
           <a:p>
-            <a:pPr algn="ctr" indent="0" marL="0">
+            <a:pPr marL="0" indent="0" algn="ctr">
               <a:buNone/>
             </a:pPr>
             <a:r>
-              <a:rPr lang="en-US" sz="1100" b="1" spc="200" kern="0" dirty="0">
+              <a:rPr lang="en-US" sz="1100" b="1" kern="0" spc="200" dirty="0">
                 <a:solidFill>
                   <a:srgbClr val="372579"/>
                 </a:solidFill>
@@ -11265,7 +11598,7 @@
             <a:endParaRPr lang="en-US" sz="1100" dirty="0"/>
           </a:p>
           <a:p>
-            <a:pPr algn="ctr" indent="0" marL="0">
+            <a:pPr marL="0" indent="0" algn="ctr">
               <a:buNone/>
             </a:pPr>
             <a:r>
@@ -11282,7 +11615,7 @@
             <a:endParaRPr lang="en-US" sz="1100" dirty="0"/>
           </a:p>
           <a:p>
-            <a:pPr algn="ctr" indent="0" marL="0">
+            <a:pPr marL="0" indent="0" algn="ctr">
               <a:buNone/>
             </a:pPr>
             <a:r>
@@ -11299,7 +11632,7 @@
             <a:endParaRPr lang="en-US" sz="1100" dirty="0"/>
           </a:p>
           <a:p>
-            <a:pPr algn="ctr" indent="0" marL="0">
+            <a:pPr marL="0" indent="0" algn="ctr">
               <a:buNone/>
             </a:pPr>
             <a:r>
@@ -11341,6 +11674,13 @@
             <a:prstDash val="solid"/>
           </a:ln>
         </p:spPr>
+        <p:txBody>
+          <a:bodyPr/>
+          <a:lstStyle/>
+          <a:p>
+            <a:endParaRPr lang="ru-RU"/>
+          </a:p>
+        </p:txBody>
       </p:sp>
       <p:sp>
         <p:nvSpPr>
@@ -11363,11 +11703,11 @@
           <a:bodyPr wrap="square" lIns="0" tIns="0" rIns="0" bIns="0" rtlCol="0" anchor="t"/>
           <a:lstStyle/>
           <a:p>
-            <a:pPr algn="ctr" indent="0" marL="0">
+            <a:pPr marL="0" indent="0" algn="ctr">
               <a:buNone/>
             </a:pPr>
             <a:r>
-              <a:rPr lang="en-US" sz="1100" b="1" spc="200" kern="0" dirty="0">
+              <a:rPr lang="en-US" sz="1100" b="1" kern="0" spc="200" dirty="0">
                 <a:solidFill>
                   <a:srgbClr val="372579"/>
                 </a:solidFill>
@@ -11380,7 +11720,7 @@
             <a:endParaRPr lang="en-US" sz="1100" dirty="0"/>
           </a:p>
           <a:p>
-            <a:pPr algn="ctr" indent="0" marL="0">
+            <a:pPr marL="0" indent="0" algn="ctr">
               <a:buNone/>
             </a:pPr>
             <a:r>
@@ -11397,7 +11737,7 @@
             <a:endParaRPr lang="en-US" sz="1100" dirty="0"/>
           </a:p>
           <a:p>
-            <a:pPr algn="ctr" indent="0" marL="0">
+            <a:pPr marL="0" indent="0" algn="ctr">
               <a:buNone/>
             </a:pPr>
             <a:r>
@@ -11439,6 +11779,13 @@
             <a:tailEnd type="triangle"/>
           </a:ln>
         </p:spPr>
+        <p:txBody>
+          <a:bodyPr/>
+          <a:lstStyle/>
+          <a:p>
+            <a:endParaRPr lang="ru-RU"/>
+          </a:p>
+        </p:txBody>
       </p:sp>
       <p:sp>
         <p:nvSpPr>
@@ -11461,7 +11808,7 @@
           <a:bodyPr wrap="square" rtlCol="0" anchor="ctr"/>
           <a:lstStyle/>
           <a:p>
-            <a:pPr algn="ctr" indent="0" marL="0">
+            <a:pPr marL="0" indent="0" algn="ctr">
               <a:buNone/>
             </a:pPr>
             <a:r>
@@ -11478,7 +11825,7 @@
             <a:endParaRPr lang="en-US" sz="900" dirty="0"/>
           </a:p>
           <a:p>
-            <a:pPr algn="ctr" indent="0" marL="0">
+            <a:pPr marL="0" indent="0" algn="ctr">
               <a:buNone/>
             </a:pPr>
             <a:r>
@@ -11520,6 +11867,13 @@
             <a:prstDash val="solid"/>
           </a:ln>
         </p:spPr>
+        <p:txBody>
+          <a:bodyPr/>
+          <a:lstStyle/>
+          <a:p>
+            <a:endParaRPr lang="ru-RU"/>
+          </a:p>
+        </p:txBody>
       </p:sp>
       <p:sp>
         <p:nvSpPr>
@@ -11545,6 +11899,13 @@
             <a:prstDash val="solid"/>
           </a:ln>
         </p:spPr>
+        <p:txBody>
+          <a:bodyPr/>
+          <a:lstStyle/>
+          <a:p>
+            <a:endParaRPr lang="ru-RU"/>
+          </a:p>
+        </p:txBody>
       </p:sp>
       <p:sp>
         <p:nvSpPr>
@@ -11567,11 +11928,11 @@
           <a:bodyPr wrap="square" rtlCol="0" anchor="ctr"/>
           <a:lstStyle/>
           <a:p>
-            <a:pPr algn="ctr" indent="0" marL="0">
+            <a:pPr marL="0" indent="0" algn="ctr">
               <a:buNone/>
             </a:pPr>
             <a:r>
-              <a:rPr lang="en-US" sz="1300" b="1" spc="200" kern="0" dirty="0">
+              <a:rPr lang="en-US" sz="1300" b="1" kern="0" spc="200" dirty="0">
                 <a:solidFill>
                   <a:srgbClr val="FFFFFF"/>
                 </a:solidFill>
@@ -11606,7 +11967,7 @@
           <a:bodyPr wrap="square" rtlCol="0" anchor="t"/>
           <a:lstStyle/>
           <a:p>
-            <a:pPr indent="0" marL="0">
+            <a:pPr marL="0" indent="0">
               <a:spcAft>
                 <a:spcPts val="300"/>
               </a:spcAft>
@@ -11626,7 +11987,7 @@
             <a:endParaRPr lang="en-US" sz="1100" dirty="0"/>
           </a:p>
           <a:p>
-            <a:pPr indent="0" marL="0">
+            <a:pPr marL="0" indent="0">
               <a:spcAft>
                 <a:spcPts val="300"/>
               </a:spcAft>
@@ -11646,7 +12007,7 @@
             <a:endParaRPr lang="en-US" sz="1100" dirty="0"/>
           </a:p>
           <a:p>
-            <a:pPr indent="0" marL="0">
+            <a:pPr marL="0" indent="0">
               <a:buNone/>
             </a:pPr>
             <a:r>
@@ -11660,12 +12021,6 @@
               </a:rPr>
               <a:t>POST /sync </a:t>
             </a:r>
-            <a:pPr indent="0" marL="0">
-              <a:spcAft>
-                <a:spcPts val="300"/>
-              </a:spcAft>
-              <a:buNone/>
-            </a:pPr>
             <a:r>
               <a:rPr lang="en-US" sz="1000" i="1" dirty="0">
                 <a:solidFill>
@@ -11680,7 +12035,7 @@
             <a:endParaRPr lang="en-US" sz="1100" dirty="0"/>
           </a:p>
           <a:p>
-            <a:pPr indent="0" marL="0">
+            <a:pPr marL="0" indent="0">
               <a:buNone/>
             </a:pPr>
             <a:r>
@@ -11722,6 +12077,13 @@
             <a:tailEnd type="triangle"/>
           </a:ln>
         </p:spPr>
+        <p:txBody>
+          <a:bodyPr/>
+          <a:lstStyle/>
+          <a:p>
+            <a:endParaRPr lang="ru-RU"/>
+          </a:p>
+        </p:txBody>
       </p:sp>
       <p:sp>
         <p:nvSpPr>
@@ -11747,6 +12109,13 @@
             <a:prstDash val="solid"/>
           </a:ln>
         </p:spPr>
+        <p:txBody>
+          <a:bodyPr/>
+          <a:lstStyle/>
+          <a:p>
+            <a:endParaRPr lang="ru-RU"/>
+          </a:p>
+        </p:txBody>
       </p:sp>
       <p:sp>
         <p:nvSpPr>
@@ -11769,7 +12138,7 @@
           <a:bodyPr wrap="square" lIns="0" tIns="0" rIns="0" bIns="0" rtlCol="0" anchor="ctr"/>
           <a:lstStyle/>
           <a:p>
-            <a:pPr algn="ctr" indent="0" marL="0">
+            <a:pPr marL="0" indent="0" algn="ctr">
               <a:buNone/>
             </a:pPr>
             <a:r>
@@ -11786,7 +12155,7 @@
             <a:endParaRPr lang="en-US" sz="1200" dirty="0"/>
           </a:p>
           <a:p>
-            <a:pPr algn="ctr" indent="0" marL="0">
+            <a:pPr marL="0" indent="0" algn="ctr">
               <a:buNone/>
             </a:pPr>
             <a:r>
@@ -11820,6 +12189,7 @@
         <a:solidFill>
           <a:srgbClr val="FFFFFF"/>
         </a:solidFill>
+        <a:effectLst/>
       </p:bgPr>
     </p:bg>
     <p:spTree>
@@ -11860,6 +12230,13 @@
             <a:prstDash val="solid"/>
           </a:ln>
         </p:spPr>
+        <p:txBody>
+          <a:bodyPr/>
+          <a:lstStyle/>
+          <a:p>
+            <a:endParaRPr lang="ru-RU"/>
+          </a:p>
+        </p:txBody>
       </p:sp>
       <p:sp>
         <p:nvSpPr>
@@ -11885,6 +12262,13 @@
             <a:prstDash val="solid"/>
           </a:ln>
         </p:spPr>
+        <p:txBody>
+          <a:bodyPr/>
+          <a:lstStyle/>
+          <a:p>
+            <a:endParaRPr lang="ru-RU"/>
+          </a:p>
+        </p:txBody>
       </p:sp>
       <p:sp>
         <p:nvSpPr>
@@ -11907,7 +12291,7 @@
           <a:bodyPr wrap="square" lIns="0" tIns="0" rIns="0" bIns="0" rtlCol="0" anchor="ctr"/>
           <a:lstStyle/>
           <a:p>
-            <a:pPr indent="0" marL="0">
+            <a:pPr marL="0" indent="0">
               <a:buNone/>
             </a:pPr>
             <a:r>
@@ -11947,6 +12331,13 @@
             <a:prstDash val="solid"/>
           </a:ln>
         </p:spPr>
+        <p:txBody>
+          <a:bodyPr/>
+          <a:lstStyle/>
+          <a:p>
+            <a:endParaRPr lang="ru-RU"/>
+          </a:p>
+        </p:txBody>
       </p:sp>
       <p:sp>
         <p:nvSpPr>
@@ -11969,7 +12360,7 @@
           <a:bodyPr wrap="square" rtlCol="0" anchor="ctr"/>
           <a:lstStyle/>
           <a:p>
-            <a:pPr algn="l" indent="0" marL="0">
+            <a:pPr marL="0" indent="0" algn="l">
               <a:buNone/>
             </a:pPr>
             <a:r>
@@ -12008,7 +12399,7 @@
           <a:bodyPr wrap="square" rtlCol="0" anchor="ctr"/>
           <a:lstStyle/>
           <a:p>
-            <a:pPr algn="r" indent="0" marL="0">
+            <a:pPr marL="0" indent="0" algn="r">
               <a:buNone/>
             </a:pPr>
             <a:r>
@@ -12050,6 +12441,13 @@
             <a:prstDash val="solid"/>
           </a:ln>
         </p:spPr>
+        <p:txBody>
+          <a:bodyPr/>
+          <a:lstStyle/>
+          <a:p>
+            <a:endParaRPr lang="ru-RU"/>
+          </a:p>
+        </p:txBody>
       </p:sp>
       <p:sp>
         <p:nvSpPr>
@@ -12075,6 +12473,13 @@
             <a:prstDash val="solid"/>
           </a:ln>
         </p:spPr>
+        <p:txBody>
+          <a:bodyPr/>
+          <a:lstStyle/>
+          <a:p>
+            <a:endParaRPr lang="ru-RU"/>
+          </a:p>
+        </p:txBody>
       </p:sp>
       <p:sp>
         <p:nvSpPr>
@@ -12097,11 +12502,11 @@
           <a:bodyPr wrap="square" rtlCol="0" anchor="ctr"/>
           <a:lstStyle/>
           <a:p>
-            <a:pPr algn="ctr" indent="0" marL="0">
+            <a:pPr marL="0" indent="0" algn="ctr">
               <a:buNone/>
             </a:pPr>
             <a:r>
-              <a:rPr lang="en-US" sz="1200" b="1" spc="200" kern="0" dirty="0">
+              <a:rPr lang="en-US" sz="1200" b="1" kern="0" spc="200" dirty="0">
                 <a:solidFill>
                   <a:srgbClr val="FFFFFF"/>
                 </a:solidFill>
@@ -12266,6 +12671,13 @@
             <a:prstDash val="solid"/>
           </a:ln>
         </p:spPr>
+        <p:txBody>
+          <a:bodyPr/>
+          <a:lstStyle/>
+          <a:p>
+            <a:endParaRPr lang="ru-RU"/>
+          </a:p>
+        </p:txBody>
       </p:sp>
       <p:sp>
         <p:nvSpPr>
@@ -12291,6 +12703,13 @@
             <a:prstDash val="solid"/>
           </a:ln>
         </p:spPr>
+        <p:txBody>
+          <a:bodyPr/>
+          <a:lstStyle/>
+          <a:p>
+            <a:endParaRPr lang="ru-RU"/>
+          </a:p>
+        </p:txBody>
       </p:sp>
       <p:sp>
         <p:nvSpPr>
@@ -12313,11 +12732,11 @@
           <a:bodyPr wrap="square" rtlCol="0" anchor="ctr"/>
           <a:lstStyle/>
           <a:p>
-            <a:pPr algn="ctr" indent="0" marL="0">
+            <a:pPr marL="0" indent="0" algn="ctr">
               <a:buNone/>
             </a:pPr>
             <a:r>
-              <a:rPr lang="en-US" sz="1200" b="1" spc="200" kern="0" dirty="0">
+              <a:rPr lang="en-US" sz="1200" b="1" kern="0" spc="200" dirty="0">
                 <a:solidFill>
                   <a:srgbClr val="FFFFFF"/>
                 </a:solidFill>
@@ -12482,6 +12901,13 @@
             <a:prstDash val="solid"/>
           </a:ln>
         </p:spPr>
+        <p:txBody>
+          <a:bodyPr/>
+          <a:lstStyle/>
+          <a:p>
+            <a:endParaRPr lang="ru-RU"/>
+          </a:p>
+        </p:txBody>
       </p:sp>
       <p:sp>
         <p:nvSpPr>
@@ -12507,6 +12933,13 @@
             <a:prstDash val="solid"/>
           </a:ln>
         </p:spPr>
+        <p:txBody>
+          <a:bodyPr/>
+          <a:lstStyle/>
+          <a:p>
+            <a:endParaRPr lang="ru-RU"/>
+          </a:p>
+        </p:txBody>
       </p:sp>
       <p:sp>
         <p:nvSpPr>
@@ -12529,11 +12962,11 @@
           <a:bodyPr wrap="square" rtlCol="0" anchor="ctr"/>
           <a:lstStyle/>
           <a:p>
-            <a:pPr algn="ctr" indent="0" marL="0">
+            <a:pPr marL="0" indent="0" algn="ctr">
               <a:buNone/>
             </a:pPr>
             <a:r>
-              <a:rPr lang="en-US" sz="1200" b="1" spc="200" kern="0" dirty="0">
+              <a:rPr lang="en-US" sz="1200" b="1" kern="0" spc="200" dirty="0">
                 <a:solidFill>
                   <a:srgbClr val="FFFFFF"/>
                 </a:solidFill>
@@ -12677,6 +13110,13 @@
             <a:prstDash val="solid"/>
           </a:ln>
         </p:spPr>
+        <p:txBody>
+          <a:bodyPr/>
+          <a:lstStyle/>
+          <a:p>
+            <a:endParaRPr lang="ru-RU"/>
+          </a:p>
+        </p:txBody>
       </p:sp>
       <p:sp>
         <p:nvSpPr>
@@ -12702,6 +13142,13 @@
             <a:prstDash val="solid"/>
           </a:ln>
         </p:spPr>
+        <p:txBody>
+          <a:bodyPr/>
+          <a:lstStyle/>
+          <a:p>
+            <a:endParaRPr lang="ru-RU"/>
+          </a:p>
+        </p:txBody>
       </p:sp>
       <p:sp>
         <p:nvSpPr>
@@ -12724,11 +13171,11 @@
           <a:bodyPr wrap="square" rtlCol="0" anchor="ctr"/>
           <a:lstStyle/>
           <a:p>
-            <a:pPr algn="ctr" indent="0" marL="0">
+            <a:pPr marL="0" indent="0" algn="ctr">
               <a:buNone/>
             </a:pPr>
             <a:r>
-              <a:rPr lang="en-US" sz="1200" b="1" spc="200" kern="0" dirty="0">
+              <a:rPr lang="en-US" sz="1200" b="1" kern="0" spc="200" dirty="0">
                 <a:solidFill>
                   <a:srgbClr val="FFFFFF"/>
                 </a:solidFill>
@@ -12864,6 +13311,7 @@
         <a:solidFill>
           <a:srgbClr val="FFFFFF"/>
         </a:solidFill>
+        <a:effectLst/>
       </p:bgPr>
     </p:bg>
     <p:spTree>
@@ -12904,6 +13352,13 @@
             <a:prstDash val="solid"/>
           </a:ln>
         </p:spPr>
+        <p:txBody>
+          <a:bodyPr/>
+          <a:lstStyle/>
+          <a:p>
+            <a:endParaRPr lang="ru-RU"/>
+          </a:p>
+        </p:txBody>
       </p:sp>
       <p:sp>
         <p:nvSpPr>
@@ -12929,6 +13384,13 @@
             <a:prstDash val="solid"/>
           </a:ln>
         </p:spPr>
+        <p:txBody>
+          <a:bodyPr/>
+          <a:lstStyle/>
+          <a:p>
+            <a:endParaRPr lang="ru-RU"/>
+          </a:p>
+        </p:txBody>
       </p:sp>
       <p:sp>
         <p:nvSpPr>
@@ -12951,7 +13413,7 @@
           <a:bodyPr wrap="square" lIns="0" tIns="0" rIns="0" bIns="0" rtlCol="0" anchor="ctr"/>
           <a:lstStyle/>
           <a:p>
-            <a:pPr indent="0" marL="0">
+            <a:pPr marL="0" indent="0">
               <a:buNone/>
             </a:pPr>
             <a:r>
@@ -12991,6 +13453,13 @@
             <a:prstDash val="solid"/>
           </a:ln>
         </p:spPr>
+        <p:txBody>
+          <a:bodyPr/>
+          <a:lstStyle/>
+          <a:p>
+            <a:endParaRPr lang="ru-RU"/>
+          </a:p>
+        </p:txBody>
       </p:sp>
       <p:sp>
         <p:nvSpPr>
@@ -13013,7 +13482,7 @@
           <a:bodyPr wrap="square" rtlCol="0" anchor="ctr"/>
           <a:lstStyle/>
           <a:p>
-            <a:pPr algn="l" indent="0" marL="0">
+            <a:pPr marL="0" indent="0" algn="l">
               <a:buNone/>
             </a:pPr>
             <a:r>
@@ -13052,7 +13521,7 @@
           <a:bodyPr wrap="square" rtlCol="0" anchor="ctr"/>
           <a:lstStyle/>
           <a:p>
-            <a:pPr algn="r" indent="0" marL="0">
+            <a:pPr marL="0" indent="0" algn="r">
               <a:buNone/>
             </a:pPr>
             <a:r>
@@ -13091,11 +13560,11 @@
           <a:bodyPr wrap="square" rtlCol="0" anchor="ctr"/>
           <a:lstStyle/>
           <a:p>
-            <a:pPr indent="0" marL="0">
+            <a:pPr marL="0" indent="0">
               <a:buNone/>
             </a:pPr>
             <a:r>
-              <a:rPr lang="en-US" sz="1300" b="1" spc="300" kern="0" dirty="0">
+              <a:rPr lang="en-US" sz="1300" b="1" kern="0" spc="300" dirty="0">
                 <a:solidFill>
                   <a:srgbClr val="372579"/>
                 </a:solidFill>
@@ -13133,6 +13602,13 @@
             <a:prstDash val="solid"/>
           </a:ln>
         </p:spPr>
+        <p:txBody>
+          <a:bodyPr/>
+          <a:lstStyle/>
+          <a:p>
+            <a:endParaRPr lang="ru-RU"/>
+          </a:p>
+        </p:txBody>
       </p:sp>
       <p:sp>
         <p:nvSpPr>
@@ -13158,6 +13634,13 @@
             <a:prstDash val="solid"/>
           </a:ln>
         </p:spPr>
+        <p:txBody>
+          <a:bodyPr/>
+          <a:lstStyle/>
+          <a:p>
+            <a:endParaRPr lang="ru-RU"/>
+          </a:p>
+        </p:txBody>
       </p:sp>
       <p:sp>
         <p:nvSpPr>
@@ -13180,7 +13663,7 @@
           <a:bodyPr wrap="square" lIns="0" tIns="0" rIns="0" bIns="0" rtlCol="0" anchor="ctr"/>
           <a:lstStyle/>
           <a:p>
-            <a:pPr algn="l" indent="0" marL="0">
+            <a:pPr marL="0" indent="0" algn="l">
               <a:buNone/>
             </a:pPr>
             <a:r>
@@ -13219,7 +13702,7 @@
           <a:bodyPr wrap="square" lIns="0" tIns="0" rIns="0" bIns="0" rtlCol="0" anchor="ctr"/>
           <a:lstStyle/>
           <a:p>
-            <a:pPr algn="l" indent="0" marL="0">
+            <a:pPr marL="0" indent="0" algn="l">
               <a:buNone/>
             </a:pPr>
             <a:r>
@@ -13261,6 +13744,13 @@
             <a:prstDash val="solid"/>
           </a:ln>
         </p:spPr>
+        <p:txBody>
+          <a:bodyPr/>
+          <a:lstStyle/>
+          <a:p>
+            <a:endParaRPr lang="ru-RU"/>
+          </a:p>
+        </p:txBody>
       </p:sp>
       <p:sp>
         <p:nvSpPr>
@@ -13286,6 +13776,13 @@
             <a:prstDash val="solid"/>
           </a:ln>
         </p:spPr>
+        <p:txBody>
+          <a:bodyPr/>
+          <a:lstStyle/>
+          <a:p>
+            <a:endParaRPr lang="ru-RU"/>
+          </a:p>
+        </p:txBody>
       </p:sp>
       <p:sp>
         <p:nvSpPr>
@@ -13308,7 +13805,7 @@
           <a:bodyPr wrap="square" lIns="0" tIns="0" rIns="0" bIns="0" rtlCol="0" anchor="ctr"/>
           <a:lstStyle/>
           <a:p>
-            <a:pPr algn="l" indent="0" marL="0">
+            <a:pPr marL="0" indent="0" algn="l">
               <a:buNone/>
             </a:pPr>
             <a:r>
@@ -13347,7 +13844,7 @@
           <a:bodyPr wrap="square" lIns="0" tIns="0" rIns="0" bIns="0" rtlCol="0" anchor="ctr"/>
           <a:lstStyle/>
           <a:p>
-            <a:pPr algn="l" indent="0" marL="0">
+            <a:pPr marL="0" indent="0" algn="l">
               <a:buNone/>
             </a:pPr>
             <a:r>
@@ -13389,6 +13886,13 @@
             <a:prstDash val="solid"/>
           </a:ln>
         </p:spPr>
+        <p:txBody>
+          <a:bodyPr/>
+          <a:lstStyle/>
+          <a:p>
+            <a:endParaRPr lang="ru-RU"/>
+          </a:p>
+        </p:txBody>
       </p:sp>
       <p:sp>
         <p:nvSpPr>
@@ -13414,6 +13918,13 @@
             <a:prstDash val="solid"/>
           </a:ln>
         </p:spPr>
+        <p:txBody>
+          <a:bodyPr/>
+          <a:lstStyle/>
+          <a:p>
+            <a:endParaRPr lang="ru-RU"/>
+          </a:p>
+        </p:txBody>
       </p:sp>
       <p:sp>
         <p:nvSpPr>
@@ -13436,7 +13947,7 @@
           <a:bodyPr wrap="square" lIns="0" tIns="0" rIns="0" bIns="0" rtlCol="0" anchor="ctr"/>
           <a:lstStyle/>
           <a:p>
-            <a:pPr algn="l" indent="0" marL="0">
+            <a:pPr marL="0" indent="0" algn="l">
               <a:buNone/>
             </a:pPr>
             <a:r>
@@ -13475,7 +13986,7 @@
           <a:bodyPr wrap="square" lIns="0" tIns="0" rIns="0" bIns="0" rtlCol="0" anchor="ctr"/>
           <a:lstStyle/>
           <a:p>
-            <a:pPr algn="l" indent="0" marL="0">
+            <a:pPr marL="0" indent="0" algn="l">
               <a:buNone/>
             </a:pPr>
             <a:r>
@@ -13514,11 +14025,11 @@
           <a:bodyPr wrap="square" rtlCol="0" anchor="ctr"/>
           <a:lstStyle/>
           <a:p>
-            <a:pPr indent="0" marL="0">
+            <a:pPr marL="0" indent="0">
               <a:buNone/>
             </a:pPr>
             <a:r>
-              <a:rPr lang="en-US" sz="1300" b="1" spc="300" kern="0" dirty="0">
+              <a:rPr lang="en-US" sz="1300" b="1" kern="0" spc="300" dirty="0">
                 <a:solidFill>
                   <a:srgbClr val="372579"/>
                 </a:solidFill>
@@ -13556,6 +14067,13 @@
             <a:prstDash val="solid"/>
           </a:ln>
         </p:spPr>
+        <p:txBody>
+          <a:bodyPr/>
+          <a:lstStyle/>
+          <a:p>
+            <a:endParaRPr lang="ru-RU"/>
+          </a:p>
+        </p:txBody>
       </p:sp>
       <p:sp>
         <p:nvSpPr>
@@ -13581,6 +14099,13 @@
             <a:prstDash val="solid"/>
           </a:ln>
         </p:spPr>
+        <p:txBody>
+          <a:bodyPr/>
+          <a:lstStyle/>
+          <a:p>
+            <a:endParaRPr lang="ru-RU"/>
+          </a:p>
+        </p:txBody>
       </p:sp>
       <p:sp>
         <p:nvSpPr>
@@ -13603,7 +14128,7 @@
           <a:bodyPr wrap="square" lIns="0" tIns="0" rIns="0" bIns="0" rtlCol="0" anchor="ctr"/>
           <a:lstStyle/>
           <a:p>
-            <a:pPr algn="ctr" indent="0" marL="0">
+            <a:pPr marL="0" indent="0" algn="ctr">
               <a:buNone/>
             </a:pPr>
             <a:r>
@@ -13642,7 +14167,7 @@
           <a:bodyPr wrap="square" rtlCol="0" anchor="ctr"/>
           <a:lstStyle/>
           <a:p>
-            <a:pPr indent="0" marL="0">
+            <a:pPr marL="0" indent="0">
               <a:buNone/>
             </a:pPr>
             <a:r>
@@ -13659,7 +14184,7 @@
             <a:endParaRPr lang="en-US" sz="1200" dirty="0"/>
           </a:p>
           <a:p>
-            <a:pPr indent="0" marL="0">
+            <a:pPr marL="0" indent="0">
               <a:buNone/>
             </a:pPr>
             <a:r>
@@ -13701,6 +14226,13 @@
             <a:prstDash val="solid"/>
           </a:ln>
         </p:spPr>
+        <p:txBody>
+          <a:bodyPr/>
+          <a:lstStyle/>
+          <a:p>
+            <a:endParaRPr lang="ru-RU"/>
+          </a:p>
+        </p:txBody>
       </p:sp>
       <p:sp>
         <p:nvSpPr>
@@ -13726,6 +14258,13 @@
             <a:prstDash val="solid"/>
           </a:ln>
         </p:spPr>
+        <p:txBody>
+          <a:bodyPr/>
+          <a:lstStyle/>
+          <a:p>
+            <a:endParaRPr lang="ru-RU"/>
+          </a:p>
+        </p:txBody>
       </p:sp>
       <p:sp>
         <p:nvSpPr>
@@ -13748,7 +14287,7 @@
           <a:bodyPr wrap="square" lIns="0" tIns="0" rIns="0" bIns="0" rtlCol="0" anchor="ctr"/>
           <a:lstStyle/>
           <a:p>
-            <a:pPr algn="ctr" indent="0" marL="0">
+            <a:pPr marL="0" indent="0" algn="ctr">
               <a:buNone/>
             </a:pPr>
             <a:r>
@@ -13787,7 +14326,7 @@
           <a:bodyPr wrap="square" rtlCol="0" anchor="ctr"/>
           <a:lstStyle/>
           <a:p>
-            <a:pPr indent="0" marL="0">
+            <a:pPr marL="0" indent="0">
               <a:buNone/>
             </a:pPr>
             <a:r>
@@ -13804,7 +14343,7 @@
             <a:endParaRPr lang="en-US" sz="1200" dirty="0"/>
           </a:p>
           <a:p>
-            <a:pPr indent="0" marL="0">
+            <a:pPr marL="0" indent="0">
               <a:buNone/>
             </a:pPr>
             <a:r>
@@ -13846,6 +14385,13 @@
             <a:prstDash val="solid"/>
           </a:ln>
         </p:spPr>
+        <p:txBody>
+          <a:bodyPr/>
+          <a:lstStyle/>
+          <a:p>
+            <a:endParaRPr lang="ru-RU"/>
+          </a:p>
+        </p:txBody>
       </p:sp>
       <p:sp>
         <p:nvSpPr>
@@ -13871,6 +14417,13 @@
             <a:prstDash val="solid"/>
           </a:ln>
         </p:spPr>
+        <p:txBody>
+          <a:bodyPr/>
+          <a:lstStyle/>
+          <a:p>
+            <a:endParaRPr lang="ru-RU"/>
+          </a:p>
+        </p:txBody>
       </p:sp>
       <p:sp>
         <p:nvSpPr>
@@ -13893,7 +14446,7 @@
           <a:bodyPr wrap="square" lIns="0" tIns="0" rIns="0" bIns="0" rtlCol="0" anchor="ctr"/>
           <a:lstStyle/>
           <a:p>
-            <a:pPr algn="ctr" indent="0" marL="0">
+            <a:pPr marL="0" indent="0" algn="ctr">
               <a:buNone/>
             </a:pPr>
             <a:r>
@@ -13932,7 +14485,7 @@
           <a:bodyPr wrap="square" rtlCol="0" anchor="ctr"/>
           <a:lstStyle/>
           <a:p>
-            <a:pPr indent="0" marL="0">
+            <a:pPr marL="0" indent="0">
               <a:buNone/>
             </a:pPr>
             <a:r>
@@ -13949,7 +14502,7 @@
             <a:endParaRPr lang="en-US" sz="1200" dirty="0"/>
           </a:p>
           <a:p>
-            <a:pPr indent="0" marL="0">
+            <a:pPr marL="0" indent="0">
               <a:buNone/>
             </a:pPr>
             <a:r>
@@ -13991,6 +14544,13 @@
             <a:prstDash val="solid"/>
           </a:ln>
         </p:spPr>
+        <p:txBody>
+          <a:bodyPr/>
+          <a:lstStyle/>
+          <a:p>
+            <a:endParaRPr lang="ru-RU"/>
+          </a:p>
+        </p:txBody>
       </p:sp>
       <p:sp>
         <p:nvSpPr>
@@ -14016,6 +14576,13 @@
             <a:prstDash val="solid"/>
           </a:ln>
         </p:spPr>
+        <p:txBody>
+          <a:bodyPr/>
+          <a:lstStyle/>
+          <a:p>
+            <a:endParaRPr lang="ru-RU"/>
+          </a:p>
+        </p:txBody>
       </p:sp>
       <p:sp>
         <p:nvSpPr>
@@ -14038,7 +14605,7 @@
           <a:bodyPr wrap="square" lIns="0" tIns="0" rIns="0" bIns="0" rtlCol="0" anchor="ctr"/>
           <a:lstStyle/>
           <a:p>
-            <a:pPr algn="ctr" indent="0" marL="0">
+            <a:pPr marL="0" indent="0" algn="ctr">
               <a:buNone/>
             </a:pPr>
             <a:r>
@@ -14077,7 +14644,7 @@
           <a:bodyPr wrap="square" rtlCol="0" anchor="ctr"/>
           <a:lstStyle/>
           <a:p>
-            <a:pPr indent="0" marL="0">
+            <a:pPr marL="0" indent="0">
               <a:buNone/>
             </a:pPr>
             <a:r>
@@ -14094,7 +14661,7 @@
             <a:endParaRPr lang="en-US" sz="1200" dirty="0"/>
           </a:p>
           <a:p>
-            <a:pPr indent="0" marL="0">
+            <a:pPr marL="0" indent="0">
               <a:buNone/>
             </a:pPr>
             <a:r>
@@ -14128,6 +14695,7 @@
         <a:solidFill>
           <a:srgbClr val="FFFFFF"/>
         </a:solidFill>
+        <a:effectLst/>
       </p:bgPr>
     </p:bg>
     <p:spTree>
@@ -14168,6 +14736,13 @@
             <a:prstDash val="solid"/>
           </a:ln>
         </p:spPr>
+        <p:txBody>
+          <a:bodyPr/>
+          <a:lstStyle/>
+          <a:p>
+            <a:endParaRPr lang="ru-RU"/>
+          </a:p>
+        </p:txBody>
       </p:sp>
       <p:sp>
         <p:nvSpPr>
@@ -14193,6 +14768,13 @@
             <a:prstDash val="solid"/>
           </a:ln>
         </p:spPr>
+        <p:txBody>
+          <a:bodyPr/>
+          <a:lstStyle/>
+          <a:p>
+            <a:endParaRPr lang="ru-RU"/>
+          </a:p>
+        </p:txBody>
       </p:sp>
       <p:sp>
         <p:nvSpPr>
@@ -14215,7 +14797,7 @@
           <a:bodyPr wrap="square" lIns="0" tIns="0" rIns="0" bIns="0" rtlCol="0" anchor="ctr"/>
           <a:lstStyle/>
           <a:p>
-            <a:pPr indent="0" marL="0">
+            <a:pPr marL="0" indent="0">
               <a:buNone/>
             </a:pPr>
             <a:r>
@@ -14255,6 +14837,13 @@
             <a:prstDash val="solid"/>
           </a:ln>
         </p:spPr>
+        <p:txBody>
+          <a:bodyPr/>
+          <a:lstStyle/>
+          <a:p>
+            <a:endParaRPr lang="ru-RU"/>
+          </a:p>
+        </p:txBody>
       </p:sp>
       <p:sp>
         <p:nvSpPr>
@@ -14277,7 +14866,7 @@
           <a:bodyPr wrap="square" rtlCol="0" anchor="ctr"/>
           <a:lstStyle/>
           <a:p>
-            <a:pPr algn="l" indent="0" marL="0">
+            <a:pPr marL="0" indent="0" algn="l">
               <a:buNone/>
             </a:pPr>
             <a:r>
@@ -14316,7 +14905,7 @@
           <a:bodyPr wrap="square" rtlCol="0" anchor="ctr"/>
           <a:lstStyle/>
           <a:p>
-            <a:pPr algn="r" indent="0" marL="0">
+            <a:pPr marL="0" indent="0" algn="r">
               <a:buNone/>
             </a:pPr>
             <a:r>
@@ -14336,7 +14925,7 @@
       </p:sp>
       <p:graphicFrame>
         <p:nvGraphicFramePr>
-          <p:cNvPr id="8" name="Chart 0" descr=""/>
+          <p:cNvPr id="8" name="Chart 0"/>
           <p:cNvGraphicFramePr/>
           <p:nvPr/>
         </p:nvGraphicFramePr>
@@ -14344,9 +14933,9 @@
           <a:off x="502920" y="1188720"/>
           <a:ext cx="4846320" cy="3383280"/>
         </p:xfrm>
-        <a:graphic xmlns:a="http://schemas.openxmlformats.org/drawingml/2006/main">
+        <a:graphic>
           <a:graphicData uri="http://schemas.openxmlformats.org/drawingml/2006/chart">
-            <c:chart xmlns:c="http://schemas.openxmlformats.org/drawingml/2006/chart" r:id="rId1"/>
+            <c:chart xmlns:c="http://schemas.openxmlformats.org/drawingml/2006/chart" xmlns:r="http://schemas.openxmlformats.org/officeDocument/2006/relationships" r:id="rId3"/>
           </a:graphicData>
         </a:graphic>
       </p:graphicFrame>
@@ -14374,6 +14963,13 @@
             <a:prstDash val="solid"/>
           </a:ln>
         </p:spPr>
+        <p:txBody>
+          <a:bodyPr/>
+          <a:lstStyle/>
+          <a:p>
+            <a:endParaRPr lang="ru-RU"/>
+          </a:p>
+        </p:txBody>
       </p:sp>
       <p:sp>
         <p:nvSpPr>
@@ -14396,7 +14992,7 @@
           <a:bodyPr wrap="square" lIns="0" tIns="0" rIns="0" bIns="0" rtlCol="0" anchor="ctr"/>
           <a:lstStyle/>
           <a:p>
-            <a:pPr algn="ctr" indent="0" marL="0">
+            <a:pPr marL="0" indent="0" algn="ctr">
               <a:buNone/>
             </a:pPr>
             <a:r>
@@ -14413,7 +15009,7 @@
             <a:endParaRPr lang="en-US" sz="4000" dirty="0"/>
           </a:p>
           <a:p>
-            <a:pPr algn="ctr" indent="0" marL="0">
+            <a:pPr marL="0" indent="0" algn="ctr">
               <a:buNone/>
             </a:pPr>
             <a:r>
@@ -14430,7 +15026,7 @@
             <a:endParaRPr lang="en-US" sz="4000" dirty="0"/>
           </a:p>
           <a:p>
-            <a:pPr algn="ctr" indent="0" marL="0">
+            <a:pPr marL="0" indent="0" algn="ctr">
               <a:buNone/>
             </a:pPr>
             <a:r>
@@ -14472,6 +15068,13 @@
             <a:prstDash val="solid"/>
           </a:ln>
         </p:spPr>
+        <p:txBody>
+          <a:bodyPr/>
+          <a:lstStyle/>
+          <a:p>
+            <a:endParaRPr lang="ru-RU"/>
+          </a:p>
+        </p:txBody>
       </p:sp>
       <p:sp>
         <p:nvSpPr>
@@ -14497,6 +15100,13 @@
             <a:prstDash val="solid"/>
           </a:ln>
         </p:spPr>
+        <p:txBody>
+          <a:bodyPr/>
+          <a:lstStyle/>
+          <a:p>
+            <a:endParaRPr lang="ru-RU"/>
+          </a:p>
+        </p:txBody>
       </p:sp>
       <p:sp>
         <p:nvSpPr>
@@ -14519,11 +15129,11 @@
           <a:bodyPr wrap="square" rtlCol="0" anchor="ctr"/>
           <a:lstStyle/>
           <a:p>
-            <a:pPr algn="ctr" indent="0" marL="0">
+            <a:pPr marL="0" indent="0" algn="ctr">
               <a:buNone/>
             </a:pPr>
             <a:r>
-              <a:rPr lang="en-US" sz="1000" b="1" spc="200" kern="0" dirty="0">
+              <a:rPr lang="en-US" sz="1000" b="1" kern="0" spc="200" dirty="0">
                 <a:solidFill>
                   <a:srgbClr val="FFFFFF"/>
                 </a:solidFill>
@@ -14558,7 +15168,7 @@
           <a:bodyPr wrap="square" rtlCol="0" anchor="t"/>
           <a:lstStyle/>
           <a:p>
-            <a:pPr indent="0" marL="0">
+            <a:pPr marL="0" indent="0">
               <a:spcAft>
                 <a:spcPts val="400"/>
               </a:spcAft>
@@ -14578,7 +15188,7 @@
             <a:endParaRPr lang="en-US" sz="1000" dirty="0"/>
           </a:p>
           <a:p>
-            <a:pPr indent="0" marL="0">
+            <a:pPr marL="0" indent="0">
               <a:buNone/>
             </a:pPr>
             <a:r>
@@ -14592,12 +15202,6 @@
               </a:rPr>
               <a:t>медиана: </a:t>
             </a:r>
-            <a:pPr indent="0" marL="0">
-              <a:spcAft>
-                <a:spcPts val="400"/>
-              </a:spcAft>
-              <a:buNone/>
-            </a:pPr>
             <a:r>
               <a:rPr lang="en-US" sz="1300" b="1" dirty="0">
                 <a:solidFill>
@@ -14612,7 +15216,7 @@
             <a:endParaRPr lang="en-US" sz="1000" dirty="0"/>
           </a:p>
           <a:p>
-            <a:pPr indent="0" marL="0">
+            <a:pPr marL="0" indent="0">
               <a:buNone/>
             </a:pPr>
             <a:r>
@@ -14626,9 +15230,6 @@
               </a:rPr>
               <a:t>p99: </a:t>
             </a:r>
-            <a:pPr indent="0" marL="0">
-              <a:buNone/>
-            </a:pPr>
             <a:r>
               <a:rPr lang="en-US" sz="1300" b="1" dirty="0">
                 <a:solidFill>
@@ -14660,6 +15261,7 @@
         <a:solidFill>
           <a:srgbClr val="FFFFFF"/>
         </a:solidFill>
+        <a:effectLst/>
       </p:bgPr>
     </p:bg>
     <p:spTree>
@@ -14700,6 +15302,13 @@
             <a:prstDash val="solid"/>
           </a:ln>
         </p:spPr>
+        <p:txBody>
+          <a:bodyPr/>
+          <a:lstStyle/>
+          <a:p>
+            <a:endParaRPr lang="ru-RU"/>
+          </a:p>
+        </p:txBody>
       </p:sp>
       <p:sp>
         <p:nvSpPr>
@@ -14725,6 +15334,13 @@
             <a:prstDash val="solid"/>
           </a:ln>
         </p:spPr>
+        <p:txBody>
+          <a:bodyPr/>
+          <a:lstStyle/>
+          <a:p>
+            <a:endParaRPr lang="ru-RU"/>
+          </a:p>
+        </p:txBody>
       </p:sp>
       <p:sp>
         <p:nvSpPr>
@@ -14747,7 +15363,7 @@
           <a:bodyPr wrap="square" lIns="0" tIns="0" rIns="0" bIns="0" rtlCol="0" anchor="ctr"/>
           <a:lstStyle/>
           <a:p>
-            <a:pPr indent="0" marL="0">
+            <a:pPr marL="0" indent="0">
               <a:buNone/>
             </a:pPr>
             <a:r>
@@ -14787,6 +15403,13 @@
             <a:prstDash val="solid"/>
           </a:ln>
         </p:spPr>
+        <p:txBody>
+          <a:bodyPr/>
+          <a:lstStyle/>
+          <a:p>
+            <a:endParaRPr lang="ru-RU"/>
+          </a:p>
+        </p:txBody>
       </p:sp>
       <p:sp>
         <p:nvSpPr>
@@ -14809,7 +15432,7 @@
           <a:bodyPr wrap="square" rtlCol="0" anchor="ctr"/>
           <a:lstStyle/>
           <a:p>
-            <a:pPr algn="l" indent="0" marL="0">
+            <a:pPr marL="0" indent="0" algn="l">
               <a:buNone/>
             </a:pPr>
             <a:r>
@@ -14848,7 +15471,7 @@
           <a:bodyPr wrap="square" rtlCol="0" anchor="ctr"/>
           <a:lstStyle/>
           <a:p>
-            <a:pPr algn="r" indent="0" marL="0">
+            <a:pPr marL="0" indent="0" algn="r">
               <a:buNone/>
             </a:pPr>
             <a:r>
@@ -14890,6 +15513,13 @@
             <a:prstDash val="solid"/>
           </a:ln>
         </p:spPr>
+        <p:txBody>
+          <a:bodyPr/>
+          <a:lstStyle/>
+          <a:p>
+            <a:endParaRPr lang="ru-RU"/>
+          </a:p>
+        </p:txBody>
       </p:sp>
       <p:sp>
         <p:nvSpPr>
@@ -14912,11 +15542,11 @@
           <a:bodyPr wrap="square" rtlCol="0" anchor="ctr"/>
           <a:lstStyle/>
           <a:p>
-            <a:pPr algn="ctr" indent="0" marL="0">
+            <a:pPr marL="0" indent="0" algn="ctr">
               <a:buNone/>
             </a:pPr>
             <a:r>
-              <a:rPr lang="en-US" sz="1000" b="1" spc="100" kern="0" dirty="0">
+              <a:rPr lang="en-US" sz="1000" b="1" kern="0" spc="100" dirty="0">
                 <a:solidFill>
                   <a:srgbClr val="FFFFFF"/>
                 </a:solidFill>
@@ -14929,11 +15559,11 @@
             <a:endParaRPr lang="en-US" sz="1000" dirty="0"/>
           </a:p>
           <a:p>
-            <a:pPr algn="ctr" indent="0" marL="0">
+            <a:pPr marL="0" indent="0" algn="ctr">
               <a:buNone/>
             </a:pPr>
             <a:r>
-              <a:rPr lang="en-US" sz="1000" b="1" spc="100" kern="0" dirty="0">
+              <a:rPr lang="en-US" sz="1000" b="1" kern="0" spc="100" dirty="0">
                 <a:solidFill>
                   <a:srgbClr val="FFFFFF"/>
                 </a:solidFill>
@@ -14969,6 +15599,13 @@
             <a:prstDash val="dash"/>
           </a:ln>
         </p:spPr>
+        <p:txBody>
+          <a:bodyPr/>
+          <a:lstStyle/>
+          <a:p>
+            <a:endParaRPr lang="ru-RU"/>
+          </a:p>
+        </p:txBody>
       </p:sp>
       <p:sp>
         <p:nvSpPr>
@@ -14994,6 +15631,13 @@
             <a:prstDash val="solid"/>
           </a:ln>
         </p:spPr>
+        <p:txBody>
+          <a:bodyPr/>
+          <a:lstStyle/>
+          <a:p>
+            <a:endParaRPr lang="ru-RU"/>
+          </a:p>
+        </p:txBody>
       </p:sp>
       <p:sp>
         <p:nvSpPr>
@@ -15016,11 +15660,11 @@
           <a:bodyPr wrap="square" rtlCol="0" anchor="ctr"/>
           <a:lstStyle/>
           <a:p>
-            <a:pPr algn="ctr" indent="0" marL="0">
+            <a:pPr marL="0" indent="0" algn="ctr">
               <a:buNone/>
             </a:pPr>
             <a:r>
-              <a:rPr lang="en-US" sz="1000" b="1" spc="100" kern="0" dirty="0">
+              <a:rPr lang="en-US" sz="1000" b="1" kern="0" spc="100" dirty="0">
                 <a:solidFill>
                   <a:srgbClr val="FFFFFF"/>
                 </a:solidFill>
@@ -15033,11 +15677,11 @@
             <a:endParaRPr lang="en-US" sz="1000" dirty="0"/>
           </a:p>
           <a:p>
-            <a:pPr algn="ctr" indent="0" marL="0">
+            <a:pPr marL="0" indent="0" algn="ctr">
               <a:buNone/>
             </a:pPr>
             <a:r>
-              <a:rPr lang="en-US" sz="1000" b="1" spc="100" kern="0" dirty="0">
+              <a:rPr lang="en-US" sz="1000" b="1" kern="0" spc="100" dirty="0">
                 <a:solidFill>
                   <a:srgbClr val="FFFFFF"/>
                 </a:solidFill>
@@ -15073,6 +15717,13 @@
             <a:prstDash val="dash"/>
           </a:ln>
         </p:spPr>
+        <p:txBody>
+          <a:bodyPr/>
+          <a:lstStyle/>
+          <a:p>
+            <a:endParaRPr lang="ru-RU"/>
+          </a:p>
+        </p:txBody>
       </p:sp>
       <p:sp>
         <p:nvSpPr>
@@ -15098,6 +15749,13 @@
             <a:prstDash val="solid"/>
           </a:ln>
         </p:spPr>
+        <p:txBody>
+          <a:bodyPr/>
+          <a:lstStyle/>
+          <a:p>
+            <a:endParaRPr lang="ru-RU"/>
+          </a:p>
+        </p:txBody>
       </p:sp>
       <p:sp>
         <p:nvSpPr>
@@ -15120,11 +15778,11 @@
           <a:bodyPr wrap="square" rtlCol="0" anchor="ctr"/>
           <a:lstStyle/>
           <a:p>
-            <a:pPr algn="ctr" indent="0" marL="0">
+            <a:pPr marL="0" indent="0" algn="ctr">
               <a:buNone/>
             </a:pPr>
             <a:r>
-              <a:rPr lang="en-US" sz="1000" b="1" spc="100" kern="0" dirty="0">
+              <a:rPr lang="en-US" sz="1000" b="1" kern="0" spc="100" dirty="0">
                 <a:solidFill>
                   <a:srgbClr val="FFFFFF"/>
                 </a:solidFill>
@@ -15137,11 +15795,11 @@
             <a:endParaRPr lang="en-US" sz="1000" dirty="0"/>
           </a:p>
           <a:p>
-            <a:pPr algn="ctr" indent="0" marL="0">
+            <a:pPr marL="0" indent="0" algn="ctr">
               <a:buNone/>
             </a:pPr>
             <a:r>
-              <a:rPr lang="en-US" sz="1000" b="1" spc="100" kern="0" dirty="0">
+              <a:rPr lang="en-US" sz="1000" b="1" kern="0" spc="100" dirty="0">
                 <a:solidFill>
                   <a:srgbClr val="FFFFFF"/>
                 </a:solidFill>
@@ -15177,6 +15835,13 @@
             <a:prstDash val="dash"/>
           </a:ln>
         </p:spPr>
+        <p:txBody>
+          <a:bodyPr/>
+          <a:lstStyle/>
+          <a:p>
+            <a:endParaRPr lang="ru-RU"/>
+          </a:p>
+        </p:txBody>
       </p:sp>
       <p:sp>
         <p:nvSpPr>
@@ -15202,6 +15867,13 @@
             <a:tailEnd type="triangle"/>
           </a:ln>
         </p:spPr>
+        <p:txBody>
+          <a:bodyPr/>
+          <a:lstStyle/>
+          <a:p>
+            <a:endParaRPr lang="ru-RU"/>
+          </a:p>
+        </p:txBody>
       </p:sp>
       <p:sp>
         <p:nvSpPr>
@@ -15224,7 +15896,7 @@
           <a:bodyPr wrap="square" lIns="0" tIns="0" rIns="0" bIns="0" rtlCol="0" anchor="ctr"/>
           <a:lstStyle/>
           <a:p>
-            <a:pPr algn="ctr" indent="0" marL="0">
+            <a:pPr marL="0" indent="0" algn="ctr">
               <a:buNone/>
             </a:pPr>
             <a:r>
@@ -15266,6 +15938,13 @@
             <a:tailEnd type="triangle"/>
           </a:ln>
         </p:spPr>
+        <p:txBody>
+          <a:bodyPr/>
+          <a:lstStyle/>
+          <a:p>
+            <a:endParaRPr lang="ru-RU"/>
+          </a:p>
+        </p:txBody>
       </p:sp>
       <p:sp>
         <p:nvSpPr>
@@ -15288,7 +15967,7 @@
           <a:bodyPr wrap="square" lIns="0" tIns="0" rIns="0" bIns="0" rtlCol="0" anchor="ctr"/>
           <a:lstStyle/>
           <a:p>
-            <a:pPr algn="ctr" indent="0" marL="0">
+            <a:pPr marL="0" indent="0" algn="ctr">
               <a:buNone/>
             </a:pPr>
             <a:r>
@@ -15330,6 +16009,13 @@
             <a:tailEnd type="none"/>
           </a:ln>
         </p:spPr>
+        <p:txBody>
+          <a:bodyPr/>
+          <a:lstStyle/>
+          <a:p>
+            <a:endParaRPr lang="ru-RU"/>
+          </a:p>
+        </p:txBody>
       </p:sp>
       <p:sp>
         <p:nvSpPr>
@@ -15352,7 +16038,7 @@
           <a:bodyPr wrap="square" lIns="0" tIns="0" rIns="0" bIns="0" rtlCol="0" anchor="ctr"/>
           <a:lstStyle/>
           <a:p>
-            <a:pPr algn="ctr" indent="0" marL="0">
+            <a:pPr marL="0" indent="0" algn="ctr">
               <a:buNone/>
             </a:pPr>
             <a:r>
@@ -15394,6 +16080,13 @@
             <a:tailEnd type="none"/>
           </a:ln>
         </p:spPr>
+        <p:txBody>
+          <a:bodyPr/>
+          <a:lstStyle/>
+          <a:p>
+            <a:endParaRPr lang="ru-RU"/>
+          </a:p>
+        </p:txBody>
       </p:sp>
       <p:sp>
         <p:nvSpPr>
@@ -15416,7 +16109,7 @@
           <a:bodyPr wrap="square" lIns="0" tIns="0" rIns="0" bIns="0" rtlCol="0" anchor="ctr"/>
           <a:lstStyle/>
           <a:p>
-            <a:pPr algn="ctr" indent="0" marL="0">
+            <a:pPr marL="0" indent="0" algn="ctr">
               <a:buNone/>
             </a:pPr>
             <a:r>
@@ -15458,6 +16151,13 @@
             <a:prstDash val="solid"/>
           </a:ln>
         </p:spPr>
+        <p:txBody>
+          <a:bodyPr/>
+          <a:lstStyle/>
+          <a:p>
+            <a:endParaRPr lang="ru-RU"/>
+          </a:p>
+        </p:txBody>
       </p:sp>
       <p:sp>
         <p:nvSpPr>
@@ -15483,6 +16183,13 @@
             <a:prstDash val="solid"/>
           </a:ln>
         </p:spPr>
+        <p:txBody>
+          <a:bodyPr/>
+          <a:lstStyle/>
+          <a:p>
+            <a:endParaRPr lang="ru-RU"/>
+          </a:p>
+        </p:txBody>
       </p:sp>
       <p:sp>
         <p:nvSpPr>
@@ -15505,7 +16212,7 @@
           <a:bodyPr wrap="square" lIns="0" tIns="0" rIns="0" bIns="0" rtlCol="0" anchor="ctr"/>
           <a:lstStyle/>
           <a:p>
-            <a:pPr indent="0" marL="0">
+            <a:pPr marL="0" indent="0">
               <a:buNone/>
             </a:pPr>
             <a:r>
@@ -15519,9 +16226,6 @@
               </a:rPr>
               <a:t>LWW: </a:t>
             </a:r>
-            <a:pPr indent="0" marL="0">
-              <a:buNone/>
-            </a:pPr>
             <a:r>
               <a:rPr lang="en-US" sz="1100" dirty="0">
                 <a:solidFill>
@@ -15838,4 +16542,319 @@
     </a:ext>
   </a:extLst>
 </a:theme>
+</file>
+
+<file path=ppt/theme/theme2.xml><?xml version="1.0" encoding="utf-8"?>
+<a:theme xmlns:a="http://schemas.openxmlformats.org/drawingml/2006/main" name="Тема Office">
+  <a:themeElements>
+    <a:clrScheme name="Стандартная">
+      <a:dk1>
+        <a:sysClr val="windowText" lastClr="000000"/>
+      </a:dk1>
+      <a:lt1>
+        <a:sysClr val="window" lastClr="FFFFFF"/>
+      </a:lt1>
+      <a:dk2>
+        <a:srgbClr val="0E2841"/>
+      </a:dk2>
+      <a:lt2>
+        <a:srgbClr val="E8E8E8"/>
+      </a:lt2>
+      <a:accent1>
+        <a:srgbClr val="156082"/>
+      </a:accent1>
+      <a:accent2>
+        <a:srgbClr val="E97132"/>
+      </a:accent2>
+      <a:accent3>
+        <a:srgbClr val="196B24"/>
+      </a:accent3>
+      <a:accent4>
+        <a:srgbClr val="0F9ED5"/>
+      </a:accent4>
+      <a:accent5>
+        <a:srgbClr val="A02B93"/>
+      </a:accent5>
+      <a:accent6>
+        <a:srgbClr val="4EA72E"/>
+      </a:accent6>
+      <a:hlink>
+        <a:srgbClr val="467886"/>
+      </a:hlink>
+      <a:folHlink>
+        <a:srgbClr val="96607D"/>
+      </a:folHlink>
+    </a:clrScheme>
+    <a:fontScheme name="Стандартная">
+      <a:majorFont>
+        <a:latin typeface="Aptos Display" panose="02110004020202020204"/>
+        <a:ea typeface=""/>
+        <a:cs typeface=""/>
+        <a:font script="Jpan" typeface="游ゴシック Light"/>
+        <a:font script="Hang" typeface="맑은 고딕"/>
+        <a:font script="Hans" typeface="等线 Light"/>
+        <a:font script="Hant" typeface="新細明體"/>
+        <a:font script="Arab" typeface="Times New Roman"/>
+        <a:font script="Hebr" typeface="Times New Roman"/>
+        <a:font script="Thai" typeface="Angsana New"/>
+        <a:font script="Ethi" typeface="Nyala"/>
+        <a:font script="Beng" typeface="Vrinda"/>
+        <a:font script="Gujr" typeface="Shruti"/>
+        <a:font script="Khmr" typeface="MoolBoran"/>
+        <a:font script="Knda" typeface="Tunga"/>
+        <a:font script="Guru" typeface="Raavi"/>
+        <a:font script="Cans" typeface="Euphemia"/>
+        <a:font script="Cher" typeface="Plantagenet Cherokee"/>
+        <a:font script="Yiii" typeface="Microsoft Yi Baiti"/>
+        <a:font script="Tibt" typeface="Microsoft Himalaya"/>
+        <a:font script="Thaa" typeface="MV Boli"/>
+        <a:font script="Deva" typeface="Mangal"/>
+        <a:font script="Telu" typeface="Gautami"/>
+        <a:font script="Taml" typeface="Latha"/>
+        <a:font script="Syrc" typeface="Estrangelo Edessa"/>
+        <a:font script="Orya" typeface="Kalinga"/>
+        <a:font script="Mlym" typeface="Kartika"/>
+        <a:font script="Laoo" typeface="DokChampa"/>
+        <a:font script="Sinh" typeface="Iskoola Pota"/>
+        <a:font script="Mong" typeface="Mongolian Baiti"/>
+        <a:font script="Viet" typeface="Times New Roman"/>
+        <a:font script="Uigh" typeface="Microsoft Uighur"/>
+        <a:font script="Geor" typeface="Sylfaen"/>
+        <a:font script="Armn" typeface="Arial"/>
+        <a:font script="Bugi" typeface="Leelawadee UI"/>
+        <a:font script="Bopo" typeface="Microsoft JhengHei"/>
+        <a:font script="Java" typeface="Javanese Text"/>
+        <a:font script="Lisu" typeface="Segoe UI"/>
+        <a:font script="Mymr" typeface="Myanmar Text"/>
+        <a:font script="Nkoo" typeface="Ebrima"/>
+        <a:font script="Olck" typeface="Nirmala UI"/>
+        <a:font script="Osma" typeface="Ebrima"/>
+        <a:font script="Phag" typeface="Phagspa"/>
+        <a:font script="Syrn" typeface="Estrangelo Edessa"/>
+        <a:font script="Syrj" typeface="Estrangelo Edessa"/>
+        <a:font script="Syre" typeface="Estrangelo Edessa"/>
+        <a:font script="Sora" typeface="Nirmala UI"/>
+        <a:font script="Tale" typeface="Microsoft Tai Le"/>
+        <a:font script="Talu" typeface="Microsoft New Tai Lue"/>
+        <a:font script="Tfng" typeface="Ebrima"/>
+      </a:majorFont>
+      <a:minorFont>
+        <a:latin typeface="Aptos" panose="02110004020202020204"/>
+        <a:ea typeface=""/>
+        <a:cs typeface=""/>
+        <a:font script="Jpan" typeface="游ゴシック"/>
+        <a:font script="Hang" typeface="맑은 고딕"/>
+        <a:font script="Hans" typeface="等线"/>
+        <a:font script="Hant" typeface="新細明體"/>
+        <a:font script="Arab" typeface="Arial"/>
+        <a:font script="Hebr" typeface="Arial"/>
+        <a:font script="Thai" typeface="Cordia New"/>
+        <a:font script="Ethi" typeface="Nyala"/>
+        <a:font script="Beng" typeface="Vrinda"/>
+        <a:font script="Gujr" typeface="Shruti"/>
+        <a:font script="Khmr" typeface="DaunPenh"/>
+        <a:font script="Knda" typeface="Tunga"/>
+        <a:font script="Guru" typeface="Raavi"/>
+        <a:font script="Cans" typeface="Euphemia"/>
+        <a:font script="Cher" typeface="Plantagenet Cherokee"/>
+        <a:font script="Yiii" typeface="Microsoft Yi Baiti"/>
+        <a:font script="Tibt" typeface="Microsoft Himalaya"/>
+        <a:font script="Thaa" typeface="MV Boli"/>
+        <a:font script="Deva" typeface="Mangal"/>
+        <a:font script="Telu" typeface="Gautami"/>
+        <a:font script="Taml" typeface="Latha"/>
+        <a:font script="Syrc" typeface="Estrangelo Edessa"/>
+        <a:font script="Orya" typeface="Kalinga"/>
+        <a:font script="Mlym" typeface="Kartika"/>
+        <a:font script="Laoo" typeface="DokChampa"/>
+        <a:font script="Sinh" typeface="Iskoola Pota"/>
+        <a:font script="Mong" typeface="Mongolian Baiti"/>
+        <a:font script="Viet" typeface="Arial"/>
+        <a:font script="Uigh" typeface="Microsoft Uighur"/>
+        <a:font script="Geor" typeface="Sylfaen"/>
+        <a:font script="Armn" typeface="Arial"/>
+        <a:font script="Bugi" typeface="Leelawadee UI"/>
+        <a:font script="Bopo" typeface="Microsoft JhengHei"/>
+        <a:font script="Java" typeface="Javanese Text"/>
+        <a:font script="Lisu" typeface="Segoe UI"/>
+        <a:font script="Mymr" typeface="Myanmar Text"/>
+        <a:font script="Nkoo" typeface="Ebrima"/>
+        <a:font script="Olck" typeface="Nirmala UI"/>
+        <a:font script="Osma" typeface="Ebrima"/>
+        <a:font script="Phag" typeface="Phagspa"/>
+        <a:font script="Syrn" typeface="Estrangelo Edessa"/>
+        <a:font script="Syrj" typeface="Estrangelo Edessa"/>
+        <a:font script="Syre" typeface="Estrangelo Edessa"/>
+        <a:font script="Sora" typeface="Nirmala UI"/>
+        <a:font script="Tale" typeface="Microsoft Tai Le"/>
+        <a:font script="Talu" typeface="Microsoft New Tai Lue"/>
+        <a:font script="Tfng" typeface="Ebrima"/>
+      </a:minorFont>
+    </a:fontScheme>
+    <a:fmtScheme name="Стандартная">
+      <a:fillStyleLst>
+        <a:solidFill>
+          <a:schemeClr val="phClr"/>
+        </a:solidFill>
+        <a:gradFill rotWithShape="1">
+          <a:gsLst>
+            <a:gs pos="0">
+              <a:schemeClr val="phClr">
+                <a:lumMod val="110000"/>
+                <a:satMod val="105000"/>
+                <a:tint val="67000"/>
+              </a:schemeClr>
+            </a:gs>
+            <a:gs pos="50000">
+              <a:schemeClr val="phClr">
+                <a:lumMod val="105000"/>
+                <a:satMod val="103000"/>
+                <a:tint val="73000"/>
+              </a:schemeClr>
+            </a:gs>
+            <a:gs pos="100000">
+              <a:schemeClr val="phClr">
+                <a:lumMod val="105000"/>
+                <a:satMod val="109000"/>
+                <a:tint val="81000"/>
+              </a:schemeClr>
+            </a:gs>
+          </a:gsLst>
+          <a:lin ang="5400000" scaled="0"/>
+        </a:gradFill>
+        <a:gradFill rotWithShape="1">
+          <a:gsLst>
+            <a:gs pos="0">
+              <a:schemeClr val="phClr">
+                <a:satMod val="103000"/>
+                <a:lumMod val="102000"/>
+                <a:tint val="94000"/>
+              </a:schemeClr>
+            </a:gs>
+            <a:gs pos="50000">
+              <a:schemeClr val="phClr">
+                <a:satMod val="110000"/>
+                <a:lumMod val="100000"/>
+                <a:shade val="100000"/>
+              </a:schemeClr>
+            </a:gs>
+            <a:gs pos="100000">
+              <a:schemeClr val="phClr">
+                <a:lumMod val="99000"/>
+                <a:satMod val="120000"/>
+                <a:shade val="78000"/>
+              </a:schemeClr>
+            </a:gs>
+          </a:gsLst>
+          <a:lin ang="5400000" scaled="0"/>
+        </a:gradFill>
+      </a:fillStyleLst>
+      <a:lnStyleLst>
+        <a:ln w="12700" cap="flat" cmpd="sng" algn="ctr">
+          <a:solidFill>
+            <a:schemeClr val="phClr"/>
+          </a:solidFill>
+          <a:prstDash val="solid"/>
+          <a:miter lim="800000"/>
+        </a:ln>
+        <a:ln w="19050" cap="flat" cmpd="sng" algn="ctr">
+          <a:solidFill>
+            <a:schemeClr val="phClr"/>
+          </a:solidFill>
+          <a:prstDash val="solid"/>
+          <a:miter lim="800000"/>
+        </a:ln>
+        <a:ln w="25400" cap="flat" cmpd="sng" algn="ctr">
+          <a:solidFill>
+            <a:schemeClr val="phClr"/>
+          </a:solidFill>
+          <a:prstDash val="solid"/>
+          <a:miter lim="800000"/>
+        </a:ln>
+      </a:lnStyleLst>
+      <a:effectStyleLst>
+        <a:effectStyle>
+          <a:effectLst/>
+        </a:effectStyle>
+        <a:effectStyle>
+          <a:effectLst/>
+        </a:effectStyle>
+        <a:effectStyle>
+          <a:effectLst>
+            <a:outerShdw blurRad="57150" dist="19050" dir="5400000" algn="ctr" rotWithShape="0">
+              <a:srgbClr val="000000">
+                <a:alpha val="63000"/>
+              </a:srgbClr>
+            </a:outerShdw>
+          </a:effectLst>
+        </a:effectStyle>
+      </a:effectStyleLst>
+      <a:bgFillStyleLst>
+        <a:solidFill>
+          <a:schemeClr val="phClr"/>
+        </a:solidFill>
+        <a:solidFill>
+          <a:schemeClr val="phClr">
+            <a:tint val="95000"/>
+            <a:satMod val="170000"/>
+          </a:schemeClr>
+        </a:solidFill>
+        <a:gradFill rotWithShape="1">
+          <a:gsLst>
+            <a:gs pos="0">
+              <a:schemeClr val="phClr">
+                <a:tint val="93000"/>
+                <a:satMod val="150000"/>
+                <a:shade val="98000"/>
+                <a:lumMod val="102000"/>
+              </a:schemeClr>
+            </a:gs>
+            <a:gs pos="50000">
+              <a:schemeClr val="phClr">
+                <a:tint val="98000"/>
+                <a:satMod val="130000"/>
+                <a:shade val="90000"/>
+                <a:lumMod val="103000"/>
+              </a:schemeClr>
+            </a:gs>
+            <a:gs pos="100000">
+              <a:schemeClr val="phClr">
+                <a:shade val="63000"/>
+                <a:satMod val="120000"/>
+              </a:schemeClr>
+            </a:gs>
+          </a:gsLst>
+          <a:lin ang="5400000" scaled="0"/>
+        </a:gradFill>
+      </a:bgFillStyleLst>
+    </a:fmtScheme>
+  </a:themeElements>
+  <a:objectDefaults>
+    <a:lnDef>
+      <a:spPr/>
+      <a:bodyPr/>
+      <a:lstStyle/>
+      <a:style>
+        <a:lnRef idx="2">
+          <a:schemeClr val="accent1"/>
+        </a:lnRef>
+        <a:fillRef idx="0">
+          <a:schemeClr val="accent1"/>
+        </a:fillRef>
+        <a:effectRef idx="1">
+          <a:schemeClr val="accent1"/>
+        </a:effectRef>
+        <a:fontRef idx="minor">
+          <a:schemeClr val="tx1"/>
+        </a:fontRef>
+      </a:style>
+    </a:lnDef>
+  </a:objectDefaults>
+  <a:extraClrSchemeLst/>
+  <a:extLst>
+    <a:ext uri="{05A4C25C-085E-4340-85A3-A5531E510DB2}">
+      <thm15:themeFamily xmlns:thm15="http://schemas.microsoft.com/office/thememl/2012/main" name="Office Theme" id="{2E142A2C-CD16-42D6-873A-C26D2A0506FA}" vid="{1BDDFF52-6CD6-40A5-AB3C-68EB2F1E4D0A}"/>
+    </a:ext>
+  </a:extLst>
+</a:theme>
 </file>
--- a/VKR/presentation/presentation_zaschita_mtusi.pptx
+++ b/VKR/presentation/presentation_zaschita_mtusi.pptx
@@ -350,7 +350,7 @@
                 <a:latin typeface="Montserrat"/>
               </a:defRPr>
             </a:pPr>
-            <a:endParaRPr lang="en-US"/>
+            <a:endParaRPr lang="ru-RU"/>
           </a:p>
         </c:txPr>
         <c:crossAx val="2094734552"/>
@@ -403,7 +403,7 @@
                 <a:latin typeface="Montserrat"/>
               </a:defRPr>
             </a:pPr>
-            <a:endParaRPr lang="en-US"/>
+            <a:endParaRPr lang="ru-RU"/>
           </a:p>
         </c:txPr>
         <c:crossAx val="2094734554"/>

--- a/VKR/presentation/presentation_zaschita_mtusi.pptx
+++ b/VKR/presentation/presentation_zaschita_mtusi.pptx
@@ -5,7 +5,7 @@
     <p:sldMasterId id="2147483648" r:id="rId1"/>
   </p:sldMasterIdLst>
   <p:notesMasterIdLst>
-    <p:notesMasterId r:id="rId14"/>
+    <p:notesMasterId r:id="rId15"/>
   </p:notesMasterIdLst>
   <p:sldIdLst>
     <p:sldId id="256" r:id="rId2"/>
@@ -13,13 +13,14 @@
     <p:sldId id="258" r:id="rId4"/>
     <p:sldId id="259" r:id="rId5"/>
     <p:sldId id="260" r:id="rId6"/>
-    <p:sldId id="261" r:id="rId7"/>
-    <p:sldId id="262" r:id="rId8"/>
-    <p:sldId id="263" r:id="rId9"/>
-    <p:sldId id="264" r:id="rId10"/>
-    <p:sldId id="265" r:id="rId11"/>
-    <p:sldId id="266" r:id="rId12"/>
-    <p:sldId id="267" r:id="rId13"/>
+    <p:sldId id="268" r:id="rId7"/>
+    <p:sldId id="261" r:id="rId8"/>
+    <p:sldId id="262" r:id="rId9"/>
+    <p:sldId id="263" r:id="rId10"/>
+    <p:sldId id="264" r:id="rId11"/>
+    <p:sldId id="265" r:id="rId12"/>
+    <p:sldId id="266" r:id="rId13"/>
+    <p:sldId id="267" r:id="rId14"/>
   </p:sldIdLst>
   <p:sldSz cx="9144000" cy="5143500" type="screen16x9"/>
   <p:notesSz cx="5143500" cy="9144000"/>
@@ -713,7 +714,7 @@
           <a:p>
             <a:fld id="{F7021451-1387-4CA6-816F-3879F97B5CBC}" type="slidenum">
               <a:rPr lang="en-US"/>
-              <a:t>10</a:t>
+              <a:t>11</a:t>
             </a:fld>
             <a:endParaRPr lang="en-US"/>
           </a:p>
@@ -797,7 +798,7 @@
           <a:p>
             <a:fld id="{F7021451-1387-4CA6-816F-3879F97B5CBC}" type="slidenum">
               <a:rPr lang="en-US"/>
-              <a:t>11</a:t>
+              <a:t>12</a:t>
             </a:fld>
             <a:endParaRPr lang="en-US"/>
           </a:p>
@@ -881,7 +882,7 @@
           <a:p>
             <a:fld id="{F7021451-1387-4CA6-816F-3879F97B5CBC}" type="slidenum">
               <a:rPr lang="en-US"/>
-              <a:t>12</a:t>
+              <a:t>13</a:t>
             </a:fld>
             <a:endParaRPr lang="en-US"/>
           </a:p>
@@ -1301,7 +1302,7 @@
           <a:p>
             <a:fld id="{F7021451-1387-4CA6-816F-3879F97B5CBC}" type="slidenum">
               <a:rPr lang="en-US"/>
-              <a:t>6</a:t>
+              <a:t>7</a:t>
             </a:fld>
             <a:endParaRPr lang="en-US"/>
           </a:p>
@@ -1385,7 +1386,7 @@
           <a:p>
             <a:fld id="{F7021451-1387-4CA6-816F-3879F97B5CBC}" type="slidenum">
               <a:rPr lang="en-US"/>
-              <a:t>7</a:t>
+              <a:t>8</a:t>
             </a:fld>
             <a:endParaRPr lang="en-US"/>
           </a:p>
@@ -1469,7 +1470,7 @@
           <a:p>
             <a:fld id="{F7021451-1387-4CA6-816F-3879F97B5CBC}" type="slidenum">
               <a:rPr lang="en-US"/>
-              <a:t>8</a:t>
+              <a:t>9</a:t>
             </a:fld>
             <a:endParaRPr lang="en-US"/>
           </a:p>
@@ -1553,7 +1554,7 @@
           <a:p>
             <a:fld id="{F7021451-1387-4CA6-816F-3879F97B5CBC}" type="slidenum">
               <a:rPr lang="en-US"/>
-              <a:t>9</a:t>
+              <a:t>10</a:t>
             </a:fld>
             <a:endParaRPr lang="en-US"/>
           </a:p>
@@ -2150,7 +2151,7 @@
               <a:buNone/>
             </a:pPr>
             <a:r>
-              <a:rPr lang="en-US" sz="2400" b="1" dirty="0">
+              <a:rPr lang="ru-RU" sz="2400" b="1" dirty="0">
                 <a:solidFill>
                   <a:srgbClr val="FFFFFF"/>
                 </a:solidFill>
@@ -2158,67 +2159,7 @@
                 <a:ea typeface="Montserrat SemiBold" pitchFamily="34" charset="-122"/>
                 <a:cs typeface="Montserrat SemiBold" pitchFamily="34" charset="-120"/>
               </a:rPr>
-              <a:t>Разработка кроссплатформенного приложения</a:t>
-            </a:r>
-            <a:endParaRPr lang="en-US" sz="2400" dirty="0"/>
-          </a:p>
-          <a:p>
-            <a:pPr marL="0" indent="0" algn="l">
-              <a:spcAft>
-                <a:spcPts val="400"/>
-              </a:spcAft>
-              <a:buNone/>
-            </a:pPr>
-            <a:r>
-              <a:rPr lang="en-US" sz="2400" b="1" dirty="0">
-                <a:solidFill>
-                  <a:srgbClr val="FFFFFF"/>
-                </a:solidFill>
-                <a:latin typeface="Montserrat SemiBold" pitchFamily="34" charset="0"/>
-                <a:ea typeface="Montserrat SemiBold" pitchFamily="34" charset="-122"/>
-                <a:cs typeface="Montserrat SemiBold" pitchFamily="34" charset="-120"/>
-              </a:rPr>
-              <a:t>для отслеживания силовых тренировок</a:t>
-            </a:r>
-            <a:endParaRPr lang="en-US" sz="2400" dirty="0"/>
-          </a:p>
-          <a:p>
-            <a:pPr marL="0" indent="0" algn="l">
-              <a:spcAft>
-                <a:spcPts val="400"/>
-              </a:spcAft>
-              <a:buNone/>
-            </a:pPr>
-            <a:r>
-              <a:rPr lang="en-US" sz="2400" b="1" dirty="0">
-                <a:solidFill>
-                  <a:srgbClr val="FFFFFF"/>
-                </a:solidFill>
-                <a:latin typeface="Montserrat SemiBold" pitchFamily="34" charset="0"/>
-                <a:ea typeface="Montserrat SemiBold" pitchFamily="34" charset="-122"/>
-                <a:cs typeface="Montserrat SemiBold" pitchFamily="34" charset="-120"/>
-              </a:rPr>
-              <a:t>с локальной ML-моделью прогнозирования 1ПМ</a:t>
-            </a:r>
-            <a:endParaRPr lang="en-US" sz="2400" dirty="0"/>
-          </a:p>
-          <a:p>
-            <a:pPr marL="0" indent="0" algn="l">
-              <a:spcAft>
-                <a:spcPts val="400"/>
-              </a:spcAft>
-              <a:buNone/>
-            </a:pPr>
-            <a:r>
-              <a:rPr lang="en-US" sz="2400" b="1" dirty="0">
-                <a:solidFill>
-                  <a:srgbClr val="FFFFFF"/>
-                </a:solidFill>
-                <a:latin typeface="Montserrat SemiBold" pitchFamily="34" charset="0"/>
-                <a:ea typeface="Montserrat SemiBold" pitchFamily="34" charset="-122"/>
-                <a:cs typeface="Montserrat SemiBold" pitchFamily="34" charset="-120"/>
-              </a:rPr>
-              <a:t>и облачной синхронизацией</a:t>
+              <a:t>Разработка информационной системы для учета и планирования спортивных тренировок</a:t>
             </a:r>
             <a:endParaRPr lang="en-US" sz="2400" dirty="0"/>
           </a:p>
@@ -2417,6 +2358,1002 @@
 </file>
 
 <file path=ppt/slides/slide10.xml><?xml version="1.0" encoding="utf-8"?>
+<p:sld xmlns:a="http://schemas.openxmlformats.org/drawingml/2006/main" xmlns:r="http://schemas.openxmlformats.org/officeDocument/2006/relationships" xmlns:p="http://schemas.openxmlformats.org/presentationml/2006/main">
+  <p:cSld name="Slide 9">
+    <p:bg>
+      <p:bgPr>
+        <a:solidFill>
+          <a:srgbClr val="FFFFFF"/>
+        </a:solidFill>
+        <a:effectLst/>
+      </p:bgPr>
+    </p:bg>
+    <p:spTree>
+      <p:nvGrpSpPr>
+        <p:cNvPr id="1" name=""/>
+        <p:cNvGrpSpPr/>
+        <p:nvPr/>
+      </p:nvGrpSpPr>
+      <p:grpSpPr>
+        <a:xfrm>
+          <a:off x="0" y="0"/>
+          <a:ext cx="0" cy="0"/>
+          <a:chOff x="0" y="0"/>
+          <a:chExt cx="0" cy="0"/>
+        </a:xfrm>
+      </p:grpSpPr>
+      <p:sp>
+        <p:nvSpPr>
+          <p:cNvPr id="2" name="Shape 0"/>
+          <p:cNvSpPr/>
+          <p:nvPr/>
+        </p:nvSpPr>
+        <p:spPr>
+          <a:xfrm>
+            <a:off x="0" y="0"/>
+            <a:ext cx="228600" cy="5143500"/>
+          </a:xfrm>
+          <a:prstGeom prst="rect">
+            <a:avLst/>
+          </a:prstGeom>
+          <a:solidFill>
+            <a:srgbClr val="372579"/>
+          </a:solidFill>
+          <a:ln w="12700">
+            <a:solidFill>
+              <a:srgbClr val="372579"/>
+            </a:solidFill>
+            <a:prstDash val="solid"/>
+          </a:ln>
+        </p:spPr>
+        <p:txBody>
+          <a:bodyPr/>
+          <a:lstStyle/>
+          <a:p>
+            <a:endParaRPr lang="ru-RU"/>
+          </a:p>
+        </p:txBody>
+      </p:sp>
+      <p:sp>
+        <p:nvSpPr>
+          <p:cNvPr id="3" name="Shape 1"/>
+          <p:cNvSpPr/>
+          <p:nvPr/>
+        </p:nvSpPr>
+        <p:spPr>
+          <a:xfrm>
+            <a:off x="0" y="365760"/>
+            <a:ext cx="228600" cy="594360"/>
+          </a:xfrm>
+          <a:prstGeom prst="rect">
+            <a:avLst/>
+          </a:prstGeom>
+          <a:solidFill>
+            <a:srgbClr val="E85362"/>
+          </a:solidFill>
+          <a:ln w="12700">
+            <a:solidFill>
+              <a:srgbClr val="E85362"/>
+            </a:solidFill>
+            <a:prstDash val="solid"/>
+          </a:ln>
+        </p:spPr>
+        <p:txBody>
+          <a:bodyPr/>
+          <a:lstStyle/>
+          <a:p>
+            <a:endParaRPr lang="ru-RU"/>
+          </a:p>
+        </p:txBody>
+      </p:sp>
+      <p:sp>
+        <p:nvSpPr>
+          <p:cNvPr id="4" name="Text 2"/>
+          <p:cNvSpPr/>
+          <p:nvPr/>
+        </p:nvSpPr>
+        <p:spPr>
+          <a:xfrm>
+            <a:off x="502920" y="320040"/>
+            <a:ext cx="8046720" cy="640080"/>
+          </a:xfrm>
+          <a:prstGeom prst="rect">
+            <a:avLst/>
+          </a:prstGeom>
+          <a:noFill/>
+          <a:ln/>
+        </p:spPr>
+        <p:txBody>
+          <a:bodyPr wrap="square" lIns="0" tIns="0" rIns="0" bIns="0" rtlCol="0" anchor="ctr"/>
+          <a:lstStyle/>
+          <a:p>
+            <a:pPr marL="0" indent="0">
+              <a:buNone/>
+            </a:pPr>
+            <a:r>
+              <a:rPr lang="en-US" sz="2800" b="1" dirty="0">
+                <a:solidFill>
+                  <a:srgbClr val="24184E"/>
+                </a:solidFill>
+                <a:latin typeface="Montserrat SemiBold" pitchFamily="34" charset="0"/>
+                <a:ea typeface="Montserrat SemiBold" pitchFamily="34" charset="-122"/>
+                <a:cs typeface="Montserrat SemiBold" pitchFamily="34" charset="-120"/>
+              </a:rPr>
+              <a:t>Облачная синхронизация</a:t>
+            </a:r>
+            <a:endParaRPr lang="en-US" sz="2800" dirty="0"/>
+          </a:p>
+        </p:txBody>
+      </p:sp>
+      <p:sp>
+        <p:nvSpPr>
+          <p:cNvPr id="5" name="Shape 3"/>
+          <p:cNvSpPr/>
+          <p:nvPr/>
+        </p:nvSpPr>
+        <p:spPr>
+          <a:xfrm>
+            <a:off x="502920" y="960120"/>
+            <a:ext cx="8275320" cy="0"/>
+          </a:xfrm>
+          <a:prstGeom prst="line">
+            <a:avLst/>
+          </a:prstGeom>
+          <a:noFill/>
+          <a:ln w="12700">
+            <a:solidFill>
+              <a:srgbClr val="E8E0F7"/>
+            </a:solidFill>
+            <a:prstDash val="solid"/>
+          </a:ln>
+        </p:spPr>
+        <p:txBody>
+          <a:bodyPr/>
+          <a:lstStyle/>
+          <a:p>
+            <a:endParaRPr lang="ru-RU"/>
+          </a:p>
+        </p:txBody>
+      </p:sp>
+      <p:sp>
+        <p:nvSpPr>
+          <p:cNvPr id="6" name="Text 4"/>
+          <p:cNvSpPr/>
+          <p:nvPr/>
+        </p:nvSpPr>
+        <p:spPr>
+          <a:xfrm>
+            <a:off x="502920" y="4846320"/>
+            <a:ext cx="5486400" cy="228600"/>
+          </a:xfrm>
+          <a:prstGeom prst="rect">
+            <a:avLst/>
+          </a:prstGeom>
+          <a:noFill/>
+          <a:ln/>
+        </p:spPr>
+        <p:txBody>
+          <a:bodyPr wrap="square" rtlCol="0" anchor="ctr"/>
+          <a:lstStyle/>
+          <a:p>
+            <a:pPr marL="0" indent="0" algn="l">
+              <a:buNone/>
+            </a:pPr>
+            <a:r>
+              <a:rPr lang="en-US" sz="1000" i="1" dirty="0">
+                <a:solidFill>
+                  <a:srgbClr val="6B6280"/>
+                </a:solidFill>
+                <a:latin typeface="Montserrat" pitchFamily="34" charset="0"/>
+                <a:ea typeface="Montserrat" pitchFamily="34" charset="-122"/>
+                <a:cs typeface="Montserrat" pitchFamily="34" charset="-120"/>
+              </a:rPr>
+              <a:t>FitApp · ВКР · МТУСИ, 2026</a:t>
+            </a:r>
+            <a:endParaRPr lang="en-US" sz="1000" dirty="0"/>
+          </a:p>
+        </p:txBody>
+      </p:sp>
+      <p:sp>
+        <p:nvSpPr>
+          <p:cNvPr id="7" name="Text 5"/>
+          <p:cNvSpPr/>
+          <p:nvPr/>
+        </p:nvSpPr>
+        <p:spPr>
+          <a:xfrm>
+            <a:off x="7772400" y="4846320"/>
+            <a:ext cx="1188720" cy="228600"/>
+          </a:xfrm>
+          <a:prstGeom prst="rect">
+            <a:avLst/>
+          </a:prstGeom>
+          <a:noFill/>
+          <a:ln/>
+        </p:spPr>
+        <p:txBody>
+          <a:bodyPr wrap="square" rtlCol="0" anchor="ctr"/>
+          <a:lstStyle/>
+          <a:p>
+            <a:pPr marL="0" indent="0" algn="r">
+              <a:buNone/>
+            </a:pPr>
+            <a:r>
+              <a:rPr lang="en-US" sz="1000" dirty="0">
+                <a:solidFill>
+                  <a:srgbClr val="6B6280"/>
+                </a:solidFill>
+                <a:latin typeface="Montserrat" pitchFamily="34" charset="0"/>
+                <a:ea typeface="Montserrat" pitchFamily="34" charset="-122"/>
+                <a:cs typeface="Montserrat" pitchFamily="34" charset="-120"/>
+              </a:rPr>
+              <a:t>9 / 12</a:t>
+            </a:r>
+            <a:endParaRPr lang="en-US" sz="1000" dirty="0"/>
+          </a:p>
+        </p:txBody>
+      </p:sp>
+      <p:sp>
+        <p:nvSpPr>
+          <p:cNvPr id="8" name="Shape 6"/>
+          <p:cNvSpPr/>
+          <p:nvPr/>
+        </p:nvSpPr>
+        <p:spPr>
+          <a:xfrm>
+            <a:off x="731520" y="1188720"/>
+            <a:ext cx="1554480" cy="548640"/>
+          </a:xfrm>
+          <a:prstGeom prst="rect">
+            <a:avLst/>
+          </a:prstGeom>
+          <a:solidFill>
+            <a:srgbClr val="372579"/>
+          </a:solidFill>
+          <a:ln w="12700">
+            <a:solidFill>
+              <a:srgbClr val="372579"/>
+            </a:solidFill>
+            <a:prstDash val="solid"/>
+          </a:ln>
+        </p:spPr>
+        <p:txBody>
+          <a:bodyPr/>
+          <a:lstStyle/>
+          <a:p>
+            <a:endParaRPr lang="ru-RU"/>
+          </a:p>
+        </p:txBody>
+      </p:sp>
+      <p:sp>
+        <p:nvSpPr>
+          <p:cNvPr id="9" name="Text 7"/>
+          <p:cNvSpPr/>
+          <p:nvPr/>
+        </p:nvSpPr>
+        <p:spPr>
+          <a:xfrm>
+            <a:off x="731520" y="1188720"/>
+            <a:ext cx="1554480" cy="548640"/>
+          </a:xfrm>
+          <a:prstGeom prst="rect">
+            <a:avLst/>
+          </a:prstGeom>
+          <a:noFill/>
+          <a:ln/>
+        </p:spPr>
+        <p:txBody>
+          <a:bodyPr wrap="square" rtlCol="0" anchor="ctr"/>
+          <a:lstStyle/>
+          <a:p>
+            <a:pPr marL="0" indent="0" algn="ctr">
+              <a:buNone/>
+            </a:pPr>
+            <a:r>
+              <a:rPr lang="en-US" sz="1000" b="1" kern="0" spc="100" dirty="0">
+                <a:solidFill>
+                  <a:srgbClr val="FFFFFF"/>
+                </a:solidFill>
+                <a:latin typeface="Montserrat SemiBold" pitchFamily="34" charset="0"/>
+                <a:ea typeface="Montserrat SemiBold" pitchFamily="34" charset="-122"/>
+                <a:cs typeface="Montserrat SemiBold" pitchFamily="34" charset="-120"/>
+              </a:rPr>
+              <a:t>КЛИЕНТ</a:t>
+            </a:r>
+            <a:endParaRPr lang="en-US" sz="1000" dirty="0"/>
+          </a:p>
+          <a:p>
+            <a:pPr marL="0" indent="0" algn="ctr">
+              <a:buNone/>
+            </a:pPr>
+            <a:r>
+              <a:rPr lang="en-US" sz="1000" b="1" kern="0" spc="100" dirty="0">
+                <a:solidFill>
+                  <a:srgbClr val="FFFFFF"/>
+                </a:solidFill>
+                <a:latin typeface="Montserrat SemiBold" pitchFamily="34" charset="0"/>
+                <a:ea typeface="Montserrat SemiBold" pitchFamily="34" charset="-122"/>
+                <a:cs typeface="Montserrat SemiBold" pitchFamily="34" charset="-120"/>
+              </a:rPr>
+              <a:t>.NET MAUI</a:t>
+            </a:r>
+            <a:endParaRPr lang="en-US" sz="1000" dirty="0"/>
+          </a:p>
+        </p:txBody>
+      </p:sp>
+      <p:sp>
+        <p:nvSpPr>
+          <p:cNvPr id="10" name="Shape 8"/>
+          <p:cNvSpPr/>
+          <p:nvPr/>
+        </p:nvSpPr>
+        <p:spPr>
+          <a:xfrm>
+            <a:off x="1508760" y="1737360"/>
+            <a:ext cx="0" cy="2560320"/>
+          </a:xfrm>
+          <a:prstGeom prst="line">
+            <a:avLst/>
+          </a:prstGeom>
+          <a:noFill/>
+          <a:ln w="12700">
+            <a:solidFill>
+              <a:srgbClr val="372579"/>
+            </a:solidFill>
+            <a:prstDash val="dash"/>
+          </a:ln>
+        </p:spPr>
+        <p:txBody>
+          <a:bodyPr/>
+          <a:lstStyle/>
+          <a:p>
+            <a:endParaRPr lang="ru-RU"/>
+          </a:p>
+        </p:txBody>
+      </p:sp>
+      <p:sp>
+        <p:nvSpPr>
+          <p:cNvPr id="11" name="Shape 9"/>
+          <p:cNvSpPr/>
+          <p:nvPr/>
+        </p:nvSpPr>
+        <p:spPr>
+          <a:xfrm>
+            <a:off x="3931920" y="1188720"/>
+            <a:ext cx="1554480" cy="548640"/>
+          </a:xfrm>
+          <a:prstGeom prst="rect">
+            <a:avLst/>
+          </a:prstGeom>
+          <a:solidFill>
+            <a:srgbClr val="47309C"/>
+          </a:solidFill>
+          <a:ln w="12700">
+            <a:solidFill>
+              <a:srgbClr val="47309C"/>
+            </a:solidFill>
+            <a:prstDash val="solid"/>
+          </a:ln>
+        </p:spPr>
+        <p:txBody>
+          <a:bodyPr/>
+          <a:lstStyle/>
+          <a:p>
+            <a:endParaRPr lang="ru-RU"/>
+          </a:p>
+        </p:txBody>
+      </p:sp>
+      <p:sp>
+        <p:nvSpPr>
+          <p:cNvPr id="12" name="Text 10"/>
+          <p:cNvSpPr/>
+          <p:nvPr/>
+        </p:nvSpPr>
+        <p:spPr>
+          <a:xfrm>
+            <a:off x="3931920" y="1188720"/>
+            <a:ext cx="1554480" cy="548640"/>
+          </a:xfrm>
+          <a:prstGeom prst="rect">
+            <a:avLst/>
+          </a:prstGeom>
+          <a:noFill/>
+          <a:ln/>
+        </p:spPr>
+        <p:txBody>
+          <a:bodyPr wrap="square" rtlCol="0" anchor="ctr"/>
+          <a:lstStyle/>
+          <a:p>
+            <a:pPr marL="0" indent="0" algn="ctr">
+              <a:buNone/>
+            </a:pPr>
+            <a:r>
+              <a:rPr lang="en-US" sz="1000" b="1" kern="0" spc="100" dirty="0">
+                <a:solidFill>
+                  <a:srgbClr val="FFFFFF"/>
+                </a:solidFill>
+                <a:latin typeface="Montserrat SemiBold" pitchFamily="34" charset="0"/>
+                <a:ea typeface="Montserrat SemiBold" pitchFamily="34" charset="-122"/>
+                <a:cs typeface="Montserrat SemiBold" pitchFamily="34" charset="-120"/>
+              </a:rPr>
+              <a:t>СЕРВЕР</a:t>
+            </a:r>
+            <a:endParaRPr lang="en-US" sz="1000" dirty="0"/>
+          </a:p>
+          <a:p>
+            <a:pPr marL="0" indent="0" algn="ctr">
+              <a:buNone/>
+            </a:pPr>
+            <a:r>
+              <a:rPr lang="en-US" sz="1000" b="1" kern="0" spc="100" dirty="0">
+                <a:solidFill>
+                  <a:srgbClr val="FFFFFF"/>
+                </a:solidFill>
+                <a:latin typeface="Montserrat SemiBold" pitchFamily="34" charset="0"/>
+                <a:ea typeface="Montserrat SemiBold" pitchFamily="34" charset="-122"/>
+                <a:cs typeface="Montserrat SemiBold" pitchFamily="34" charset="-120"/>
+              </a:rPr>
+              <a:t>ASP.NET Core</a:t>
+            </a:r>
+            <a:endParaRPr lang="en-US" sz="1000" dirty="0"/>
+          </a:p>
+        </p:txBody>
+      </p:sp>
+      <p:sp>
+        <p:nvSpPr>
+          <p:cNvPr id="13" name="Shape 11"/>
+          <p:cNvSpPr/>
+          <p:nvPr/>
+        </p:nvSpPr>
+        <p:spPr>
+          <a:xfrm>
+            <a:off x="4709160" y="1737360"/>
+            <a:ext cx="0" cy="2560320"/>
+          </a:xfrm>
+          <a:prstGeom prst="line">
+            <a:avLst/>
+          </a:prstGeom>
+          <a:noFill/>
+          <a:ln w="12700">
+            <a:solidFill>
+              <a:srgbClr val="47309C"/>
+            </a:solidFill>
+            <a:prstDash val="dash"/>
+          </a:ln>
+        </p:spPr>
+        <p:txBody>
+          <a:bodyPr/>
+          <a:lstStyle/>
+          <a:p>
+            <a:endParaRPr lang="ru-RU"/>
+          </a:p>
+        </p:txBody>
+      </p:sp>
+      <p:sp>
+        <p:nvSpPr>
+          <p:cNvPr id="14" name="Shape 12"/>
+          <p:cNvSpPr/>
+          <p:nvPr/>
+        </p:nvSpPr>
+        <p:spPr>
+          <a:xfrm>
+            <a:off x="7132320" y="1188720"/>
+            <a:ext cx="1554480" cy="548640"/>
+          </a:xfrm>
+          <a:prstGeom prst="rect">
+            <a:avLst/>
+          </a:prstGeom>
+          <a:solidFill>
+            <a:srgbClr val="E85362"/>
+          </a:solidFill>
+          <a:ln w="12700">
+            <a:solidFill>
+              <a:srgbClr val="E85362"/>
+            </a:solidFill>
+            <a:prstDash val="solid"/>
+          </a:ln>
+        </p:spPr>
+        <p:txBody>
+          <a:bodyPr/>
+          <a:lstStyle/>
+          <a:p>
+            <a:endParaRPr lang="ru-RU"/>
+          </a:p>
+        </p:txBody>
+      </p:sp>
+      <p:sp>
+        <p:nvSpPr>
+          <p:cNvPr id="15" name="Text 13"/>
+          <p:cNvSpPr/>
+          <p:nvPr/>
+        </p:nvSpPr>
+        <p:spPr>
+          <a:xfrm>
+            <a:off x="7132320" y="1188720"/>
+            <a:ext cx="1554480" cy="548640"/>
+          </a:xfrm>
+          <a:prstGeom prst="rect">
+            <a:avLst/>
+          </a:prstGeom>
+          <a:noFill/>
+          <a:ln/>
+        </p:spPr>
+        <p:txBody>
+          <a:bodyPr wrap="square" rtlCol="0" anchor="ctr"/>
+          <a:lstStyle/>
+          <a:p>
+            <a:pPr marL="0" indent="0" algn="ctr">
+              <a:buNone/>
+            </a:pPr>
+            <a:r>
+              <a:rPr lang="en-US" sz="1000" b="1" kern="0" spc="100" dirty="0">
+                <a:solidFill>
+                  <a:srgbClr val="FFFFFF"/>
+                </a:solidFill>
+                <a:latin typeface="Montserrat SemiBold" pitchFamily="34" charset="0"/>
+                <a:ea typeface="Montserrat SemiBold" pitchFamily="34" charset="-122"/>
+                <a:cs typeface="Montserrat SemiBold" pitchFamily="34" charset="-120"/>
+              </a:rPr>
+              <a:t>POSTGRESQL</a:t>
+            </a:r>
+            <a:endParaRPr lang="en-US" sz="1000" dirty="0"/>
+          </a:p>
+          <a:p>
+            <a:pPr marL="0" indent="0" algn="ctr">
+              <a:buNone/>
+            </a:pPr>
+            <a:r>
+              <a:rPr lang="en-US" sz="1000" b="1" kern="0" spc="100" dirty="0">
+                <a:solidFill>
+                  <a:srgbClr val="FFFFFF"/>
+                </a:solidFill>
+                <a:latin typeface="Montserrat SemiBold" pitchFamily="34" charset="0"/>
+                <a:ea typeface="Montserrat SemiBold" pitchFamily="34" charset="-122"/>
+                <a:cs typeface="Montserrat SemiBold" pitchFamily="34" charset="-120"/>
+              </a:rPr>
+              <a:t>Neon</a:t>
+            </a:r>
+            <a:endParaRPr lang="en-US" sz="1000" dirty="0"/>
+          </a:p>
+        </p:txBody>
+      </p:sp>
+      <p:sp>
+        <p:nvSpPr>
+          <p:cNvPr id="16" name="Shape 14"/>
+          <p:cNvSpPr/>
+          <p:nvPr/>
+        </p:nvSpPr>
+        <p:spPr>
+          <a:xfrm>
+            <a:off x="7909560" y="1737360"/>
+            <a:ext cx="0" cy="2560320"/>
+          </a:xfrm>
+          <a:prstGeom prst="line">
+            <a:avLst/>
+          </a:prstGeom>
+          <a:noFill/>
+          <a:ln w="12700">
+            <a:solidFill>
+              <a:srgbClr val="E85362"/>
+            </a:solidFill>
+            <a:prstDash val="dash"/>
+          </a:ln>
+        </p:spPr>
+        <p:txBody>
+          <a:bodyPr/>
+          <a:lstStyle/>
+          <a:p>
+            <a:endParaRPr lang="ru-RU"/>
+          </a:p>
+        </p:txBody>
+      </p:sp>
+      <p:sp>
+        <p:nvSpPr>
+          <p:cNvPr id="17" name="Shape 15"/>
+          <p:cNvSpPr/>
+          <p:nvPr/>
+        </p:nvSpPr>
+        <p:spPr>
+          <a:xfrm>
+            <a:off x="1508760" y="2057400"/>
+            <a:ext cx="3200400" cy="0"/>
+          </a:xfrm>
+          <a:prstGeom prst="line">
+            <a:avLst/>
+          </a:prstGeom>
+          <a:noFill/>
+          <a:ln w="19050">
+            <a:solidFill>
+              <a:srgbClr val="24184E"/>
+            </a:solidFill>
+            <a:prstDash val="solid"/>
+            <a:headEnd type="none"/>
+            <a:tailEnd type="triangle"/>
+          </a:ln>
+        </p:spPr>
+        <p:txBody>
+          <a:bodyPr/>
+          <a:lstStyle/>
+          <a:p>
+            <a:endParaRPr lang="ru-RU"/>
+          </a:p>
+        </p:txBody>
+      </p:sp>
+      <p:sp>
+        <p:nvSpPr>
+          <p:cNvPr id="18" name="Text 16"/>
+          <p:cNvSpPr/>
+          <p:nvPr/>
+        </p:nvSpPr>
+        <p:spPr>
+          <a:xfrm>
+            <a:off x="1508760" y="1783080"/>
+            <a:ext cx="3200400" cy="228600"/>
+          </a:xfrm>
+          <a:prstGeom prst="rect">
+            <a:avLst/>
+          </a:prstGeom>
+          <a:noFill/>
+          <a:ln/>
+        </p:spPr>
+        <p:txBody>
+          <a:bodyPr wrap="square" lIns="0" tIns="0" rIns="0" bIns="0" rtlCol="0" anchor="ctr"/>
+          <a:lstStyle/>
+          <a:p>
+            <a:pPr marL="0" indent="0" algn="ctr">
+              <a:buNone/>
+            </a:pPr>
+            <a:r>
+              <a:rPr lang="en-US" sz="1000" dirty="0">
+                <a:solidFill>
+                  <a:srgbClr val="24184E"/>
+                </a:solidFill>
+                <a:latin typeface="Montserrat" pitchFamily="34" charset="0"/>
+                <a:ea typeface="Montserrat" pitchFamily="34" charset="-122"/>
+                <a:cs typeface="Montserrat" pitchFamily="34" charset="-120"/>
+              </a:rPr>
+              <a:t>1. POST /sync  { pushBatch, lastSyncUtc }</a:t>
+            </a:r>
+            <a:endParaRPr lang="en-US" sz="1000" dirty="0"/>
+          </a:p>
+        </p:txBody>
+      </p:sp>
+      <p:sp>
+        <p:nvSpPr>
+          <p:cNvPr id="19" name="Shape 17"/>
+          <p:cNvSpPr/>
+          <p:nvPr/>
+        </p:nvSpPr>
+        <p:spPr>
+          <a:xfrm>
+            <a:off x="4709160" y="2606040"/>
+            <a:ext cx="3200400" cy="0"/>
+          </a:xfrm>
+          <a:prstGeom prst="line">
+            <a:avLst/>
+          </a:prstGeom>
+          <a:noFill/>
+          <a:ln w="19050">
+            <a:solidFill>
+              <a:srgbClr val="24184E"/>
+            </a:solidFill>
+            <a:prstDash val="solid"/>
+            <a:headEnd type="none"/>
+            <a:tailEnd type="triangle"/>
+          </a:ln>
+        </p:spPr>
+        <p:txBody>
+          <a:bodyPr/>
+          <a:lstStyle/>
+          <a:p>
+            <a:endParaRPr lang="ru-RU"/>
+          </a:p>
+        </p:txBody>
+      </p:sp>
+      <p:sp>
+        <p:nvSpPr>
+          <p:cNvPr id="20" name="Text 18"/>
+          <p:cNvSpPr/>
+          <p:nvPr/>
+        </p:nvSpPr>
+        <p:spPr>
+          <a:xfrm>
+            <a:off x="4709160" y="2331720"/>
+            <a:ext cx="3200400" cy="228600"/>
+          </a:xfrm>
+          <a:prstGeom prst="rect">
+            <a:avLst/>
+          </a:prstGeom>
+          <a:noFill/>
+          <a:ln/>
+        </p:spPr>
+        <p:txBody>
+          <a:bodyPr wrap="square" lIns="0" tIns="0" rIns="0" bIns="0" rtlCol="0" anchor="ctr"/>
+          <a:lstStyle/>
+          <a:p>
+            <a:pPr marL="0" indent="0" algn="ctr">
+              <a:buNone/>
+            </a:pPr>
+            <a:r>
+              <a:rPr lang="en-US" sz="1000" dirty="0">
+                <a:solidFill>
+                  <a:srgbClr val="24184E"/>
+                </a:solidFill>
+                <a:latin typeface="Montserrat" pitchFamily="34" charset="0"/>
+                <a:ea typeface="Montserrat" pitchFamily="34" charset="-122"/>
+                <a:cs typeface="Montserrat" pitchFamily="34" charset="-120"/>
+              </a:rPr>
+              <a:t>2. UPSERT (LWW: UpdatedAt)</a:t>
+            </a:r>
+            <a:endParaRPr lang="en-US" sz="1000" dirty="0"/>
+          </a:p>
+        </p:txBody>
+      </p:sp>
+      <p:sp>
+        <p:nvSpPr>
+          <p:cNvPr id="21" name="Shape 19"/>
+          <p:cNvSpPr/>
+          <p:nvPr/>
+        </p:nvSpPr>
+        <p:spPr>
+          <a:xfrm>
+            <a:off x="4709160" y="3154680"/>
+            <a:ext cx="3200400" cy="0"/>
+          </a:xfrm>
+          <a:prstGeom prst="line">
+            <a:avLst/>
+          </a:prstGeom>
+          <a:noFill/>
+          <a:ln w="19050">
+            <a:solidFill>
+              <a:srgbClr val="24184E"/>
+            </a:solidFill>
+            <a:prstDash val="dash"/>
+            <a:headEnd type="triangle"/>
+            <a:tailEnd type="none"/>
+          </a:ln>
+        </p:spPr>
+        <p:txBody>
+          <a:bodyPr/>
+          <a:lstStyle/>
+          <a:p>
+            <a:endParaRPr lang="ru-RU"/>
+          </a:p>
+        </p:txBody>
+      </p:sp>
+      <p:sp>
+        <p:nvSpPr>
+          <p:cNvPr id="22" name="Text 20"/>
+          <p:cNvSpPr/>
+          <p:nvPr/>
+        </p:nvSpPr>
+        <p:spPr>
+          <a:xfrm>
+            <a:off x="4709160" y="2880360"/>
+            <a:ext cx="3200400" cy="228600"/>
+          </a:xfrm>
+          <a:prstGeom prst="rect">
+            <a:avLst/>
+          </a:prstGeom>
+          <a:noFill/>
+          <a:ln/>
+        </p:spPr>
+        <p:txBody>
+          <a:bodyPr wrap="square" lIns="0" tIns="0" rIns="0" bIns="0" rtlCol="0" anchor="ctr"/>
+          <a:lstStyle/>
+          <a:p>
+            <a:pPr marL="0" indent="0" algn="ctr">
+              <a:buNone/>
+            </a:pPr>
+            <a:r>
+              <a:rPr lang="en-US" sz="1000" dirty="0">
+                <a:solidFill>
+                  <a:srgbClr val="24184E"/>
+                </a:solidFill>
+                <a:latin typeface="Montserrat" pitchFamily="34" charset="0"/>
+                <a:ea typeface="Montserrat" pitchFamily="34" charset="-122"/>
+                <a:cs typeface="Montserrat" pitchFamily="34" charset="-120"/>
+              </a:rPr>
+              <a:t>3. COMMIT</a:t>
+            </a:r>
+            <a:endParaRPr lang="en-US" sz="1000" dirty="0"/>
+          </a:p>
+        </p:txBody>
+      </p:sp>
+      <p:sp>
+        <p:nvSpPr>
+          <p:cNvPr id="23" name="Shape 21"/>
+          <p:cNvSpPr/>
+          <p:nvPr/>
+        </p:nvSpPr>
+        <p:spPr>
+          <a:xfrm>
+            <a:off x="1508760" y="3703320"/>
+            <a:ext cx="3200400" cy="0"/>
+          </a:xfrm>
+          <a:prstGeom prst="line">
+            <a:avLst/>
+          </a:prstGeom>
+          <a:noFill/>
+          <a:ln w="19050">
+            <a:solidFill>
+              <a:srgbClr val="24184E"/>
+            </a:solidFill>
+            <a:prstDash val="dash"/>
+            <a:headEnd type="triangle"/>
+            <a:tailEnd type="none"/>
+          </a:ln>
+        </p:spPr>
+        <p:txBody>
+          <a:bodyPr/>
+          <a:lstStyle/>
+          <a:p>
+            <a:endParaRPr lang="ru-RU"/>
+          </a:p>
+        </p:txBody>
+      </p:sp>
+      <p:sp>
+        <p:nvSpPr>
+          <p:cNvPr id="24" name="Text 22"/>
+          <p:cNvSpPr/>
+          <p:nvPr/>
+        </p:nvSpPr>
+        <p:spPr>
+          <a:xfrm>
+            <a:off x="1508760" y="3429000"/>
+            <a:ext cx="3200400" cy="228600"/>
+          </a:xfrm>
+          <a:prstGeom prst="rect">
+            <a:avLst/>
+          </a:prstGeom>
+          <a:noFill/>
+          <a:ln/>
+        </p:spPr>
+        <p:txBody>
+          <a:bodyPr wrap="square" lIns="0" tIns="0" rIns="0" bIns="0" rtlCol="0" anchor="ctr"/>
+          <a:lstStyle/>
+          <a:p>
+            <a:pPr marL="0" indent="0" algn="ctr">
+              <a:buNone/>
+            </a:pPr>
+            <a:r>
+              <a:rPr lang="en-US" sz="1000" dirty="0">
+                <a:solidFill>
+                  <a:srgbClr val="24184E"/>
+                </a:solidFill>
+                <a:latin typeface="Montserrat" pitchFamily="34" charset="0"/>
+                <a:ea typeface="Montserrat" pitchFamily="34" charset="-122"/>
+                <a:cs typeface="Montserrat" pitchFamily="34" charset="-120"/>
+              </a:rPr>
+              <a:t>4. HTTP 200 { pullBatch, serverTimeUtc }</a:t>
+            </a:r>
+            <a:endParaRPr lang="en-US" sz="1000" dirty="0"/>
+          </a:p>
+        </p:txBody>
+      </p:sp>
+      <p:sp>
+        <p:nvSpPr>
+          <p:cNvPr id="25" name="Shape 23"/>
+          <p:cNvSpPr/>
+          <p:nvPr/>
+        </p:nvSpPr>
+        <p:spPr>
+          <a:xfrm>
+            <a:off x="502920" y="4343400"/>
+            <a:ext cx="8275320" cy="411480"/>
+          </a:xfrm>
+          <a:prstGeom prst="rect">
+            <a:avLst/>
+          </a:prstGeom>
+          <a:solidFill>
+            <a:srgbClr val="E8E0F7"/>
+          </a:solidFill>
+          <a:ln w="6350">
+            <a:solidFill>
+              <a:srgbClr val="372579"/>
+            </a:solidFill>
+            <a:prstDash val="solid"/>
+          </a:ln>
+        </p:spPr>
+        <p:txBody>
+          <a:bodyPr/>
+          <a:lstStyle/>
+          <a:p>
+            <a:endParaRPr lang="ru-RU"/>
+          </a:p>
+        </p:txBody>
+      </p:sp>
+      <p:sp>
+        <p:nvSpPr>
+          <p:cNvPr id="26" name="Shape 24"/>
+          <p:cNvSpPr/>
+          <p:nvPr/>
+        </p:nvSpPr>
+        <p:spPr>
+          <a:xfrm>
+            <a:off x="502920" y="4343400"/>
+            <a:ext cx="91440" cy="411480"/>
+          </a:xfrm>
+          <a:prstGeom prst="rect">
+            <a:avLst/>
+          </a:prstGeom>
+          <a:solidFill>
+            <a:srgbClr val="E85362"/>
+          </a:solidFill>
+          <a:ln w="12700">
+            <a:solidFill>
+              <a:srgbClr val="E85362"/>
+            </a:solidFill>
+            <a:prstDash val="solid"/>
+          </a:ln>
+        </p:spPr>
+        <p:txBody>
+          <a:bodyPr/>
+          <a:lstStyle/>
+          <a:p>
+            <a:endParaRPr lang="ru-RU"/>
+          </a:p>
+        </p:txBody>
+      </p:sp>
+      <p:sp>
+        <p:nvSpPr>
+          <p:cNvPr id="27" name="Text 25"/>
+          <p:cNvSpPr/>
+          <p:nvPr/>
+        </p:nvSpPr>
+        <p:spPr>
+          <a:xfrm>
+            <a:off x="731520" y="4361688"/>
+            <a:ext cx="8001000" cy="365760"/>
+          </a:xfrm>
+          <a:prstGeom prst="rect">
+            <a:avLst/>
+          </a:prstGeom>
+          <a:noFill/>
+          <a:ln/>
+        </p:spPr>
+        <p:txBody>
+          <a:bodyPr wrap="square" lIns="0" tIns="0" rIns="0" bIns="0" rtlCol="0" anchor="ctr"/>
+          <a:lstStyle/>
+          <a:p>
+            <a:pPr marL="0" indent="0">
+              <a:buNone/>
+            </a:pPr>
+            <a:r>
+              <a:rPr lang="en-US" sz="1100" b="1" dirty="0">
+                <a:solidFill>
+                  <a:srgbClr val="372579"/>
+                </a:solidFill>
+                <a:latin typeface="Montserrat SemiBold" pitchFamily="34" charset="0"/>
+                <a:ea typeface="Montserrat SemiBold" pitchFamily="34" charset="-122"/>
+                <a:cs typeface="Montserrat SemiBold" pitchFamily="34" charset="-120"/>
+              </a:rPr>
+              <a:t>LWW: </a:t>
+            </a:r>
+            <a:r>
+              <a:rPr lang="en-US" sz="1100" dirty="0">
+                <a:solidFill>
+                  <a:srgbClr val="24184E"/>
+                </a:solidFill>
+                <a:latin typeface="Consolas" pitchFamily="34" charset="0"/>
+                <a:ea typeface="Consolas" pitchFamily="34" charset="-122"/>
+                <a:cs typeface="Consolas" pitchFamily="34" charset="-120"/>
+              </a:rPr>
+              <a:t>ON CONFLICT(SyncId) DO UPDATE WHERE excluded.UpdatedAt &gt; existing.UpdatedAt</a:t>
+            </a:r>
+            <a:endParaRPr lang="en-US" sz="1100" dirty="0"/>
+          </a:p>
+        </p:txBody>
+      </p:sp>
+    </p:spTree>
+  </p:cSld>
+  <p:clrMapOvr>
+    <a:masterClrMapping/>
+  </p:clrMapOvr>
+</p:sld>
+</file>
+
+<file path=ppt/slides/slide11.xml><?xml version="1.0" encoding="utf-8"?>
 <p:sld xmlns:a="http://schemas.openxmlformats.org/drawingml/2006/main" xmlns:r="http://schemas.openxmlformats.org/officeDocument/2006/relationships" xmlns:p="http://schemas.openxmlformats.org/presentationml/2006/main">
   <p:cSld name="Slide 10">
     <p:bg>
@@ -4377,7 +5314,7 @@
 </p:sld>
 </file>
 
-<file path=ppt/slides/slide11.xml><?xml version="1.0" encoding="utf-8"?>
+<file path=ppt/slides/slide12.xml><?xml version="1.0" encoding="utf-8"?>
 <p:sld xmlns:a="http://schemas.openxmlformats.org/drawingml/2006/main" xmlns:r="http://schemas.openxmlformats.org/officeDocument/2006/relationships" xmlns:p="http://schemas.openxmlformats.org/presentationml/2006/main">
   <p:cSld name="Slide 11">
     <p:bg>
@@ -5320,7 +6257,7 @@
 </p:sld>
 </file>
 
-<file path=ppt/slides/slide12.xml><?xml version="1.0" encoding="utf-8"?>
+<file path=ppt/slides/slide13.xml><?xml version="1.0" encoding="utf-8"?>
 <p:sld xmlns:a="http://schemas.openxmlformats.org/drawingml/2006/main" xmlns:r="http://schemas.openxmlformats.org/officeDocument/2006/relationships" xmlns:p="http://schemas.openxmlformats.org/presentationml/2006/main">
   <p:cSld name="Slide 12">
     <p:bg>
@@ -12183,6 +13120,66 @@
 
 <file path=ppt/slides/slide6.xml><?xml version="1.0" encoding="utf-8"?>
 <p:sld xmlns:a="http://schemas.openxmlformats.org/drawingml/2006/main" xmlns:r="http://schemas.openxmlformats.org/officeDocument/2006/relationships" xmlns:p="http://schemas.openxmlformats.org/presentationml/2006/main">
+  <p:cSld>
+    <p:spTree>
+      <p:nvGrpSpPr>
+        <p:cNvPr id="1" name=""/>
+        <p:cNvGrpSpPr/>
+        <p:nvPr/>
+      </p:nvGrpSpPr>
+      <p:grpSpPr>
+        <a:xfrm>
+          <a:off x="0" y="0"/>
+          <a:ext cx="0" cy="0"/>
+          <a:chOff x="0" y="0"/>
+          <a:chExt cx="0" cy="0"/>
+        </a:xfrm>
+      </p:grpSpPr>
+      <p:pic>
+        <p:nvPicPr>
+          <p:cNvPr id="21" name="Рисунок 20">
+            <a:extLst>
+              <a:ext uri="{FF2B5EF4-FFF2-40B4-BE49-F238E27FC236}">
+                <a16:creationId xmlns:a16="http://schemas.microsoft.com/office/drawing/2014/main" id="{28242E1A-FE70-2B5B-3649-35DEFBAEAA76}"/>
+              </a:ext>
+            </a:extLst>
+          </p:cNvPr>
+          <p:cNvPicPr>
+            <a:picLocks noChangeAspect="1"/>
+          </p:cNvPicPr>
+          <p:nvPr/>
+        </p:nvPicPr>
+        <p:blipFill>
+          <a:blip r:embed="rId2"/>
+          <a:stretch>
+            <a:fillRect/>
+          </a:stretch>
+        </p:blipFill>
+        <p:spPr>
+          <a:xfrm>
+            <a:off x="914859" y="359664"/>
+            <a:ext cx="7180629" cy="4249156"/>
+          </a:xfrm>
+          <a:prstGeom prst="rect">
+            <a:avLst/>
+          </a:prstGeom>
+        </p:spPr>
+      </p:pic>
+    </p:spTree>
+    <p:extLst>
+      <p:ext uri="{BB962C8B-B14F-4D97-AF65-F5344CB8AC3E}">
+        <p14:creationId xmlns:p14="http://schemas.microsoft.com/office/powerpoint/2010/main" val="3193409749"/>
+      </p:ext>
+    </p:extLst>
+  </p:cSld>
+  <p:clrMapOvr>
+    <a:masterClrMapping/>
+  </p:clrMapOvr>
+</p:sld>
+</file>
+
+<file path=ppt/slides/slide7.xml><?xml version="1.0" encoding="utf-8"?>
+<p:sld xmlns:a="http://schemas.openxmlformats.org/drawingml/2006/main" xmlns:r="http://schemas.openxmlformats.org/officeDocument/2006/relationships" xmlns:p="http://schemas.openxmlformats.org/presentationml/2006/main">
   <p:cSld name="Slide 6">
     <p:bg>
       <p:bgPr>
@@ -13303,7 +14300,7 @@
 </p:sld>
 </file>
 
-<file path=ppt/slides/slide7.xml><?xml version="1.0" encoding="utf-8"?>
+<file path=ppt/slides/slide8.xml><?xml version="1.0" encoding="utf-8"?>
 <p:sld xmlns:a="http://schemas.openxmlformats.org/drawingml/2006/main" xmlns:r="http://schemas.openxmlformats.org/officeDocument/2006/relationships" xmlns:p="http://schemas.openxmlformats.org/presentationml/2006/main">
   <p:cSld name="Slide 7">
     <p:bg>
@@ -14687,7 +15684,7 @@
 </p:sld>
 </file>
 
-<file path=ppt/slides/slide8.xml><?xml version="1.0" encoding="utf-8"?>
+<file path=ppt/slides/slide9.xml><?xml version="1.0" encoding="utf-8"?>
 <p:sld xmlns:a="http://schemas.openxmlformats.org/drawingml/2006/main" xmlns:r="http://schemas.openxmlformats.org/officeDocument/2006/relationships" xmlns:p="http://schemas.openxmlformats.org/presentationml/2006/main">
   <p:cSld name="Slide 8">
     <p:bg>
@@ -15242,1002 +16239,6 @@
               <a:t>0,082 кг</a:t>
             </a:r>
             <a:endParaRPr lang="en-US" sz="1000" dirty="0"/>
-          </a:p>
-        </p:txBody>
-      </p:sp>
-    </p:spTree>
-  </p:cSld>
-  <p:clrMapOvr>
-    <a:masterClrMapping/>
-  </p:clrMapOvr>
-</p:sld>
-</file>
-
-<file path=ppt/slides/slide9.xml><?xml version="1.0" encoding="utf-8"?>
-<p:sld xmlns:a="http://schemas.openxmlformats.org/drawingml/2006/main" xmlns:r="http://schemas.openxmlformats.org/officeDocument/2006/relationships" xmlns:p="http://schemas.openxmlformats.org/presentationml/2006/main">
-  <p:cSld name="Slide 9">
-    <p:bg>
-      <p:bgPr>
-        <a:solidFill>
-          <a:srgbClr val="FFFFFF"/>
-        </a:solidFill>
-        <a:effectLst/>
-      </p:bgPr>
-    </p:bg>
-    <p:spTree>
-      <p:nvGrpSpPr>
-        <p:cNvPr id="1" name=""/>
-        <p:cNvGrpSpPr/>
-        <p:nvPr/>
-      </p:nvGrpSpPr>
-      <p:grpSpPr>
-        <a:xfrm>
-          <a:off x="0" y="0"/>
-          <a:ext cx="0" cy="0"/>
-          <a:chOff x="0" y="0"/>
-          <a:chExt cx="0" cy="0"/>
-        </a:xfrm>
-      </p:grpSpPr>
-      <p:sp>
-        <p:nvSpPr>
-          <p:cNvPr id="2" name="Shape 0"/>
-          <p:cNvSpPr/>
-          <p:nvPr/>
-        </p:nvSpPr>
-        <p:spPr>
-          <a:xfrm>
-            <a:off x="0" y="0"/>
-            <a:ext cx="228600" cy="5143500"/>
-          </a:xfrm>
-          <a:prstGeom prst="rect">
-            <a:avLst/>
-          </a:prstGeom>
-          <a:solidFill>
-            <a:srgbClr val="372579"/>
-          </a:solidFill>
-          <a:ln w="12700">
-            <a:solidFill>
-              <a:srgbClr val="372579"/>
-            </a:solidFill>
-            <a:prstDash val="solid"/>
-          </a:ln>
-        </p:spPr>
-        <p:txBody>
-          <a:bodyPr/>
-          <a:lstStyle/>
-          <a:p>
-            <a:endParaRPr lang="ru-RU"/>
-          </a:p>
-        </p:txBody>
-      </p:sp>
-      <p:sp>
-        <p:nvSpPr>
-          <p:cNvPr id="3" name="Shape 1"/>
-          <p:cNvSpPr/>
-          <p:nvPr/>
-        </p:nvSpPr>
-        <p:spPr>
-          <a:xfrm>
-            <a:off x="0" y="365760"/>
-            <a:ext cx="228600" cy="594360"/>
-          </a:xfrm>
-          <a:prstGeom prst="rect">
-            <a:avLst/>
-          </a:prstGeom>
-          <a:solidFill>
-            <a:srgbClr val="E85362"/>
-          </a:solidFill>
-          <a:ln w="12700">
-            <a:solidFill>
-              <a:srgbClr val="E85362"/>
-            </a:solidFill>
-            <a:prstDash val="solid"/>
-          </a:ln>
-        </p:spPr>
-        <p:txBody>
-          <a:bodyPr/>
-          <a:lstStyle/>
-          <a:p>
-            <a:endParaRPr lang="ru-RU"/>
-          </a:p>
-        </p:txBody>
-      </p:sp>
-      <p:sp>
-        <p:nvSpPr>
-          <p:cNvPr id="4" name="Text 2"/>
-          <p:cNvSpPr/>
-          <p:nvPr/>
-        </p:nvSpPr>
-        <p:spPr>
-          <a:xfrm>
-            <a:off x="502920" y="320040"/>
-            <a:ext cx="8046720" cy="640080"/>
-          </a:xfrm>
-          <a:prstGeom prst="rect">
-            <a:avLst/>
-          </a:prstGeom>
-          <a:noFill/>
-          <a:ln/>
-        </p:spPr>
-        <p:txBody>
-          <a:bodyPr wrap="square" lIns="0" tIns="0" rIns="0" bIns="0" rtlCol="0" anchor="ctr"/>
-          <a:lstStyle/>
-          <a:p>
-            <a:pPr marL="0" indent="0">
-              <a:buNone/>
-            </a:pPr>
-            <a:r>
-              <a:rPr lang="en-US" sz="2800" b="1" dirty="0">
-                <a:solidFill>
-                  <a:srgbClr val="24184E"/>
-                </a:solidFill>
-                <a:latin typeface="Montserrat SemiBold" pitchFamily="34" charset="0"/>
-                <a:ea typeface="Montserrat SemiBold" pitchFamily="34" charset="-122"/>
-                <a:cs typeface="Montserrat SemiBold" pitchFamily="34" charset="-120"/>
-              </a:rPr>
-              <a:t>Облачная синхронизация</a:t>
-            </a:r>
-            <a:endParaRPr lang="en-US" sz="2800" dirty="0"/>
-          </a:p>
-        </p:txBody>
-      </p:sp>
-      <p:sp>
-        <p:nvSpPr>
-          <p:cNvPr id="5" name="Shape 3"/>
-          <p:cNvSpPr/>
-          <p:nvPr/>
-        </p:nvSpPr>
-        <p:spPr>
-          <a:xfrm>
-            <a:off x="502920" y="960120"/>
-            <a:ext cx="8275320" cy="0"/>
-          </a:xfrm>
-          <a:prstGeom prst="line">
-            <a:avLst/>
-          </a:prstGeom>
-          <a:noFill/>
-          <a:ln w="12700">
-            <a:solidFill>
-              <a:srgbClr val="E8E0F7"/>
-            </a:solidFill>
-            <a:prstDash val="solid"/>
-          </a:ln>
-        </p:spPr>
-        <p:txBody>
-          <a:bodyPr/>
-          <a:lstStyle/>
-          <a:p>
-            <a:endParaRPr lang="ru-RU"/>
-          </a:p>
-        </p:txBody>
-      </p:sp>
-      <p:sp>
-        <p:nvSpPr>
-          <p:cNvPr id="6" name="Text 4"/>
-          <p:cNvSpPr/>
-          <p:nvPr/>
-        </p:nvSpPr>
-        <p:spPr>
-          <a:xfrm>
-            <a:off x="502920" y="4846320"/>
-            <a:ext cx="5486400" cy="228600"/>
-          </a:xfrm>
-          <a:prstGeom prst="rect">
-            <a:avLst/>
-          </a:prstGeom>
-          <a:noFill/>
-          <a:ln/>
-        </p:spPr>
-        <p:txBody>
-          <a:bodyPr wrap="square" rtlCol="0" anchor="ctr"/>
-          <a:lstStyle/>
-          <a:p>
-            <a:pPr marL="0" indent="0" algn="l">
-              <a:buNone/>
-            </a:pPr>
-            <a:r>
-              <a:rPr lang="en-US" sz="1000" i="1" dirty="0">
-                <a:solidFill>
-                  <a:srgbClr val="6B6280"/>
-                </a:solidFill>
-                <a:latin typeface="Montserrat" pitchFamily="34" charset="0"/>
-                <a:ea typeface="Montserrat" pitchFamily="34" charset="-122"/>
-                <a:cs typeface="Montserrat" pitchFamily="34" charset="-120"/>
-              </a:rPr>
-              <a:t>FitApp · ВКР · МТУСИ, 2026</a:t>
-            </a:r>
-            <a:endParaRPr lang="en-US" sz="1000" dirty="0"/>
-          </a:p>
-        </p:txBody>
-      </p:sp>
-      <p:sp>
-        <p:nvSpPr>
-          <p:cNvPr id="7" name="Text 5"/>
-          <p:cNvSpPr/>
-          <p:nvPr/>
-        </p:nvSpPr>
-        <p:spPr>
-          <a:xfrm>
-            <a:off x="7772400" y="4846320"/>
-            <a:ext cx="1188720" cy="228600"/>
-          </a:xfrm>
-          <a:prstGeom prst="rect">
-            <a:avLst/>
-          </a:prstGeom>
-          <a:noFill/>
-          <a:ln/>
-        </p:spPr>
-        <p:txBody>
-          <a:bodyPr wrap="square" rtlCol="0" anchor="ctr"/>
-          <a:lstStyle/>
-          <a:p>
-            <a:pPr marL="0" indent="0" algn="r">
-              <a:buNone/>
-            </a:pPr>
-            <a:r>
-              <a:rPr lang="en-US" sz="1000" dirty="0">
-                <a:solidFill>
-                  <a:srgbClr val="6B6280"/>
-                </a:solidFill>
-                <a:latin typeface="Montserrat" pitchFamily="34" charset="0"/>
-                <a:ea typeface="Montserrat" pitchFamily="34" charset="-122"/>
-                <a:cs typeface="Montserrat" pitchFamily="34" charset="-120"/>
-              </a:rPr>
-              <a:t>9 / 12</a:t>
-            </a:r>
-            <a:endParaRPr lang="en-US" sz="1000" dirty="0"/>
-          </a:p>
-        </p:txBody>
-      </p:sp>
-      <p:sp>
-        <p:nvSpPr>
-          <p:cNvPr id="8" name="Shape 6"/>
-          <p:cNvSpPr/>
-          <p:nvPr/>
-        </p:nvSpPr>
-        <p:spPr>
-          <a:xfrm>
-            <a:off x="731520" y="1188720"/>
-            <a:ext cx="1554480" cy="548640"/>
-          </a:xfrm>
-          <a:prstGeom prst="rect">
-            <a:avLst/>
-          </a:prstGeom>
-          <a:solidFill>
-            <a:srgbClr val="372579"/>
-          </a:solidFill>
-          <a:ln w="12700">
-            <a:solidFill>
-              <a:srgbClr val="372579"/>
-            </a:solidFill>
-            <a:prstDash val="solid"/>
-          </a:ln>
-        </p:spPr>
-        <p:txBody>
-          <a:bodyPr/>
-          <a:lstStyle/>
-          <a:p>
-            <a:endParaRPr lang="ru-RU"/>
-          </a:p>
-        </p:txBody>
-      </p:sp>
-      <p:sp>
-        <p:nvSpPr>
-          <p:cNvPr id="9" name="Text 7"/>
-          <p:cNvSpPr/>
-          <p:nvPr/>
-        </p:nvSpPr>
-        <p:spPr>
-          <a:xfrm>
-            <a:off x="731520" y="1188720"/>
-            <a:ext cx="1554480" cy="548640"/>
-          </a:xfrm>
-          <a:prstGeom prst="rect">
-            <a:avLst/>
-          </a:prstGeom>
-          <a:noFill/>
-          <a:ln/>
-        </p:spPr>
-        <p:txBody>
-          <a:bodyPr wrap="square" rtlCol="0" anchor="ctr"/>
-          <a:lstStyle/>
-          <a:p>
-            <a:pPr marL="0" indent="0" algn="ctr">
-              <a:buNone/>
-            </a:pPr>
-            <a:r>
-              <a:rPr lang="en-US" sz="1000" b="1" kern="0" spc="100" dirty="0">
-                <a:solidFill>
-                  <a:srgbClr val="FFFFFF"/>
-                </a:solidFill>
-                <a:latin typeface="Montserrat SemiBold" pitchFamily="34" charset="0"/>
-                <a:ea typeface="Montserrat SemiBold" pitchFamily="34" charset="-122"/>
-                <a:cs typeface="Montserrat SemiBold" pitchFamily="34" charset="-120"/>
-              </a:rPr>
-              <a:t>КЛИЕНТ</a:t>
-            </a:r>
-            <a:endParaRPr lang="en-US" sz="1000" dirty="0"/>
-          </a:p>
-          <a:p>
-            <a:pPr marL="0" indent="0" algn="ctr">
-              <a:buNone/>
-            </a:pPr>
-            <a:r>
-              <a:rPr lang="en-US" sz="1000" b="1" kern="0" spc="100" dirty="0">
-                <a:solidFill>
-                  <a:srgbClr val="FFFFFF"/>
-                </a:solidFill>
-                <a:latin typeface="Montserrat SemiBold" pitchFamily="34" charset="0"/>
-                <a:ea typeface="Montserrat SemiBold" pitchFamily="34" charset="-122"/>
-                <a:cs typeface="Montserrat SemiBold" pitchFamily="34" charset="-120"/>
-              </a:rPr>
-              <a:t>.NET MAUI</a:t>
-            </a:r>
-            <a:endParaRPr lang="en-US" sz="1000" dirty="0"/>
-          </a:p>
-        </p:txBody>
-      </p:sp>
-      <p:sp>
-        <p:nvSpPr>
-          <p:cNvPr id="10" name="Shape 8"/>
-          <p:cNvSpPr/>
-          <p:nvPr/>
-        </p:nvSpPr>
-        <p:spPr>
-          <a:xfrm>
-            <a:off x="1508760" y="1737360"/>
-            <a:ext cx="0" cy="2560320"/>
-          </a:xfrm>
-          <a:prstGeom prst="line">
-            <a:avLst/>
-          </a:prstGeom>
-          <a:noFill/>
-          <a:ln w="12700">
-            <a:solidFill>
-              <a:srgbClr val="372579"/>
-            </a:solidFill>
-            <a:prstDash val="dash"/>
-          </a:ln>
-        </p:spPr>
-        <p:txBody>
-          <a:bodyPr/>
-          <a:lstStyle/>
-          <a:p>
-            <a:endParaRPr lang="ru-RU"/>
-          </a:p>
-        </p:txBody>
-      </p:sp>
-      <p:sp>
-        <p:nvSpPr>
-          <p:cNvPr id="11" name="Shape 9"/>
-          <p:cNvSpPr/>
-          <p:nvPr/>
-        </p:nvSpPr>
-        <p:spPr>
-          <a:xfrm>
-            <a:off x="3931920" y="1188720"/>
-            <a:ext cx="1554480" cy="548640"/>
-          </a:xfrm>
-          <a:prstGeom prst="rect">
-            <a:avLst/>
-          </a:prstGeom>
-          <a:solidFill>
-            <a:srgbClr val="47309C"/>
-          </a:solidFill>
-          <a:ln w="12700">
-            <a:solidFill>
-              <a:srgbClr val="47309C"/>
-            </a:solidFill>
-            <a:prstDash val="solid"/>
-          </a:ln>
-        </p:spPr>
-        <p:txBody>
-          <a:bodyPr/>
-          <a:lstStyle/>
-          <a:p>
-            <a:endParaRPr lang="ru-RU"/>
-          </a:p>
-        </p:txBody>
-      </p:sp>
-      <p:sp>
-        <p:nvSpPr>
-          <p:cNvPr id="12" name="Text 10"/>
-          <p:cNvSpPr/>
-          <p:nvPr/>
-        </p:nvSpPr>
-        <p:spPr>
-          <a:xfrm>
-            <a:off x="3931920" y="1188720"/>
-            <a:ext cx="1554480" cy="548640"/>
-          </a:xfrm>
-          <a:prstGeom prst="rect">
-            <a:avLst/>
-          </a:prstGeom>
-          <a:noFill/>
-          <a:ln/>
-        </p:spPr>
-        <p:txBody>
-          <a:bodyPr wrap="square" rtlCol="0" anchor="ctr"/>
-          <a:lstStyle/>
-          <a:p>
-            <a:pPr marL="0" indent="0" algn="ctr">
-              <a:buNone/>
-            </a:pPr>
-            <a:r>
-              <a:rPr lang="en-US" sz="1000" b="1" kern="0" spc="100" dirty="0">
-                <a:solidFill>
-                  <a:srgbClr val="FFFFFF"/>
-                </a:solidFill>
-                <a:latin typeface="Montserrat SemiBold" pitchFamily="34" charset="0"/>
-                <a:ea typeface="Montserrat SemiBold" pitchFamily="34" charset="-122"/>
-                <a:cs typeface="Montserrat SemiBold" pitchFamily="34" charset="-120"/>
-              </a:rPr>
-              <a:t>СЕРВЕР</a:t>
-            </a:r>
-            <a:endParaRPr lang="en-US" sz="1000" dirty="0"/>
-          </a:p>
-          <a:p>
-            <a:pPr marL="0" indent="0" algn="ctr">
-              <a:buNone/>
-            </a:pPr>
-            <a:r>
-              <a:rPr lang="en-US" sz="1000" b="1" kern="0" spc="100" dirty="0">
-                <a:solidFill>
-                  <a:srgbClr val="FFFFFF"/>
-                </a:solidFill>
-                <a:latin typeface="Montserrat SemiBold" pitchFamily="34" charset="0"/>
-                <a:ea typeface="Montserrat SemiBold" pitchFamily="34" charset="-122"/>
-                <a:cs typeface="Montserrat SemiBold" pitchFamily="34" charset="-120"/>
-              </a:rPr>
-              <a:t>ASP.NET Core</a:t>
-            </a:r>
-            <a:endParaRPr lang="en-US" sz="1000" dirty="0"/>
-          </a:p>
-        </p:txBody>
-      </p:sp>
-      <p:sp>
-        <p:nvSpPr>
-          <p:cNvPr id="13" name="Shape 11"/>
-          <p:cNvSpPr/>
-          <p:nvPr/>
-        </p:nvSpPr>
-        <p:spPr>
-          <a:xfrm>
-            <a:off x="4709160" y="1737360"/>
-            <a:ext cx="0" cy="2560320"/>
-          </a:xfrm>
-          <a:prstGeom prst="line">
-            <a:avLst/>
-          </a:prstGeom>
-          <a:noFill/>
-          <a:ln w="12700">
-            <a:solidFill>
-              <a:srgbClr val="47309C"/>
-            </a:solidFill>
-            <a:prstDash val="dash"/>
-          </a:ln>
-        </p:spPr>
-        <p:txBody>
-          <a:bodyPr/>
-          <a:lstStyle/>
-          <a:p>
-            <a:endParaRPr lang="ru-RU"/>
-          </a:p>
-        </p:txBody>
-      </p:sp>
-      <p:sp>
-        <p:nvSpPr>
-          <p:cNvPr id="14" name="Shape 12"/>
-          <p:cNvSpPr/>
-          <p:nvPr/>
-        </p:nvSpPr>
-        <p:spPr>
-          <a:xfrm>
-            <a:off x="7132320" y="1188720"/>
-            <a:ext cx="1554480" cy="548640"/>
-          </a:xfrm>
-          <a:prstGeom prst="rect">
-            <a:avLst/>
-          </a:prstGeom>
-          <a:solidFill>
-            <a:srgbClr val="E85362"/>
-          </a:solidFill>
-          <a:ln w="12700">
-            <a:solidFill>
-              <a:srgbClr val="E85362"/>
-            </a:solidFill>
-            <a:prstDash val="solid"/>
-          </a:ln>
-        </p:spPr>
-        <p:txBody>
-          <a:bodyPr/>
-          <a:lstStyle/>
-          <a:p>
-            <a:endParaRPr lang="ru-RU"/>
-          </a:p>
-        </p:txBody>
-      </p:sp>
-      <p:sp>
-        <p:nvSpPr>
-          <p:cNvPr id="15" name="Text 13"/>
-          <p:cNvSpPr/>
-          <p:nvPr/>
-        </p:nvSpPr>
-        <p:spPr>
-          <a:xfrm>
-            <a:off x="7132320" y="1188720"/>
-            <a:ext cx="1554480" cy="548640"/>
-          </a:xfrm>
-          <a:prstGeom prst="rect">
-            <a:avLst/>
-          </a:prstGeom>
-          <a:noFill/>
-          <a:ln/>
-        </p:spPr>
-        <p:txBody>
-          <a:bodyPr wrap="square" rtlCol="0" anchor="ctr"/>
-          <a:lstStyle/>
-          <a:p>
-            <a:pPr marL="0" indent="0" algn="ctr">
-              <a:buNone/>
-            </a:pPr>
-            <a:r>
-              <a:rPr lang="en-US" sz="1000" b="1" kern="0" spc="100" dirty="0">
-                <a:solidFill>
-                  <a:srgbClr val="FFFFFF"/>
-                </a:solidFill>
-                <a:latin typeface="Montserrat SemiBold" pitchFamily="34" charset="0"/>
-                <a:ea typeface="Montserrat SemiBold" pitchFamily="34" charset="-122"/>
-                <a:cs typeface="Montserrat SemiBold" pitchFamily="34" charset="-120"/>
-              </a:rPr>
-              <a:t>POSTGRESQL</a:t>
-            </a:r>
-            <a:endParaRPr lang="en-US" sz="1000" dirty="0"/>
-          </a:p>
-          <a:p>
-            <a:pPr marL="0" indent="0" algn="ctr">
-              <a:buNone/>
-            </a:pPr>
-            <a:r>
-              <a:rPr lang="en-US" sz="1000" b="1" kern="0" spc="100" dirty="0">
-                <a:solidFill>
-                  <a:srgbClr val="FFFFFF"/>
-                </a:solidFill>
-                <a:latin typeface="Montserrat SemiBold" pitchFamily="34" charset="0"/>
-                <a:ea typeface="Montserrat SemiBold" pitchFamily="34" charset="-122"/>
-                <a:cs typeface="Montserrat SemiBold" pitchFamily="34" charset="-120"/>
-              </a:rPr>
-              <a:t>Neon</a:t>
-            </a:r>
-            <a:endParaRPr lang="en-US" sz="1000" dirty="0"/>
-          </a:p>
-        </p:txBody>
-      </p:sp>
-      <p:sp>
-        <p:nvSpPr>
-          <p:cNvPr id="16" name="Shape 14"/>
-          <p:cNvSpPr/>
-          <p:nvPr/>
-        </p:nvSpPr>
-        <p:spPr>
-          <a:xfrm>
-            <a:off x="7909560" y="1737360"/>
-            <a:ext cx="0" cy="2560320"/>
-          </a:xfrm>
-          <a:prstGeom prst="line">
-            <a:avLst/>
-          </a:prstGeom>
-          <a:noFill/>
-          <a:ln w="12700">
-            <a:solidFill>
-              <a:srgbClr val="E85362"/>
-            </a:solidFill>
-            <a:prstDash val="dash"/>
-          </a:ln>
-        </p:spPr>
-        <p:txBody>
-          <a:bodyPr/>
-          <a:lstStyle/>
-          <a:p>
-            <a:endParaRPr lang="ru-RU"/>
-          </a:p>
-        </p:txBody>
-      </p:sp>
-      <p:sp>
-        <p:nvSpPr>
-          <p:cNvPr id="17" name="Shape 15"/>
-          <p:cNvSpPr/>
-          <p:nvPr/>
-        </p:nvSpPr>
-        <p:spPr>
-          <a:xfrm>
-            <a:off x="1508760" y="2057400"/>
-            <a:ext cx="3200400" cy="0"/>
-          </a:xfrm>
-          <a:prstGeom prst="line">
-            <a:avLst/>
-          </a:prstGeom>
-          <a:noFill/>
-          <a:ln w="19050">
-            <a:solidFill>
-              <a:srgbClr val="24184E"/>
-            </a:solidFill>
-            <a:prstDash val="solid"/>
-            <a:headEnd type="none"/>
-            <a:tailEnd type="triangle"/>
-          </a:ln>
-        </p:spPr>
-        <p:txBody>
-          <a:bodyPr/>
-          <a:lstStyle/>
-          <a:p>
-            <a:endParaRPr lang="ru-RU"/>
-          </a:p>
-        </p:txBody>
-      </p:sp>
-      <p:sp>
-        <p:nvSpPr>
-          <p:cNvPr id="18" name="Text 16"/>
-          <p:cNvSpPr/>
-          <p:nvPr/>
-        </p:nvSpPr>
-        <p:spPr>
-          <a:xfrm>
-            <a:off x="1508760" y="1783080"/>
-            <a:ext cx="3200400" cy="228600"/>
-          </a:xfrm>
-          <a:prstGeom prst="rect">
-            <a:avLst/>
-          </a:prstGeom>
-          <a:noFill/>
-          <a:ln/>
-        </p:spPr>
-        <p:txBody>
-          <a:bodyPr wrap="square" lIns="0" tIns="0" rIns="0" bIns="0" rtlCol="0" anchor="ctr"/>
-          <a:lstStyle/>
-          <a:p>
-            <a:pPr marL="0" indent="0" algn="ctr">
-              <a:buNone/>
-            </a:pPr>
-            <a:r>
-              <a:rPr lang="en-US" sz="1000" dirty="0">
-                <a:solidFill>
-                  <a:srgbClr val="24184E"/>
-                </a:solidFill>
-                <a:latin typeface="Montserrat" pitchFamily="34" charset="0"/>
-                <a:ea typeface="Montserrat" pitchFamily="34" charset="-122"/>
-                <a:cs typeface="Montserrat" pitchFamily="34" charset="-120"/>
-              </a:rPr>
-              <a:t>1. POST /sync  { pushBatch, lastSyncUtc }</a:t>
-            </a:r>
-            <a:endParaRPr lang="en-US" sz="1000" dirty="0"/>
-          </a:p>
-        </p:txBody>
-      </p:sp>
-      <p:sp>
-        <p:nvSpPr>
-          <p:cNvPr id="19" name="Shape 17"/>
-          <p:cNvSpPr/>
-          <p:nvPr/>
-        </p:nvSpPr>
-        <p:spPr>
-          <a:xfrm>
-            <a:off x="4709160" y="2606040"/>
-            <a:ext cx="3200400" cy="0"/>
-          </a:xfrm>
-          <a:prstGeom prst="line">
-            <a:avLst/>
-          </a:prstGeom>
-          <a:noFill/>
-          <a:ln w="19050">
-            <a:solidFill>
-              <a:srgbClr val="24184E"/>
-            </a:solidFill>
-            <a:prstDash val="solid"/>
-            <a:headEnd type="none"/>
-            <a:tailEnd type="triangle"/>
-          </a:ln>
-        </p:spPr>
-        <p:txBody>
-          <a:bodyPr/>
-          <a:lstStyle/>
-          <a:p>
-            <a:endParaRPr lang="ru-RU"/>
-          </a:p>
-        </p:txBody>
-      </p:sp>
-      <p:sp>
-        <p:nvSpPr>
-          <p:cNvPr id="20" name="Text 18"/>
-          <p:cNvSpPr/>
-          <p:nvPr/>
-        </p:nvSpPr>
-        <p:spPr>
-          <a:xfrm>
-            <a:off x="4709160" y="2331720"/>
-            <a:ext cx="3200400" cy="228600"/>
-          </a:xfrm>
-          <a:prstGeom prst="rect">
-            <a:avLst/>
-          </a:prstGeom>
-          <a:noFill/>
-          <a:ln/>
-        </p:spPr>
-        <p:txBody>
-          <a:bodyPr wrap="square" lIns="0" tIns="0" rIns="0" bIns="0" rtlCol="0" anchor="ctr"/>
-          <a:lstStyle/>
-          <a:p>
-            <a:pPr marL="0" indent="0" algn="ctr">
-              <a:buNone/>
-            </a:pPr>
-            <a:r>
-              <a:rPr lang="en-US" sz="1000" dirty="0">
-                <a:solidFill>
-                  <a:srgbClr val="24184E"/>
-                </a:solidFill>
-                <a:latin typeface="Montserrat" pitchFamily="34" charset="0"/>
-                <a:ea typeface="Montserrat" pitchFamily="34" charset="-122"/>
-                <a:cs typeface="Montserrat" pitchFamily="34" charset="-120"/>
-              </a:rPr>
-              <a:t>2. UPSERT (LWW: UpdatedAt)</a:t>
-            </a:r>
-            <a:endParaRPr lang="en-US" sz="1000" dirty="0"/>
-          </a:p>
-        </p:txBody>
-      </p:sp>
-      <p:sp>
-        <p:nvSpPr>
-          <p:cNvPr id="21" name="Shape 19"/>
-          <p:cNvSpPr/>
-          <p:nvPr/>
-        </p:nvSpPr>
-        <p:spPr>
-          <a:xfrm>
-            <a:off x="4709160" y="3154680"/>
-            <a:ext cx="3200400" cy="0"/>
-          </a:xfrm>
-          <a:prstGeom prst="line">
-            <a:avLst/>
-          </a:prstGeom>
-          <a:noFill/>
-          <a:ln w="19050">
-            <a:solidFill>
-              <a:srgbClr val="24184E"/>
-            </a:solidFill>
-            <a:prstDash val="dash"/>
-            <a:headEnd type="triangle"/>
-            <a:tailEnd type="none"/>
-          </a:ln>
-        </p:spPr>
-        <p:txBody>
-          <a:bodyPr/>
-          <a:lstStyle/>
-          <a:p>
-            <a:endParaRPr lang="ru-RU"/>
-          </a:p>
-        </p:txBody>
-      </p:sp>
-      <p:sp>
-        <p:nvSpPr>
-          <p:cNvPr id="22" name="Text 20"/>
-          <p:cNvSpPr/>
-          <p:nvPr/>
-        </p:nvSpPr>
-        <p:spPr>
-          <a:xfrm>
-            <a:off x="4709160" y="2880360"/>
-            <a:ext cx="3200400" cy="228600"/>
-          </a:xfrm>
-          <a:prstGeom prst="rect">
-            <a:avLst/>
-          </a:prstGeom>
-          <a:noFill/>
-          <a:ln/>
-        </p:spPr>
-        <p:txBody>
-          <a:bodyPr wrap="square" lIns="0" tIns="0" rIns="0" bIns="0" rtlCol="0" anchor="ctr"/>
-          <a:lstStyle/>
-          <a:p>
-            <a:pPr marL="0" indent="0" algn="ctr">
-              <a:buNone/>
-            </a:pPr>
-            <a:r>
-              <a:rPr lang="en-US" sz="1000" dirty="0">
-                <a:solidFill>
-                  <a:srgbClr val="24184E"/>
-                </a:solidFill>
-                <a:latin typeface="Montserrat" pitchFamily="34" charset="0"/>
-                <a:ea typeface="Montserrat" pitchFamily="34" charset="-122"/>
-                <a:cs typeface="Montserrat" pitchFamily="34" charset="-120"/>
-              </a:rPr>
-              <a:t>3. COMMIT</a:t>
-            </a:r>
-            <a:endParaRPr lang="en-US" sz="1000" dirty="0"/>
-          </a:p>
-        </p:txBody>
-      </p:sp>
-      <p:sp>
-        <p:nvSpPr>
-          <p:cNvPr id="23" name="Shape 21"/>
-          <p:cNvSpPr/>
-          <p:nvPr/>
-        </p:nvSpPr>
-        <p:spPr>
-          <a:xfrm>
-            <a:off x="1508760" y="3703320"/>
-            <a:ext cx="3200400" cy="0"/>
-          </a:xfrm>
-          <a:prstGeom prst="line">
-            <a:avLst/>
-          </a:prstGeom>
-          <a:noFill/>
-          <a:ln w="19050">
-            <a:solidFill>
-              <a:srgbClr val="24184E"/>
-            </a:solidFill>
-            <a:prstDash val="dash"/>
-            <a:headEnd type="triangle"/>
-            <a:tailEnd type="none"/>
-          </a:ln>
-        </p:spPr>
-        <p:txBody>
-          <a:bodyPr/>
-          <a:lstStyle/>
-          <a:p>
-            <a:endParaRPr lang="ru-RU"/>
-          </a:p>
-        </p:txBody>
-      </p:sp>
-      <p:sp>
-        <p:nvSpPr>
-          <p:cNvPr id="24" name="Text 22"/>
-          <p:cNvSpPr/>
-          <p:nvPr/>
-        </p:nvSpPr>
-        <p:spPr>
-          <a:xfrm>
-            <a:off x="1508760" y="3429000"/>
-            <a:ext cx="3200400" cy="228600"/>
-          </a:xfrm>
-          <a:prstGeom prst="rect">
-            <a:avLst/>
-          </a:prstGeom>
-          <a:noFill/>
-          <a:ln/>
-        </p:spPr>
-        <p:txBody>
-          <a:bodyPr wrap="square" lIns="0" tIns="0" rIns="0" bIns="0" rtlCol="0" anchor="ctr"/>
-          <a:lstStyle/>
-          <a:p>
-            <a:pPr marL="0" indent="0" algn="ctr">
-              <a:buNone/>
-            </a:pPr>
-            <a:r>
-              <a:rPr lang="en-US" sz="1000" dirty="0">
-                <a:solidFill>
-                  <a:srgbClr val="24184E"/>
-                </a:solidFill>
-                <a:latin typeface="Montserrat" pitchFamily="34" charset="0"/>
-                <a:ea typeface="Montserrat" pitchFamily="34" charset="-122"/>
-                <a:cs typeface="Montserrat" pitchFamily="34" charset="-120"/>
-              </a:rPr>
-              <a:t>4. HTTP 200 { pullBatch, serverTimeUtc }</a:t>
-            </a:r>
-            <a:endParaRPr lang="en-US" sz="1000" dirty="0"/>
-          </a:p>
-        </p:txBody>
-      </p:sp>
-      <p:sp>
-        <p:nvSpPr>
-          <p:cNvPr id="25" name="Shape 23"/>
-          <p:cNvSpPr/>
-          <p:nvPr/>
-        </p:nvSpPr>
-        <p:spPr>
-          <a:xfrm>
-            <a:off x="502920" y="4343400"/>
-            <a:ext cx="8275320" cy="411480"/>
-          </a:xfrm>
-          <a:prstGeom prst="rect">
-            <a:avLst/>
-          </a:prstGeom>
-          <a:solidFill>
-            <a:srgbClr val="E8E0F7"/>
-          </a:solidFill>
-          <a:ln w="6350">
-            <a:solidFill>
-              <a:srgbClr val="372579"/>
-            </a:solidFill>
-            <a:prstDash val="solid"/>
-          </a:ln>
-        </p:spPr>
-        <p:txBody>
-          <a:bodyPr/>
-          <a:lstStyle/>
-          <a:p>
-            <a:endParaRPr lang="ru-RU"/>
-          </a:p>
-        </p:txBody>
-      </p:sp>
-      <p:sp>
-        <p:nvSpPr>
-          <p:cNvPr id="26" name="Shape 24"/>
-          <p:cNvSpPr/>
-          <p:nvPr/>
-        </p:nvSpPr>
-        <p:spPr>
-          <a:xfrm>
-            <a:off x="502920" y="4343400"/>
-            <a:ext cx="91440" cy="411480"/>
-          </a:xfrm>
-          <a:prstGeom prst="rect">
-            <a:avLst/>
-          </a:prstGeom>
-          <a:solidFill>
-            <a:srgbClr val="E85362"/>
-          </a:solidFill>
-          <a:ln w="12700">
-            <a:solidFill>
-              <a:srgbClr val="E85362"/>
-            </a:solidFill>
-            <a:prstDash val="solid"/>
-          </a:ln>
-        </p:spPr>
-        <p:txBody>
-          <a:bodyPr/>
-          <a:lstStyle/>
-          <a:p>
-            <a:endParaRPr lang="ru-RU"/>
-          </a:p>
-        </p:txBody>
-      </p:sp>
-      <p:sp>
-        <p:nvSpPr>
-          <p:cNvPr id="27" name="Text 25"/>
-          <p:cNvSpPr/>
-          <p:nvPr/>
-        </p:nvSpPr>
-        <p:spPr>
-          <a:xfrm>
-            <a:off x="731520" y="4361688"/>
-            <a:ext cx="8001000" cy="365760"/>
-          </a:xfrm>
-          <a:prstGeom prst="rect">
-            <a:avLst/>
-          </a:prstGeom>
-          <a:noFill/>
-          <a:ln/>
-        </p:spPr>
-        <p:txBody>
-          <a:bodyPr wrap="square" lIns="0" tIns="0" rIns="0" bIns="0" rtlCol="0" anchor="ctr"/>
-          <a:lstStyle/>
-          <a:p>
-            <a:pPr marL="0" indent="0">
-              <a:buNone/>
-            </a:pPr>
-            <a:r>
-              <a:rPr lang="en-US" sz="1100" b="1" dirty="0">
-                <a:solidFill>
-                  <a:srgbClr val="372579"/>
-                </a:solidFill>
-                <a:latin typeface="Montserrat SemiBold" pitchFamily="34" charset="0"/>
-                <a:ea typeface="Montserrat SemiBold" pitchFamily="34" charset="-122"/>
-                <a:cs typeface="Montserrat SemiBold" pitchFamily="34" charset="-120"/>
-              </a:rPr>
-              <a:t>LWW: </a:t>
-            </a:r>
-            <a:r>
-              <a:rPr lang="en-US" sz="1100" dirty="0">
-                <a:solidFill>
-                  <a:srgbClr val="24184E"/>
-                </a:solidFill>
-                <a:latin typeface="Consolas" pitchFamily="34" charset="0"/>
-                <a:ea typeface="Consolas" pitchFamily="34" charset="-122"/>
-                <a:cs typeface="Consolas" pitchFamily="34" charset="-120"/>
-              </a:rPr>
-              <a:t>ON CONFLICT(SyncId) DO UPDATE WHERE excluded.UpdatedAt &gt; existing.UpdatedAt</a:t>
-            </a:r>
-            <a:endParaRPr lang="en-US" sz="1100" dirty="0"/>
           </a:p>
         </p:txBody>
       </p:sp>
